--- a/public/slides/aa203/lecture_5.pptx
+++ b/public/slides/aa203/lecture_5.pptx
@@ -178,2643 +178,77 @@
 </p:presentation>
 </file>
 
-<file path=ppt/revisionInfo.xml><?xml version="1.0" encoding="utf-8"?>
-<p1510:revInfo xmlns:a="http://schemas.openxmlformats.org/drawingml/2006/main" xmlns:r="http://schemas.openxmlformats.org/officeDocument/2006/relationships" xmlns:p1510="http://schemas.microsoft.com/office/powerpoint/2015/10/main">
-  <p1510:revLst>
-    <p1510:client id="{85493198-F5A1-D84A-A2CA-FD6227E497BA}" v="7" dt="2025-04-14T02:09:18.534"/>
-  </p1510:revLst>
-</p1510:revInfo>
-</file>
-
 <file path=ppt/changesInfos/changesInfo1.xml><?xml version="1.0" encoding="utf-8"?>
 <pc:chgInfo xmlns:a="http://schemas.openxmlformats.org/drawingml/2006/main" xmlns:r="http://schemas.openxmlformats.org/officeDocument/2006/relationships" xmlns:ac="http://schemas.microsoft.com/office/drawing/2013/main/command" xmlns:pc="http://schemas.microsoft.com/office/powerpoint/2013/main/command">
   <pc:docChgLst>
-    <pc:chgData name="Edward Fu Schmerling" userId="c8b75dde-c097-4599-bb13-81e931e3f9a3" providerId="ADAL" clId="{31855063-63B9-441C-9407-3341D2D91A59}"/>
-    <pc:docChg chg="undo custSel addSld delSld modSld sldOrd modSection">
-      <pc:chgData name="Edward Fu Schmerling" userId="c8b75dde-c097-4599-bb13-81e931e3f9a3" providerId="ADAL" clId="{31855063-63B9-441C-9407-3341D2D91A59}" dt="2022-04-13T07:42:28.147" v="730"/>
+    <pc:chgData name="Daniele Gammelli" userId="292b8a31-f1ba-4b4c-b196-a231dc095d13" providerId="ADAL" clId="{6E670754-AB6A-5789-AA0A-6F6FD9CE3EEA}"/>
+    <pc:docChg chg="modSld">
+      <pc:chgData name="Daniele Gammelli" userId="292b8a31-f1ba-4b4c-b196-a231dc095d13" providerId="ADAL" clId="{6E670754-AB6A-5789-AA0A-6F6FD9CE3EEA}" dt="2026-08-13T21:10:26.533" v="8" actId="20577"/>
       <pc:docMkLst>
         <pc:docMk/>
       </pc:docMkLst>
-      <pc:sldChg chg="modSp mod">
-        <pc:chgData name="Edward Fu Schmerling" userId="c8b75dde-c097-4599-bb13-81e931e3f9a3" providerId="ADAL" clId="{31855063-63B9-441C-9407-3341D2D91A59}" dt="2022-04-13T06:00:51.602" v="150" actId="20577"/>
+      <pc:sldChg chg="modNotesTx">
+        <pc:chgData name="Daniele Gammelli" userId="292b8a31-f1ba-4b4c-b196-a231dc095d13" providerId="ADAL" clId="{6E670754-AB6A-5789-AA0A-6F6FD9CE3EEA}" dt="2026-08-13T21:09:54.777" v="0" actId="20577"/>
         <pc:sldMkLst>
           <pc:docMk/>
-          <pc:sldMk cId="1672827742" sldId="256"/>
+          <pc:sldMk cId="2405241836" sldId="490"/>
         </pc:sldMkLst>
       </pc:sldChg>
-      <pc:sldChg chg="add">
-        <pc:chgData name="Edward Fu Schmerling" userId="c8b75dde-c097-4599-bb13-81e931e3f9a3" providerId="ADAL" clId="{31855063-63B9-441C-9407-3341D2D91A59}" dt="2022-04-13T06:40:48.999" v="318"/>
+      <pc:sldChg chg="modNotesTx">
+        <pc:chgData name="Daniele Gammelli" userId="292b8a31-f1ba-4b4c-b196-a231dc095d13" providerId="ADAL" clId="{6E670754-AB6A-5789-AA0A-6F6FD9CE3EEA}" dt="2026-08-13T21:09:58.180" v="1" actId="20577"/>
         <pc:sldMkLst>
           <pc:docMk/>
-          <pc:sldMk cId="3140733241" sldId="334"/>
+          <pc:sldMk cId="1843183195" sldId="491"/>
         </pc:sldMkLst>
       </pc:sldChg>
-      <pc:sldChg chg="modSp add del mod modAnim">
-        <pc:chgData name="Edward Fu Schmerling" userId="c8b75dde-c097-4599-bb13-81e931e3f9a3" providerId="ADAL" clId="{31855063-63B9-441C-9407-3341D2D91A59}" dt="2022-04-13T07:37:09.743" v="634" actId="47"/>
-        <pc:sldMkLst>
-          <pc:docMk/>
-          <pc:sldMk cId="4274562965" sldId="373"/>
-        </pc:sldMkLst>
-      </pc:sldChg>
-      <pc:sldChg chg="delSp modSp add mod delAnim modAnim">
-        <pc:chgData name="Edward Fu Schmerling" userId="c8b75dde-c097-4599-bb13-81e931e3f9a3" providerId="ADAL" clId="{31855063-63B9-441C-9407-3341D2D91A59}" dt="2022-04-13T07:39:31.522" v="689" actId="20577"/>
-        <pc:sldMkLst>
-          <pc:docMk/>
-          <pc:sldMk cId="3024575377" sldId="374"/>
-        </pc:sldMkLst>
-      </pc:sldChg>
-      <pc:sldChg chg="add">
-        <pc:chgData name="Edward Fu Schmerling" userId="c8b75dde-c097-4599-bb13-81e931e3f9a3" providerId="ADAL" clId="{31855063-63B9-441C-9407-3341D2D91A59}" dt="2022-04-13T06:40:48.999" v="318"/>
-        <pc:sldMkLst>
-          <pc:docMk/>
-          <pc:sldMk cId="1432661843" sldId="375"/>
-        </pc:sldMkLst>
-      </pc:sldChg>
-      <pc:sldChg chg="modSp add mod">
-        <pc:chgData name="Edward Fu Schmerling" userId="c8b75dde-c097-4599-bb13-81e931e3f9a3" providerId="ADAL" clId="{31855063-63B9-441C-9407-3341D2D91A59}" dt="2022-04-13T07:41:24.468" v="718" actId="20577"/>
-        <pc:sldMkLst>
-          <pc:docMk/>
-          <pc:sldMk cId="188883478" sldId="376"/>
-        </pc:sldMkLst>
-      </pc:sldChg>
-      <pc:sldChg chg="modSp add mod">
-        <pc:chgData name="Edward Fu Schmerling" userId="c8b75dde-c097-4599-bb13-81e931e3f9a3" providerId="ADAL" clId="{31855063-63B9-441C-9407-3341D2D91A59}" dt="2022-04-13T07:42:17.898" v="729" actId="14100"/>
-        <pc:sldMkLst>
-          <pc:docMk/>
-          <pc:sldMk cId="3963986877" sldId="377"/>
-        </pc:sldMkLst>
-      </pc:sldChg>
-      <pc:sldChg chg="delSp add mod delAnim">
-        <pc:chgData name="Edward Fu Schmerling" userId="c8b75dde-c097-4599-bb13-81e931e3f9a3" providerId="ADAL" clId="{31855063-63B9-441C-9407-3341D2D91A59}" dt="2022-04-13T07:41:48.728" v="721" actId="478"/>
-        <pc:sldMkLst>
-          <pc:docMk/>
-          <pc:sldMk cId="4063932228" sldId="378"/>
-        </pc:sldMkLst>
-      </pc:sldChg>
-      <pc:sldChg chg="modSp add mod">
-        <pc:chgData name="Edward Fu Schmerling" userId="c8b75dde-c097-4599-bb13-81e931e3f9a3" providerId="ADAL" clId="{31855063-63B9-441C-9407-3341D2D91A59}" dt="2022-04-13T06:57:24.931" v="563" actId="403"/>
-        <pc:sldMkLst>
-          <pc:docMk/>
-          <pc:sldMk cId="1712032461" sldId="379"/>
-        </pc:sldMkLst>
-      </pc:sldChg>
-      <pc:sldChg chg="modSp add mod">
-        <pc:chgData name="Edward Fu Schmerling" userId="c8b75dde-c097-4599-bb13-81e931e3f9a3" providerId="ADAL" clId="{31855063-63B9-441C-9407-3341D2D91A59}" dt="2022-04-13T06:57:52.146" v="569" actId="14100"/>
-        <pc:sldMkLst>
-          <pc:docMk/>
-          <pc:sldMk cId="810089569" sldId="380"/>
-        </pc:sldMkLst>
-      </pc:sldChg>
-      <pc:sldChg chg="add del">
-        <pc:chgData name="Edward Fu Schmerling" userId="c8b75dde-c097-4599-bb13-81e931e3f9a3" providerId="ADAL" clId="{31855063-63B9-441C-9407-3341D2D91A59}" dt="2022-04-13T06:41:30.127" v="322" actId="47"/>
-        <pc:sldMkLst>
-          <pc:docMk/>
-          <pc:sldMk cId="3653845818" sldId="388"/>
-        </pc:sldMkLst>
-      </pc:sldChg>
-      <pc:sldChg chg="add del">
-        <pc:chgData name="Edward Fu Schmerling" userId="c8b75dde-c097-4599-bb13-81e931e3f9a3" providerId="ADAL" clId="{31855063-63B9-441C-9407-3341D2D91A59}" dt="2022-04-13T06:41:30.127" v="322" actId="47"/>
-        <pc:sldMkLst>
-          <pc:docMk/>
-          <pc:sldMk cId="1962653272" sldId="389"/>
-        </pc:sldMkLst>
-      </pc:sldChg>
-      <pc:sldChg chg="modSp add mod">
-        <pc:chgData name="Edward Fu Schmerling" userId="c8b75dde-c097-4599-bb13-81e931e3f9a3" providerId="ADAL" clId="{31855063-63B9-441C-9407-3341D2D91A59}" dt="2022-04-13T06:59:31.375" v="574" actId="1076"/>
-        <pc:sldMkLst>
-          <pc:docMk/>
-          <pc:sldMk cId="1258241937" sldId="390"/>
-        </pc:sldMkLst>
-      </pc:sldChg>
-      <pc:sldChg chg="add">
-        <pc:chgData name="Edward Fu Schmerling" userId="c8b75dde-c097-4599-bb13-81e931e3f9a3" providerId="ADAL" clId="{31855063-63B9-441C-9407-3341D2D91A59}" dt="2022-04-13T06:40:48.999" v="318"/>
-        <pc:sldMkLst>
-          <pc:docMk/>
-          <pc:sldMk cId="74076246" sldId="391"/>
-        </pc:sldMkLst>
-      </pc:sldChg>
-      <pc:sldChg chg="add">
-        <pc:chgData name="Edward Fu Schmerling" userId="c8b75dde-c097-4599-bb13-81e931e3f9a3" providerId="ADAL" clId="{31855063-63B9-441C-9407-3341D2D91A59}" dt="2022-04-13T06:40:48.999" v="318"/>
-        <pc:sldMkLst>
-          <pc:docMk/>
-          <pc:sldMk cId="4019876186" sldId="392"/>
-        </pc:sldMkLst>
-      </pc:sldChg>
-      <pc:sldChg chg="add">
-        <pc:chgData name="Edward Fu Schmerling" userId="c8b75dde-c097-4599-bb13-81e931e3f9a3" providerId="ADAL" clId="{31855063-63B9-441C-9407-3341D2D91A59}" dt="2022-04-13T06:40:48.999" v="318"/>
-        <pc:sldMkLst>
-          <pc:docMk/>
-          <pc:sldMk cId="260925825" sldId="393"/>
-        </pc:sldMkLst>
-      </pc:sldChg>
-      <pc:sldChg chg="add">
-        <pc:chgData name="Edward Fu Schmerling" userId="c8b75dde-c097-4599-bb13-81e931e3f9a3" providerId="ADAL" clId="{31855063-63B9-441C-9407-3341D2D91A59}" dt="2022-04-13T06:40:48.999" v="318"/>
-        <pc:sldMkLst>
-          <pc:docMk/>
-          <pc:sldMk cId="3455344319" sldId="394"/>
-        </pc:sldMkLst>
-      </pc:sldChg>
-      <pc:sldChg chg="add">
-        <pc:chgData name="Edward Fu Schmerling" userId="c8b75dde-c097-4599-bb13-81e931e3f9a3" providerId="ADAL" clId="{31855063-63B9-441C-9407-3341D2D91A59}" dt="2022-04-13T06:40:48.999" v="318"/>
-        <pc:sldMkLst>
-          <pc:docMk/>
-          <pc:sldMk cId="477968170" sldId="395"/>
-        </pc:sldMkLst>
-      </pc:sldChg>
-      <pc:sldChg chg="add">
-        <pc:chgData name="Edward Fu Schmerling" userId="c8b75dde-c097-4599-bb13-81e931e3f9a3" providerId="ADAL" clId="{31855063-63B9-441C-9407-3341D2D91A59}" dt="2022-04-13T06:40:48.999" v="318"/>
-        <pc:sldMkLst>
-          <pc:docMk/>
-          <pc:sldMk cId="1967004324" sldId="396"/>
-        </pc:sldMkLst>
-      </pc:sldChg>
-      <pc:sldChg chg="add">
-        <pc:chgData name="Edward Fu Schmerling" userId="c8b75dde-c097-4599-bb13-81e931e3f9a3" providerId="ADAL" clId="{31855063-63B9-441C-9407-3341D2D91A59}" dt="2022-04-13T06:40:48.999" v="318"/>
-        <pc:sldMkLst>
-          <pc:docMk/>
-          <pc:sldMk cId="3700698877" sldId="397"/>
-        </pc:sldMkLst>
-      </pc:sldChg>
-      <pc:sldChg chg="add">
-        <pc:chgData name="Edward Fu Schmerling" userId="c8b75dde-c097-4599-bb13-81e931e3f9a3" providerId="ADAL" clId="{31855063-63B9-441C-9407-3341D2D91A59}" dt="2022-04-13T06:40:48.999" v="318"/>
-        <pc:sldMkLst>
-          <pc:docMk/>
-          <pc:sldMk cId="1530462494" sldId="398"/>
-        </pc:sldMkLst>
-      </pc:sldChg>
-      <pc:sldChg chg="addSp modSp mod">
-        <pc:chgData name="Edward Fu Schmerling" userId="c8b75dde-c097-4599-bb13-81e931e3f9a3" providerId="ADAL" clId="{31855063-63B9-441C-9407-3341D2D91A59}" dt="2022-04-13T06:40:38.614" v="317" actId="20577"/>
-        <pc:sldMkLst>
-          <pc:docMk/>
-          <pc:sldMk cId="3651528683" sldId="399"/>
-        </pc:sldMkLst>
-      </pc:sldChg>
-      <pc:sldChg chg="del">
-        <pc:chgData name="Edward Fu Schmerling" userId="c8b75dde-c097-4599-bb13-81e931e3f9a3" providerId="ADAL" clId="{31855063-63B9-441C-9407-3341D2D91A59}" dt="2022-04-13T05:56:29.952" v="0" actId="47"/>
-        <pc:sldMkLst>
-          <pc:docMk/>
-          <pc:sldMk cId="3595922227" sldId="469"/>
-        </pc:sldMkLst>
-      </pc:sldChg>
-      <pc:sldChg chg="del">
-        <pc:chgData name="Edward Fu Schmerling" userId="c8b75dde-c097-4599-bb13-81e931e3f9a3" providerId="ADAL" clId="{31855063-63B9-441C-9407-3341D2D91A59}" dt="2022-04-13T05:56:29.952" v="0" actId="47"/>
-        <pc:sldMkLst>
-          <pc:docMk/>
-          <pc:sldMk cId="1229848719" sldId="470"/>
-        </pc:sldMkLst>
-      </pc:sldChg>
-      <pc:sldChg chg="del">
-        <pc:chgData name="Edward Fu Schmerling" userId="c8b75dde-c097-4599-bb13-81e931e3f9a3" providerId="ADAL" clId="{31855063-63B9-441C-9407-3341D2D91A59}" dt="2022-04-13T05:56:29.952" v="0" actId="47"/>
-        <pc:sldMkLst>
-          <pc:docMk/>
-          <pc:sldMk cId="3429969763" sldId="471"/>
-        </pc:sldMkLst>
-      </pc:sldChg>
-      <pc:sldChg chg="del">
-        <pc:chgData name="Edward Fu Schmerling" userId="c8b75dde-c097-4599-bb13-81e931e3f9a3" providerId="ADAL" clId="{31855063-63B9-441C-9407-3341D2D91A59}" dt="2022-04-13T05:56:29.952" v="0" actId="47"/>
-        <pc:sldMkLst>
-          <pc:docMk/>
-          <pc:sldMk cId="2093713323" sldId="472"/>
-        </pc:sldMkLst>
-      </pc:sldChg>
-      <pc:sldChg chg="del">
-        <pc:chgData name="Edward Fu Schmerling" userId="c8b75dde-c097-4599-bb13-81e931e3f9a3" providerId="ADAL" clId="{31855063-63B9-441C-9407-3341D2D91A59}" dt="2022-04-13T05:56:29.952" v="0" actId="47"/>
-        <pc:sldMkLst>
-          <pc:docMk/>
-          <pc:sldMk cId="284892743" sldId="473"/>
-        </pc:sldMkLst>
-      </pc:sldChg>
-      <pc:sldChg chg="del">
-        <pc:chgData name="Edward Fu Schmerling" userId="c8b75dde-c097-4599-bb13-81e931e3f9a3" providerId="ADAL" clId="{31855063-63B9-441C-9407-3341D2D91A59}" dt="2022-04-13T05:56:29.952" v="0" actId="47"/>
-        <pc:sldMkLst>
-          <pc:docMk/>
-          <pc:sldMk cId="1855550896" sldId="474"/>
-        </pc:sldMkLst>
-      </pc:sldChg>
-      <pc:sldChg chg="del">
-        <pc:chgData name="Edward Fu Schmerling" userId="c8b75dde-c097-4599-bb13-81e931e3f9a3" providerId="ADAL" clId="{31855063-63B9-441C-9407-3341D2D91A59}" dt="2022-04-13T05:56:29.952" v="0" actId="47"/>
-        <pc:sldMkLst>
-          <pc:docMk/>
-          <pc:sldMk cId="1504537862" sldId="475"/>
-        </pc:sldMkLst>
-      </pc:sldChg>
-      <pc:sldChg chg="del">
-        <pc:chgData name="Edward Fu Schmerling" userId="c8b75dde-c097-4599-bb13-81e931e3f9a3" providerId="ADAL" clId="{31855063-63B9-441C-9407-3341D2D91A59}" dt="2022-04-13T05:56:29.952" v="0" actId="47"/>
-        <pc:sldMkLst>
-          <pc:docMk/>
-          <pc:sldMk cId="3488320157" sldId="476"/>
-        </pc:sldMkLst>
-      </pc:sldChg>
-      <pc:sldChg chg="del">
-        <pc:chgData name="Edward Fu Schmerling" userId="c8b75dde-c097-4599-bb13-81e931e3f9a3" providerId="ADAL" clId="{31855063-63B9-441C-9407-3341D2D91A59}" dt="2022-04-13T05:56:29.952" v="0" actId="47"/>
-        <pc:sldMkLst>
-          <pc:docMk/>
-          <pc:sldMk cId="3914608158" sldId="479"/>
-        </pc:sldMkLst>
-      </pc:sldChg>
-      <pc:sldChg chg="add del">
-        <pc:chgData name="Edward Fu Schmerling" userId="c8b75dde-c097-4599-bb13-81e931e3f9a3" providerId="ADAL" clId="{31855063-63B9-441C-9407-3341D2D91A59}" dt="2022-04-13T05:57:33.498" v="1"/>
-        <pc:sldMkLst>
-          <pc:docMk/>
-          <pc:sldMk cId="1042033196" sldId="480"/>
-        </pc:sldMkLst>
-      </pc:sldChg>
-      <pc:sldChg chg="del">
-        <pc:chgData name="Edward Fu Schmerling" userId="c8b75dde-c097-4599-bb13-81e931e3f9a3" providerId="ADAL" clId="{31855063-63B9-441C-9407-3341D2D91A59}" dt="2022-04-13T05:57:38.265" v="2" actId="47"/>
-        <pc:sldMkLst>
-          <pc:docMk/>
-          <pc:sldMk cId="363456597" sldId="481"/>
-        </pc:sldMkLst>
-      </pc:sldChg>
-      <pc:sldChg chg="del">
-        <pc:chgData name="Edward Fu Schmerling" userId="c8b75dde-c097-4599-bb13-81e931e3f9a3" providerId="ADAL" clId="{31855063-63B9-441C-9407-3341D2D91A59}" dt="2022-04-13T05:57:59.258" v="3" actId="47"/>
-        <pc:sldMkLst>
-          <pc:docMk/>
-          <pc:sldMk cId="3740421713" sldId="483"/>
-        </pc:sldMkLst>
-      </pc:sldChg>
-      <pc:sldChg chg="del">
-        <pc:chgData name="Edward Fu Schmerling" userId="c8b75dde-c097-4599-bb13-81e931e3f9a3" providerId="ADAL" clId="{31855063-63B9-441C-9407-3341D2D91A59}" dt="2022-04-13T05:57:59.258" v="3" actId="47"/>
-        <pc:sldMkLst>
-          <pc:docMk/>
-          <pc:sldMk cId="1475866013" sldId="484"/>
-        </pc:sldMkLst>
-      </pc:sldChg>
-      <pc:sldChg chg="del">
-        <pc:chgData name="Edward Fu Schmerling" userId="c8b75dde-c097-4599-bb13-81e931e3f9a3" providerId="ADAL" clId="{31855063-63B9-441C-9407-3341D2D91A59}" dt="2022-04-13T05:57:59.258" v="3" actId="47"/>
-        <pc:sldMkLst>
-          <pc:docMk/>
-          <pc:sldMk cId="1289924713" sldId="485"/>
-        </pc:sldMkLst>
-      </pc:sldChg>
-      <pc:sldChg chg="add">
-        <pc:chgData name="Edward Fu Schmerling" userId="c8b75dde-c097-4599-bb13-81e931e3f9a3" providerId="ADAL" clId="{31855063-63B9-441C-9407-3341D2D91A59}" dt="2022-04-13T06:29:09.124" v="154"/>
-        <pc:sldMkLst>
-          <pc:docMk/>
-          <pc:sldMk cId="3907072504" sldId="493"/>
-        </pc:sldMkLst>
-      </pc:sldChg>
-      <pc:sldChg chg="add">
-        <pc:chgData name="Edward Fu Schmerling" userId="c8b75dde-c097-4599-bb13-81e931e3f9a3" providerId="ADAL" clId="{31855063-63B9-441C-9407-3341D2D91A59}" dt="2022-04-13T06:29:09.124" v="154"/>
-        <pc:sldMkLst>
-          <pc:docMk/>
-          <pc:sldMk cId="4219252409" sldId="494"/>
-        </pc:sldMkLst>
-      </pc:sldChg>
-      <pc:sldChg chg="modSp ord">
-        <pc:chgData name="Edward Fu Schmerling" userId="c8b75dde-c097-4599-bb13-81e931e3f9a3" providerId="ADAL" clId="{31855063-63B9-441C-9407-3341D2D91A59}" dt="2022-04-13T06:31:45.122" v="182"/>
+      <pc:sldChg chg="modNotesTx">
+        <pc:chgData name="Daniele Gammelli" userId="292b8a31-f1ba-4b4c-b196-a231dc095d13" providerId="ADAL" clId="{6E670754-AB6A-5789-AA0A-6F6FD9CE3EEA}" dt="2026-08-13T21:10:04.143" v="2" actId="20577"/>
         <pc:sldMkLst>
           <pc:docMk/>
           <pc:sldMk cId="1839397506" sldId="495"/>
         </pc:sldMkLst>
       </pc:sldChg>
-      <pc:sldChg chg="modSp add">
-        <pc:chgData name="Edward Fu Schmerling" userId="c8b75dde-c097-4599-bb13-81e931e3f9a3" providerId="ADAL" clId="{31855063-63B9-441C-9407-3341D2D91A59}" dt="2022-04-13T06:31:52.937" v="184"/>
-        <pc:sldMkLst>
-          <pc:docMk/>
-          <pc:sldMk cId="3543055382" sldId="496"/>
-        </pc:sldMkLst>
-      </pc:sldChg>
-      <pc:sldChg chg="modSp add">
-        <pc:chgData name="Edward Fu Schmerling" userId="c8b75dde-c097-4599-bb13-81e931e3f9a3" providerId="ADAL" clId="{31855063-63B9-441C-9407-3341D2D91A59}" dt="2022-04-13T06:34:07.804" v="209" actId="207"/>
+      <pc:sldChg chg="modNotesTx">
+        <pc:chgData name="Daniele Gammelli" userId="292b8a31-f1ba-4b4c-b196-a231dc095d13" providerId="ADAL" clId="{6E670754-AB6A-5789-AA0A-6F6FD9CE3EEA}" dt="2026-08-13T21:10:09.172" v="3" actId="20577"/>
         <pc:sldMkLst>
           <pc:docMk/>
           <pc:sldMk cId="90600401" sldId="497"/>
         </pc:sldMkLst>
       </pc:sldChg>
-      <pc:sldChg chg="add">
-        <pc:chgData name="Edward Fu Schmerling" userId="c8b75dde-c097-4599-bb13-81e931e3f9a3" providerId="ADAL" clId="{31855063-63B9-441C-9407-3341D2D91A59}" dt="2022-04-13T06:29:09.124" v="154"/>
-        <pc:sldMkLst>
-          <pc:docMk/>
-          <pc:sldMk cId="251172492" sldId="498"/>
-        </pc:sldMkLst>
-      </pc:sldChg>
-      <pc:sldChg chg="modSp add">
-        <pc:chgData name="Edward Fu Schmerling" userId="c8b75dde-c097-4599-bb13-81e931e3f9a3" providerId="ADAL" clId="{31855063-63B9-441C-9407-3341D2D91A59}" dt="2022-04-13T06:32:03.310" v="188"/>
-        <pc:sldMkLst>
-          <pc:docMk/>
-          <pc:sldMk cId="2585164842" sldId="499"/>
-        </pc:sldMkLst>
-      </pc:sldChg>
-      <pc:sldChg chg="modSp add mod">
-        <pc:chgData name="Edward Fu Schmerling" userId="c8b75dde-c097-4599-bb13-81e931e3f9a3" providerId="ADAL" clId="{31855063-63B9-441C-9407-3341D2D91A59}" dt="2022-04-13T06:33:18.818" v="208" actId="1076"/>
-        <pc:sldMkLst>
-          <pc:docMk/>
-          <pc:sldMk cId="2841134117" sldId="500"/>
-        </pc:sldMkLst>
-      </pc:sldChg>
-      <pc:sldChg chg="add">
-        <pc:chgData name="Edward Fu Schmerling" userId="c8b75dde-c097-4599-bb13-81e931e3f9a3" providerId="ADAL" clId="{31855063-63B9-441C-9407-3341D2D91A59}" dt="2022-04-13T06:29:09.124" v="154"/>
-        <pc:sldMkLst>
-          <pc:docMk/>
-          <pc:sldMk cId="1677878597" sldId="501"/>
-        </pc:sldMkLst>
-      </pc:sldChg>
-      <pc:sldChg chg="modSp add">
-        <pc:chgData name="Edward Fu Schmerling" userId="c8b75dde-c097-4599-bb13-81e931e3f9a3" providerId="ADAL" clId="{31855063-63B9-441C-9407-3341D2D91A59}" dt="2022-04-13T06:31:04.585" v="177" actId="114"/>
-        <pc:sldMkLst>
-          <pc:docMk/>
-          <pc:sldMk cId="3161116584" sldId="502"/>
-        </pc:sldMkLst>
-      </pc:sldChg>
-      <pc:sldChg chg="modSp add mod">
-        <pc:chgData name="Edward Fu Schmerling" userId="c8b75dde-c097-4599-bb13-81e931e3f9a3" providerId="ADAL" clId="{31855063-63B9-441C-9407-3341D2D91A59}" dt="2022-04-13T06:35:18.278" v="236" actId="403"/>
+      <pc:sldChg chg="modNotesTx">
+        <pc:chgData name="Daniele Gammelli" userId="292b8a31-f1ba-4b4c-b196-a231dc095d13" providerId="ADAL" clId="{6E670754-AB6A-5789-AA0A-6F6FD9CE3EEA}" dt="2026-08-13T21:10:15.830" v="4" actId="20577"/>
         <pc:sldMkLst>
           <pc:docMk/>
           <pc:sldMk cId="2688572493" sldId="503"/>
         </pc:sldMkLst>
       </pc:sldChg>
-      <pc:sldChg chg="modSp add">
-        <pc:chgData name="Edward Fu Schmerling" userId="c8b75dde-c097-4599-bb13-81e931e3f9a3" providerId="ADAL" clId="{31855063-63B9-441C-9407-3341D2D91A59}" dt="2022-04-13T06:31:12.413" v="180"/>
-        <pc:sldMkLst>
-          <pc:docMk/>
-          <pc:sldMk cId="517564522" sldId="504"/>
-        </pc:sldMkLst>
-      </pc:sldChg>
-      <pc:sldChg chg="addSp modSp add mod">
-        <pc:chgData name="Edward Fu Schmerling" userId="c8b75dde-c097-4599-bb13-81e931e3f9a3" providerId="ADAL" clId="{31855063-63B9-441C-9407-3341D2D91A59}" dt="2022-04-13T06:34:29.191" v="224" actId="313"/>
-        <pc:sldMkLst>
-          <pc:docMk/>
-          <pc:sldMk cId="2118912681" sldId="505"/>
-        </pc:sldMkLst>
-      </pc:sldChg>
-      <pc:sldChg chg="add del">
-        <pc:chgData name="Edward Fu Schmerling" userId="c8b75dde-c097-4599-bb13-81e931e3f9a3" providerId="ADAL" clId="{31855063-63B9-441C-9407-3341D2D91A59}" dt="2022-04-13T06:41:02.485" v="319"/>
-        <pc:sldMkLst>
-          <pc:docMk/>
-          <pc:sldMk cId="3960784806" sldId="548"/>
-        </pc:sldMkLst>
-      </pc:sldChg>
-      <pc:sldChg chg="del">
-        <pc:chgData name="Edward Fu Schmerling" userId="c8b75dde-c097-4599-bb13-81e931e3f9a3" providerId="ADAL" clId="{31855063-63B9-441C-9407-3341D2D91A59}" dt="2022-04-13T05:56:29.952" v="0" actId="47"/>
-        <pc:sldMkLst>
-          <pc:docMk/>
-          <pc:sldMk cId="368324985" sldId="550"/>
-        </pc:sldMkLst>
-      </pc:sldChg>
-      <pc:sldChg chg="del">
-        <pc:chgData name="Edward Fu Schmerling" userId="c8b75dde-c097-4599-bb13-81e931e3f9a3" providerId="ADAL" clId="{31855063-63B9-441C-9407-3341D2D91A59}" dt="2022-04-13T05:57:59.258" v="3" actId="47"/>
-        <pc:sldMkLst>
-          <pc:docMk/>
-          <pc:sldMk cId="3531711246" sldId="551"/>
-        </pc:sldMkLst>
-      </pc:sldChg>
-      <pc:sldChg chg="del">
-        <pc:chgData name="Edward Fu Schmerling" userId="c8b75dde-c097-4599-bb13-81e931e3f9a3" providerId="ADAL" clId="{31855063-63B9-441C-9407-3341D2D91A59}" dt="2022-04-13T05:57:59.258" v="3" actId="47"/>
-        <pc:sldMkLst>
-          <pc:docMk/>
-          <pc:sldMk cId="369621943" sldId="556"/>
-        </pc:sldMkLst>
-      </pc:sldChg>
-      <pc:sldChg chg="del">
-        <pc:chgData name="Edward Fu Schmerling" userId="c8b75dde-c097-4599-bb13-81e931e3f9a3" providerId="ADAL" clId="{31855063-63B9-441C-9407-3341D2D91A59}" dt="2022-04-13T05:57:59.258" v="3" actId="47"/>
-        <pc:sldMkLst>
-          <pc:docMk/>
-          <pc:sldMk cId="4282980349" sldId="566"/>
-        </pc:sldMkLst>
-      </pc:sldChg>
-      <pc:sldChg chg="del">
-        <pc:chgData name="Edward Fu Schmerling" userId="c8b75dde-c097-4599-bb13-81e931e3f9a3" providerId="ADAL" clId="{31855063-63B9-441C-9407-3341D2D91A59}" dt="2022-04-13T05:57:59.258" v="3" actId="47"/>
-        <pc:sldMkLst>
-          <pc:docMk/>
-          <pc:sldMk cId="3780695750" sldId="567"/>
-        </pc:sldMkLst>
-      </pc:sldChg>
-      <pc:sldChg chg="del">
-        <pc:chgData name="Edward Fu Schmerling" userId="c8b75dde-c097-4599-bb13-81e931e3f9a3" providerId="ADAL" clId="{31855063-63B9-441C-9407-3341D2D91A59}" dt="2022-04-13T05:57:59.258" v="3" actId="47"/>
-        <pc:sldMkLst>
-          <pc:docMk/>
-          <pc:sldMk cId="2726115440" sldId="568"/>
-        </pc:sldMkLst>
-      </pc:sldChg>
-      <pc:sldChg chg="del">
-        <pc:chgData name="Edward Fu Schmerling" userId="c8b75dde-c097-4599-bb13-81e931e3f9a3" providerId="ADAL" clId="{31855063-63B9-441C-9407-3341D2D91A59}" dt="2022-04-13T05:57:59.258" v="3" actId="47"/>
-        <pc:sldMkLst>
-          <pc:docMk/>
-          <pc:sldMk cId="877759489" sldId="569"/>
-        </pc:sldMkLst>
-      </pc:sldChg>
-      <pc:sldChg chg="del">
-        <pc:chgData name="Edward Fu Schmerling" userId="c8b75dde-c097-4599-bb13-81e931e3f9a3" providerId="ADAL" clId="{31855063-63B9-441C-9407-3341D2D91A59}" dt="2022-04-13T05:57:59.258" v="3" actId="47"/>
-        <pc:sldMkLst>
-          <pc:docMk/>
-          <pc:sldMk cId="3410497678" sldId="570"/>
-        </pc:sldMkLst>
-      </pc:sldChg>
-      <pc:sldChg chg="add">
-        <pc:chgData name="Edward Fu Schmerling" userId="c8b75dde-c097-4599-bb13-81e931e3f9a3" providerId="ADAL" clId="{31855063-63B9-441C-9407-3341D2D91A59}" dt="2022-04-13T05:57:33.498" v="1"/>
-        <pc:sldMkLst>
-          <pc:docMk/>
-          <pc:sldMk cId="3352044961" sldId="571"/>
-        </pc:sldMkLst>
-      </pc:sldChg>
-      <pc:sldChg chg="addSp delSp modSp add mod modAnim">
-        <pc:chgData name="Edward Fu Schmerling" userId="c8b75dde-c097-4599-bb13-81e931e3f9a3" providerId="ADAL" clId="{31855063-63B9-441C-9407-3341D2D91A59}" dt="2022-04-13T07:42:28.147" v="730"/>
-        <pc:sldMkLst>
-          <pc:docMk/>
-          <pc:sldMk cId="907361809" sldId="572"/>
-        </pc:sldMkLst>
-      </pc:sldChg>
-      <pc:sldChg chg="add del">
-        <pc:chgData name="Edward Fu Schmerling" userId="c8b75dde-c097-4599-bb13-81e931e3f9a3" providerId="ADAL" clId="{31855063-63B9-441C-9407-3341D2D91A59}" dt="2022-04-13T06:31:48.911" v="183" actId="47"/>
-        <pc:sldMkLst>
-          <pc:docMk/>
-          <pc:sldMk cId="2456777892" sldId="572"/>
-        </pc:sldMkLst>
-      </pc:sldChg>
-      <pc:sldChg chg="modSp add modAnim">
-        <pc:chgData name="Edward Fu Schmerling" userId="c8b75dde-c097-4599-bb13-81e931e3f9a3" providerId="ADAL" clId="{31855063-63B9-441C-9407-3341D2D91A59}" dt="2022-04-13T07:38:11.162" v="671" actId="20577"/>
-        <pc:sldMkLst>
-          <pc:docMk/>
-          <pc:sldMk cId="279978888" sldId="573"/>
-        </pc:sldMkLst>
-      </pc:sldChg>
-      <pc:sldChg chg="new del">
-        <pc:chgData name="Edward Fu Schmerling" userId="c8b75dde-c097-4599-bb13-81e931e3f9a3" providerId="ADAL" clId="{31855063-63B9-441C-9407-3341D2D91A59}" dt="2022-04-13T07:27:47.289" v="576" actId="680"/>
-        <pc:sldMkLst>
-          <pc:docMk/>
-          <pc:sldMk cId="658725980" sldId="573"/>
-        </pc:sldMkLst>
-      </pc:sldChg>
-      <pc:sldChg chg="add modAnim">
-        <pc:chgData name="Edward Fu Schmerling" userId="c8b75dde-c097-4599-bb13-81e931e3f9a3" providerId="ADAL" clId="{31855063-63B9-441C-9407-3341D2D91A59}" dt="2022-04-13T07:38:52.918" v="673"/>
-        <pc:sldMkLst>
-          <pc:docMk/>
-          <pc:sldMk cId="3014608282" sldId="574"/>
-        </pc:sldMkLst>
-      </pc:sldChg>
-      <pc:sldChg chg="add modAnim">
-        <pc:chgData name="Edward Fu Schmerling" userId="c8b75dde-c097-4599-bb13-81e931e3f9a3" providerId="ADAL" clId="{31855063-63B9-441C-9407-3341D2D91A59}" dt="2022-04-13T07:41:45.488" v="720"/>
-        <pc:sldMkLst>
-          <pc:docMk/>
-          <pc:sldMk cId="2084105139" sldId="575"/>
-        </pc:sldMkLst>
-      </pc:sldChg>
-    </pc:docChg>
-  </pc:docChgLst>
-  <pc:docChgLst>
-    <pc:chgData name="Marco Pavone" userId="614fc057-48e4-49a1-a143-71473b5022f3" providerId="ADAL" clId="{85493198-F5A1-D84A-A2CA-FD6227E497BA}"/>
-    <pc:docChg chg="undo custSel modSld">
-      <pc:chgData name="Marco Pavone" userId="614fc057-48e4-49a1-a143-71473b5022f3" providerId="ADAL" clId="{85493198-F5A1-D84A-A2CA-FD6227E497BA}" dt="2025-04-14T02:09:18.533" v="220"/>
-      <pc:docMkLst>
-        <pc:docMk/>
-      </pc:docMkLst>
-      <pc:sldChg chg="addSp delSp modSp">
-        <pc:chgData name="Marco Pavone" userId="614fc057-48e4-49a1-a143-71473b5022f3" providerId="ADAL" clId="{85493198-F5A1-D84A-A2CA-FD6227E497BA}" dt="2025-04-14T02:09:18.533" v="220"/>
-        <pc:sldMkLst>
-          <pc:docMk/>
-          <pc:sldMk cId="3651528683" sldId="399"/>
-        </pc:sldMkLst>
-        <pc:spChg chg="add del mod">
-          <ac:chgData name="Marco Pavone" userId="614fc057-48e4-49a1-a143-71473b5022f3" providerId="ADAL" clId="{85493198-F5A1-D84A-A2CA-FD6227E497BA}" dt="2025-04-14T02:09:02.180" v="219"/>
-          <ac:spMkLst>
-            <pc:docMk/>
-            <pc:sldMk cId="3651528683" sldId="399"/>
-            <ac:spMk id="3" creationId="{8C097590-E746-53CA-DD7D-CC4B94CD5B8D}"/>
-          </ac:spMkLst>
-        </pc:spChg>
-        <pc:spChg chg="del">
-          <ac:chgData name="Marco Pavone" userId="614fc057-48e4-49a1-a143-71473b5022f3" providerId="ADAL" clId="{85493198-F5A1-D84A-A2CA-FD6227E497BA}" dt="2025-04-14T02:08:31.518" v="217"/>
-          <ac:spMkLst>
-            <pc:docMk/>
-            <pc:sldMk cId="3651528683" sldId="399"/>
-            <ac:spMk id="4" creationId="{7BB0FC0B-F375-4C2E-AEEA-E9A79F878E96}"/>
-          </ac:spMkLst>
-        </pc:spChg>
-        <pc:spChg chg="del">
-          <ac:chgData name="Marco Pavone" userId="614fc057-48e4-49a1-a143-71473b5022f3" providerId="ADAL" clId="{85493198-F5A1-D84A-A2CA-FD6227E497BA}" dt="2025-04-14T02:08:08.765" v="216"/>
-          <ac:spMkLst>
-            <pc:docMk/>
-            <pc:sldMk cId="3651528683" sldId="399"/>
-            <ac:spMk id="5" creationId="{6ED84CBC-2FC8-4E21-85CD-765C14826721}"/>
-          </ac:spMkLst>
-        </pc:spChg>
-        <pc:spChg chg="add del mod">
-          <ac:chgData name="Marco Pavone" userId="614fc057-48e4-49a1-a143-71473b5022f3" providerId="ADAL" clId="{85493198-F5A1-D84A-A2CA-FD6227E497BA}" dt="2025-04-14T02:09:02.180" v="219"/>
-          <ac:spMkLst>
-            <pc:docMk/>
-            <pc:sldMk cId="3651528683" sldId="399"/>
-            <ac:spMk id="6" creationId="{88CA7EAA-2A98-0178-C9AC-F6BEB055744C}"/>
-          </ac:spMkLst>
-        </pc:spChg>
-        <pc:spChg chg="add del mod">
-          <ac:chgData name="Marco Pavone" userId="614fc057-48e4-49a1-a143-71473b5022f3" providerId="ADAL" clId="{85493198-F5A1-D84A-A2CA-FD6227E497BA}" dt="2025-04-14T02:09:02.180" v="219"/>
-          <ac:spMkLst>
-            <pc:docMk/>
-            <pc:sldMk cId="3651528683" sldId="399"/>
-            <ac:spMk id="7" creationId="{2E5516C7-0230-F031-7234-0341FBAD0F14}"/>
-          </ac:spMkLst>
-        </pc:spChg>
-        <pc:spChg chg="add mod">
-          <ac:chgData name="Marco Pavone" userId="614fc057-48e4-49a1-a143-71473b5022f3" providerId="ADAL" clId="{85493198-F5A1-D84A-A2CA-FD6227E497BA}" dt="2025-04-14T02:09:18.533" v="220"/>
-          <ac:spMkLst>
-            <pc:docMk/>
-            <pc:sldMk cId="3651528683" sldId="399"/>
-            <ac:spMk id="8" creationId="{C2420DE7-3531-6E06-DA15-2B1D4E958383}"/>
-          </ac:spMkLst>
-        </pc:spChg>
-        <pc:spChg chg="del">
-          <ac:chgData name="Marco Pavone" userId="614fc057-48e4-49a1-a143-71473b5022f3" providerId="ADAL" clId="{85493198-F5A1-D84A-A2CA-FD6227E497BA}" dt="2025-04-14T02:08:08.765" v="216"/>
-          <ac:spMkLst>
-            <pc:docMk/>
-            <pc:sldMk cId="3651528683" sldId="399"/>
-            <ac:spMk id="9" creationId="{4B19C71E-46E2-CE46-AE2B-A7CC6224B712}"/>
-          </ac:spMkLst>
-        </pc:spChg>
-        <pc:spChg chg="add mod">
-          <ac:chgData name="Marco Pavone" userId="614fc057-48e4-49a1-a143-71473b5022f3" providerId="ADAL" clId="{85493198-F5A1-D84A-A2CA-FD6227E497BA}" dt="2025-04-14T02:09:18.533" v="220"/>
-          <ac:spMkLst>
-            <pc:docMk/>
-            <pc:sldMk cId="3651528683" sldId="399"/>
-            <ac:spMk id="11" creationId="{30A9E9C3-814E-1C13-7BC5-C492C3A53322}"/>
-          </ac:spMkLst>
-        </pc:spChg>
-        <pc:spChg chg="add mod">
-          <ac:chgData name="Marco Pavone" userId="614fc057-48e4-49a1-a143-71473b5022f3" providerId="ADAL" clId="{85493198-F5A1-D84A-A2CA-FD6227E497BA}" dt="2025-04-14T02:09:18.533" v="220"/>
-          <ac:spMkLst>
-            <pc:docMk/>
-            <pc:sldMk cId="3651528683" sldId="399"/>
-            <ac:spMk id="12" creationId="{CA5E1C50-E043-C6C6-5D19-B4C57FD0981A}"/>
-          </ac:spMkLst>
-        </pc:spChg>
-      </pc:sldChg>
-      <pc:sldChg chg="addSp delSp modSp">
-        <pc:chgData name="Marco Pavone" userId="614fc057-48e4-49a1-a143-71473b5022f3" providerId="ADAL" clId="{85493198-F5A1-D84A-A2CA-FD6227E497BA}" dt="2025-04-14T02:09:18.533" v="220"/>
-        <pc:sldMkLst>
-          <pc:docMk/>
-          <pc:sldMk cId="1042033196" sldId="480"/>
-        </pc:sldMkLst>
-        <pc:spChg chg="del">
-          <ac:chgData name="Marco Pavone" userId="614fc057-48e4-49a1-a143-71473b5022f3" providerId="ADAL" clId="{85493198-F5A1-D84A-A2CA-FD6227E497BA}" dt="2025-04-14T02:08:31.518" v="217"/>
-          <ac:spMkLst>
-            <pc:docMk/>
-            <pc:sldMk cId="1042033196" sldId="480"/>
-            <ac:spMk id="4" creationId="{EACF6BAE-6A00-4A06-9084-0584442DE385}"/>
-          </ac:spMkLst>
-        </pc:spChg>
-        <pc:spChg chg="del">
-          <ac:chgData name="Marco Pavone" userId="614fc057-48e4-49a1-a143-71473b5022f3" providerId="ADAL" clId="{85493198-F5A1-D84A-A2CA-FD6227E497BA}" dt="2025-04-14T02:08:08.765" v="216"/>
-          <ac:spMkLst>
-            <pc:docMk/>
-            <pc:sldMk cId="1042033196" sldId="480"/>
-            <ac:spMk id="5" creationId="{17C0ED6E-5D11-0345-A155-2ADADBDCC5CA}"/>
-          </ac:spMkLst>
-        </pc:spChg>
-        <pc:spChg chg="del">
-          <ac:chgData name="Marco Pavone" userId="614fc057-48e4-49a1-a143-71473b5022f3" providerId="ADAL" clId="{85493198-F5A1-D84A-A2CA-FD6227E497BA}" dt="2025-04-14T02:08:08.765" v="216"/>
-          <ac:spMkLst>
-            <pc:docMk/>
-            <pc:sldMk cId="1042033196" sldId="480"/>
-            <ac:spMk id="6" creationId="{4A938BD2-076B-4E1B-8F1C-D4F1B37C5458}"/>
-          </ac:spMkLst>
-        </pc:spChg>
-        <pc:spChg chg="add del mod">
-          <ac:chgData name="Marco Pavone" userId="614fc057-48e4-49a1-a143-71473b5022f3" providerId="ADAL" clId="{85493198-F5A1-D84A-A2CA-FD6227E497BA}" dt="2025-04-14T02:09:02.180" v="219"/>
-          <ac:spMkLst>
-            <pc:docMk/>
-            <pc:sldMk cId="1042033196" sldId="480"/>
-            <ac:spMk id="7" creationId="{02D5CE97-E7D6-E0A0-075F-5433A94B3E28}"/>
-          </ac:spMkLst>
-        </pc:spChg>
-        <pc:spChg chg="add del mod">
-          <ac:chgData name="Marco Pavone" userId="614fc057-48e4-49a1-a143-71473b5022f3" providerId="ADAL" clId="{85493198-F5A1-D84A-A2CA-FD6227E497BA}" dt="2025-04-14T02:09:02.180" v="219"/>
-          <ac:spMkLst>
-            <pc:docMk/>
-            <pc:sldMk cId="1042033196" sldId="480"/>
-            <ac:spMk id="8" creationId="{6FDCB633-E6C8-2FB2-8AA2-28D1281F999A}"/>
-          </ac:spMkLst>
-        </pc:spChg>
-        <pc:spChg chg="add del mod">
-          <ac:chgData name="Marco Pavone" userId="614fc057-48e4-49a1-a143-71473b5022f3" providerId="ADAL" clId="{85493198-F5A1-D84A-A2CA-FD6227E497BA}" dt="2025-04-14T02:09:02.180" v="219"/>
-          <ac:spMkLst>
-            <pc:docMk/>
-            <pc:sldMk cId="1042033196" sldId="480"/>
-            <ac:spMk id="9" creationId="{DB6B29D8-B21F-C48D-A786-DF458FFFF947}"/>
-          </ac:spMkLst>
-        </pc:spChg>
-        <pc:spChg chg="add mod">
-          <ac:chgData name="Marco Pavone" userId="614fc057-48e4-49a1-a143-71473b5022f3" providerId="ADAL" clId="{85493198-F5A1-D84A-A2CA-FD6227E497BA}" dt="2025-04-14T02:09:18.533" v="220"/>
-          <ac:spMkLst>
-            <pc:docMk/>
-            <pc:sldMk cId="1042033196" sldId="480"/>
-            <ac:spMk id="10" creationId="{02D0995F-7857-9F7C-49C7-E7BBC98E80E6}"/>
-          </ac:spMkLst>
-        </pc:spChg>
-        <pc:spChg chg="add mod">
-          <ac:chgData name="Marco Pavone" userId="614fc057-48e4-49a1-a143-71473b5022f3" providerId="ADAL" clId="{85493198-F5A1-D84A-A2CA-FD6227E497BA}" dt="2025-04-14T02:09:18.533" v="220"/>
-          <ac:spMkLst>
-            <pc:docMk/>
-            <pc:sldMk cId="1042033196" sldId="480"/>
-            <ac:spMk id="11" creationId="{C8677204-B6A1-62FE-DB8C-799081E30181}"/>
-          </ac:spMkLst>
-        </pc:spChg>
-        <pc:spChg chg="add mod">
-          <ac:chgData name="Marco Pavone" userId="614fc057-48e4-49a1-a143-71473b5022f3" providerId="ADAL" clId="{85493198-F5A1-D84A-A2CA-FD6227E497BA}" dt="2025-04-14T02:09:18.533" v="220"/>
-          <ac:spMkLst>
-            <pc:docMk/>
-            <pc:sldMk cId="1042033196" sldId="480"/>
-            <ac:spMk id="12" creationId="{A5C6DA81-00D8-4063-5D4F-712B0D7CCBD8}"/>
-          </ac:spMkLst>
-        </pc:spChg>
-      </pc:sldChg>
-      <pc:sldChg chg="addSp delSp modSp">
-        <pc:chgData name="Marco Pavone" userId="614fc057-48e4-49a1-a143-71473b5022f3" providerId="ADAL" clId="{85493198-F5A1-D84A-A2CA-FD6227E497BA}" dt="2025-04-14T02:09:18.533" v="220"/>
-        <pc:sldMkLst>
-          <pc:docMk/>
-          <pc:sldMk cId="1289924713" sldId="485"/>
-        </pc:sldMkLst>
-        <pc:spChg chg="del">
-          <ac:chgData name="Marco Pavone" userId="614fc057-48e4-49a1-a143-71473b5022f3" providerId="ADAL" clId="{85493198-F5A1-D84A-A2CA-FD6227E497BA}" dt="2025-04-14T02:08:31.518" v="217"/>
-          <ac:spMkLst>
-            <pc:docMk/>
-            <pc:sldMk cId="1289924713" sldId="485"/>
-            <ac:spMk id="4" creationId="{A87D4989-1554-42E8-8345-D898835ECED9}"/>
-          </ac:spMkLst>
-        </pc:spChg>
-        <pc:spChg chg="del">
-          <ac:chgData name="Marco Pavone" userId="614fc057-48e4-49a1-a143-71473b5022f3" providerId="ADAL" clId="{85493198-F5A1-D84A-A2CA-FD6227E497BA}" dt="2025-04-14T02:08:08.765" v="216"/>
-          <ac:spMkLst>
-            <pc:docMk/>
-            <pc:sldMk cId="1289924713" sldId="485"/>
-            <ac:spMk id="5" creationId="{40F95C04-7336-CE40-ADB7-E55942BF7C65}"/>
-          </ac:spMkLst>
-        </pc:spChg>
-        <pc:spChg chg="del">
-          <ac:chgData name="Marco Pavone" userId="614fc057-48e4-49a1-a143-71473b5022f3" providerId="ADAL" clId="{85493198-F5A1-D84A-A2CA-FD6227E497BA}" dt="2025-04-14T02:08:08.765" v="216"/>
-          <ac:spMkLst>
-            <pc:docMk/>
-            <pc:sldMk cId="1289924713" sldId="485"/>
-            <ac:spMk id="6" creationId="{284CFF8A-B977-4E5E-BB18-AA1C66CE4662}"/>
-          </ac:spMkLst>
-        </pc:spChg>
-        <pc:spChg chg="add del mod">
-          <ac:chgData name="Marco Pavone" userId="614fc057-48e4-49a1-a143-71473b5022f3" providerId="ADAL" clId="{85493198-F5A1-D84A-A2CA-FD6227E497BA}" dt="2025-04-14T02:09:02.180" v="219"/>
-          <ac:spMkLst>
-            <pc:docMk/>
-            <pc:sldMk cId="1289924713" sldId="485"/>
-            <ac:spMk id="7" creationId="{096A201F-D7B8-6124-CC6F-3B6CBDED6720}"/>
-          </ac:spMkLst>
-        </pc:spChg>
-        <pc:spChg chg="add del mod">
-          <ac:chgData name="Marco Pavone" userId="614fc057-48e4-49a1-a143-71473b5022f3" providerId="ADAL" clId="{85493198-F5A1-D84A-A2CA-FD6227E497BA}" dt="2025-04-14T02:09:02.180" v="219"/>
-          <ac:spMkLst>
-            <pc:docMk/>
-            <pc:sldMk cId="1289924713" sldId="485"/>
-            <ac:spMk id="8" creationId="{AC7C3937-54AA-0DCA-ECE7-05C46262F149}"/>
-          </ac:spMkLst>
-        </pc:spChg>
-        <pc:spChg chg="add del mod">
-          <ac:chgData name="Marco Pavone" userId="614fc057-48e4-49a1-a143-71473b5022f3" providerId="ADAL" clId="{85493198-F5A1-D84A-A2CA-FD6227E497BA}" dt="2025-04-14T02:09:02.180" v="219"/>
-          <ac:spMkLst>
-            <pc:docMk/>
-            <pc:sldMk cId="1289924713" sldId="485"/>
-            <ac:spMk id="9" creationId="{83A36E97-A8DD-3EFC-B56B-F86FDD1630DC}"/>
-          </ac:spMkLst>
-        </pc:spChg>
-        <pc:spChg chg="add mod">
-          <ac:chgData name="Marco Pavone" userId="614fc057-48e4-49a1-a143-71473b5022f3" providerId="ADAL" clId="{85493198-F5A1-D84A-A2CA-FD6227E497BA}" dt="2025-04-14T02:09:18.533" v="220"/>
-          <ac:spMkLst>
-            <pc:docMk/>
-            <pc:sldMk cId="1289924713" sldId="485"/>
-            <ac:spMk id="10" creationId="{DB0542A0-96B9-0766-0611-0CD67C01E86D}"/>
-          </ac:spMkLst>
-        </pc:spChg>
-        <pc:spChg chg="add mod">
-          <ac:chgData name="Marco Pavone" userId="614fc057-48e4-49a1-a143-71473b5022f3" providerId="ADAL" clId="{85493198-F5A1-D84A-A2CA-FD6227E497BA}" dt="2025-04-14T02:09:18.533" v="220"/>
-          <ac:spMkLst>
-            <pc:docMk/>
-            <pc:sldMk cId="1289924713" sldId="485"/>
-            <ac:spMk id="11" creationId="{FFF9B7EA-C252-5713-F4EB-E944031FBE38}"/>
-          </ac:spMkLst>
-        </pc:spChg>
-        <pc:spChg chg="add mod">
-          <ac:chgData name="Marco Pavone" userId="614fc057-48e4-49a1-a143-71473b5022f3" providerId="ADAL" clId="{85493198-F5A1-D84A-A2CA-FD6227E497BA}" dt="2025-04-14T02:09:18.533" v="220"/>
-          <ac:spMkLst>
-            <pc:docMk/>
-            <pc:sldMk cId="1289924713" sldId="485"/>
-            <ac:spMk id="12" creationId="{DCDA82E1-BC86-A4B3-8150-9D1613197CFB}"/>
-          </ac:spMkLst>
-        </pc:spChg>
-      </pc:sldChg>
-      <pc:sldChg chg="addSp delSp modSp">
-        <pc:chgData name="Marco Pavone" userId="614fc057-48e4-49a1-a143-71473b5022f3" providerId="ADAL" clId="{85493198-F5A1-D84A-A2CA-FD6227E497BA}" dt="2025-04-14T02:09:18.533" v="220"/>
-        <pc:sldMkLst>
-          <pc:docMk/>
-          <pc:sldMk cId="4173949515" sldId="489"/>
-        </pc:sldMkLst>
-        <pc:spChg chg="del">
-          <ac:chgData name="Marco Pavone" userId="614fc057-48e4-49a1-a143-71473b5022f3" providerId="ADAL" clId="{85493198-F5A1-D84A-A2CA-FD6227E497BA}" dt="2025-04-14T02:08:31.518" v="217"/>
-          <ac:spMkLst>
-            <pc:docMk/>
-            <pc:sldMk cId="4173949515" sldId="489"/>
-            <ac:spMk id="4" creationId="{41ADC3C8-85AB-3844-8CE6-4D0F73A949BE}"/>
-          </ac:spMkLst>
-        </pc:spChg>
-        <pc:spChg chg="del">
-          <ac:chgData name="Marco Pavone" userId="614fc057-48e4-49a1-a143-71473b5022f3" providerId="ADAL" clId="{85493198-F5A1-D84A-A2CA-FD6227E497BA}" dt="2025-04-14T02:08:08.765" v="216"/>
-          <ac:spMkLst>
-            <pc:docMk/>
-            <pc:sldMk cId="4173949515" sldId="489"/>
-            <ac:spMk id="5" creationId="{2BEB8D20-DADB-7840-98C2-BC1EAB9D4B9F}"/>
-          </ac:spMkLst>
-        </pc:spChg>
-        <pc:spChg chg="del">
-          <ac:chgData name="Marco Pavone" userId="614fc057-48e4-49a1-a143-71473b5022f3" providerId="ADAL" clId="{85493198-F5A1-D84A-A2CA-FD6227E497BA}" dt="2025-04-14T02:08:08.765" v="216"/>
-          <ac:spMkLst>
-            <pc:docMk/>
-            <pc:sldMk cId="4173949515" sldId="489"/>
-            <ac:spMk id="6" creationId="{166D772B-AC68-4A6A-8B67-9FC3A6B7B37D}"/>
-          </ac:spMkLst>
-        </pc:spChg>
-        <pc:spChg chg="add del mod">
-          <ac:chgData name="Marco Pavone" userId="614fc057-48e4-49a1-a143-71473b5022f3" providerId="ADAL" clId="{85493198-F5A1-D84A-A2CA-FD6227E497BA}" dt="2025-04-14T02:09:02.180" v="219"/>
-          <ac:spMkLst>
-            <pc:docMk/>
-            <pc:sldMk cId="4173949515" sldId="489"/>
-            <ac:spMk id="7" creationId="{61372C90-B9BF-9C6B-CEAE-5C927BAB8A45}"/>
-          </ac:spMkLst>
-        </pc:spChg>
-        <pc:spChg chg="add del mod">
-          <ac:chgData name="Marco Pavone" userId="614fc057-48e4-49a1-a143-71473b5022f3" providerId="ADAL" clId="{85493198-F5A1-D84A-A2CA-FD6227E497BA}" dt="2025-04-14T02:09:02.180" v="219"/>
-          <ac:spMkLst>
-            <pc:docMk/>
-            <pc:sldMk cId="4173949515" sldId="489"/>
-            <ac:spMk id="8" creationId="{28227FF1-660F-5858-0B78-304FAE6A4916}"/>
-          </ac:spMkLst>
-        </pc:spChg>
-        <pc:spChg chg="add del mod">
-          <ac:chgData name="Marco Pavone" userId="614fc057-48e4-49a1-a143-71473b5022f3" providerId="ADAL" clId="{85493198-F5A1-D84A-A2CA-FD6227E497BA}" dt="2025-04-14T02:09:02.180" v="219"/>
-          <ac:spMkLst>
-            <pc:docMk/>
-            <pc:sldMk cId="4173949515" sldId="489"/>
-            <ac:spMk id="9" creationId="{49964FAC-C385-0B5F-8191-26FB8FB93F9D}"/>
-          </ac:spMkLst>
-        </pc:spChg>
-        <pc:spChg chg="add mod">
-          <ac:chgData name="Marco Pavone" userId="614fc057-48e4-49a1-a143-71473b5022f3" providerId="ADAL" clId="{85493198-F5A1-D84A-A2CA-FD6227E497BA}" dt="2025-04-14T02:09:18.533" v="220"/>
-          <ac:spMkLst>
-            <pc:docMk/>
-            <pc:sldMk cId="4173949515" sldId="489"/>
-            <ac:spMk id="10" creationId="{CC31DF41-265E-364C-581D-3859612B289C}"/>
-          </ac:spMkLst>
-        </pc:spChg>
-        <pc:spChg chg="add mod">
-          <ac:chgData name="Marco Pavone" userId="614fc057-48e4-49a1-a143-71473b5022f3" providerId="ADAL" clId="{85493198-F5A1-D84A-A2CA-FD6227E497BA}" dt="2025-04-14T02:09:18.533" v="220"/>
-          <ac:spMkLst>
-            <pc:docMk/>
-            <pc:sldMk cId="4173949515" sldId="489"/>
-            <ac:spMk id="11" creationId="{F9442B6E-12B2-7059-C8A5-3A21F1D02F07}"/>
-          </ac:spMkLst>
-        </pc:spChg>
-        <pc:spChg chg="add mod">
-          <ac:chgData name="Marco Pavone" userId="614fc057-48e4-49a1-a143-71473b5022f3" providerId="ADAL" clId="{85493198-F5A1-D84A-A2CA-FD6227E497BA}" dt="2025-04-14T02:09:18.533" v="220"/>
-          <ac:spMkLst>
-            <pc:docMk/>
-            <pc:sldMk cId="4173949515" sldId="489"/>
-            <ac:spMk id="12" creationId="{A3C06CFC-8B67-6864-42FF-1A795961B2EB}"/>
-          </ac:spMkLst>
-        </pc:spChg>
-      </pc:sldChg>
-      <pc:sldChg chg="addSp delSp modSp modNotesTx">
-        <pc:chgData name="Marco Pavone" userId="614fc057-48e4-49a1-a143-71473b5022f3" providerId="ADAL" clId="{85493198-F5A1-D84A-A2CA-FD6227E497BA}" dt="2025-04-14T02:09:18.533" v="220"/>
-        <pc:sldMkLst>
-          <pc:docMk/>
-          <pc:sldMk cId="2405241836" sldId="490"/>
-        </pc:sldMkLst>
-        <pc:spChg chg="del">
-          <ac:chgData name="Marco Pavone" userId="614fc057-48e4-49a1-a143-71473b5022f3" providerId="ADAL" clId="{85493198-F5A1-D84A-A2CA-FD6227E497BA}" dt="2025-04-14T02:08:31.518" v="217"/>
-          <ac:spMkLst>
-            <pc:docMk/>
-            <pc:sldMk cId="2405241836" sldId="490"/>
-            <ac:spMk id="4" creationId="{26942A48-2504-5F40-9578-7ABCDAD90A29}"/>
-          </ac:spMkLst>
-        </pc:spChg>
-        <pc:spChg chg="del">
-          <ac:chgData name="Marco Pavone" userId="614fc057-48e4-49a1-a143-71473b5022f3" providerId="ADAL" clId="{85493198-F5A1-D84A-A2CA-FD6227E497BA}" dt="2025-04-14T02:08:08.765" v="216"/>
-          <ac:spMkLst>
-            <pc:docMk/>
-            <pc:sldMk cId="2405241836" sldId="490"/>
-            <ac:spMk id="5" creationId="{1B43A33E-4771-D04E-B4A2-6144E3892786}"/>
-          </ac:spMkLst>
-        </pc:spChg>
-        <pc:spChg chg="del">
-          <ac:chgData name="Marco Pavone" userId="614fc057-48e4-49a1-a143-71473b5022f3" providerId="ADAL" clId="{85493198-F5A1-D84A-A2CA-FD6227E497BA}" dt="2025-04-14T02:08:08.765" v="216"/>
-          <ac:spMkLst>
-            <pc:docMk/>
-            <pc:sldMk cId="2405241836" sldId="490"/>
-            <ac:spMk id="6" creationId="{E2D2CEF4-5B1F-4678-AAA6-9C208B7E3B7D}"/>
-          </ac:spMkLst>
-        </pc:spChg>
-        <pc:spChg chg="add del mod">
-          <ac:chgData name="Marco Pavone" userId="614fc057-48e4-49a1-a143-71473b5022f3" providerId="ADAL" clId="{85493198-F5A1-D84A-A2CA-FD6227E497BA}" dt="2025-04-14T02:09:02.180" v="219"/>
-          <ac:spMkLst>
-            <pc:docMk/>
-            <pc:sldMk cId="2405241836" sldId="490"/>
-            <ac:spMk id="7" creationId="{519A96BD-5631-7D88-5EE4-A5814444125A}"/>
-          </ac:spMkLst>
-        </pc:spChg>
-        <pc:spChg chg="add del mod">
-          <ac:chgData name="Marco Pavone" userId="614fc057-48e4-49a1-a143-71473b5022f3" providerId="ADAL" clId="{85493198-F5A1-D84A-A2CA-FD6227E497BA}" dt="2025-04-14T02:09:02.180" v="219"/>
-          <ac:spMkLst>
-            <pc:docMk/>
-            <pc:sldMk cId="2405241836" sldId="490"/>
-            <ac:spMk id="8" creationId="{7A9B588C-21C7-580D-6440-A97EA0E32E2E}"/>
-          </ac:spMkLst>
-        </pc:spChg>
-        <pc:spChg chg="add del mod">
-          <ac:chgData name="Marco Pavone" userId="614fc057-48e4-49a1-a143-71473b5022f3" providerId="ADAL" clId="{85493198-F5A1-D84A-A2CA-FD6227E497BA}" dt="2025-04-14T02:09:02.180" v="219"/>
-          <ac:spMkLst>
-            <pc:docMk/>
-            <pc:sldMk cId="2405241836" sldId="490"/>
-            <ac:spMk id="9" creationId="{B1E8C689-44B9-373A-F676-123D1EB5043F}"/>
-          </ac:spMkLst>
-        </pc:spChg>
-        <pc:spChg chg="add mod">
-          <ac:chgData name="Marco Pavone" userId="614fc057-48e4-49a1-a143-71473b5022f3" providerId="ADAL" clId="{85493198-F5A1-D84A-A2CA-FD6227E497BA}" dt="2025-04-14T02:09:18.533" v="220"/>
-          <ac:spMkLst>
-            <pc:docMk/>
-            <pc:sldMk cId="2405241836" sldId="490"/>
-            <ac:spMk id="10" creationId="{FA8B2546-83FB-D27B-FCAF-E79312A3D764}"/>
-          </ac:spMkLst>
-        </pc:spChg>
-        <pc:spChg chg="add mod">
-          <ac:chgData name="Marco Pavone" userId="614fc057-48e4-49a1-a143-71473b5022f3" providerId="ADAL" clId="{85493198-F5A1-D84A-A2CA-FD6227E497BA}" dt="2025-04-14T02:09:18.533" v="220"/>
-          <ac:spMkLst>
-            <pc:docMk/>
-            <pc:sldMk cId="2405241836" sldId="490"/>
-            <ac:spMk id="11" creationId="{A1853DDD-FCFC-B56C-1BDB-AE8875929FB1}"/>
-          </ac:spMkLst>
-        </pc:spChg>
-        <pc:spChg chg="add mod">
-          <ac:chgData name="Marco Pavone" userId="614fc057-48e4-49a1-a143-71473b5022f3" providerId="ADAL" clId="{85493198-F5A1-D84A-A2CA-FD6227E497BA}" dt="2025-04-14T02:09:18.533" v="220"/>
-          <ac:spMkLst>
-            <pc:docMk/>
-            <pc:sldMk cId="2405241836" sldId="490"/>
-            <ac:spMk id="12" creationId="{5DEA61B3-BC41-9865-0878-B2FB4328957F}"/>
-          </ac:spMkLst>
-        </pc:spChg>
-      </pc:sldChg>
-      <pc:sldChg chg="addSp delSp modSp modNotesTx">
-        <pc:chgData name="Marco Pavone" userId="614fc057-48e4-49a1-a143-71473b5022f3" providerId="ADAL" clId="{85493198-F5A1-D84A-A2CA-FD6227E497BA}" dt="2025-04-14T02:09:18.533" v="220"/>
-        <pc:sldMkLst>
-          <pc:docMk/>
-          <pc:sldMk cId="1843183195" sldId="491"/>
-        </pc:sldMkLst>
-        <pc:spChg chg="add del mod">
-          <ac:chgData name="Marco Pavone" userId="614fc057-48e4-49a1-a143-71473b5022f3" providerId="ADAL" clId="{85493198-F5A1-D84A-A2CA-FD6227E497BA}" dt="2025-04-14T02:09:02.180" v="219"/>
-          <ac:spMkLst>
-            <pc:docMk/>
-            <pc:sldMk cId="1843183195" sldId="491"/>
-            <ac:spMk id="2" creationId="{52BDD722-2DCE-F591-E6A1-9E041B663F3F}"/>
-          </ac:spMkLst>
-        </pc:spChg>
-        <pc:spChg chg="del">
-          <ac:chgData name="Marco Pavone" userId="614fc057-48e4-49a1-a143-71473b5022f3" providerId="ADAL" clId="{85493198-F5A1-D84A-A2CA-FD6227E497BA}" dt="2025-04-14T02:08:31.518" v="217"/>
-          <ac:spMkLst>
-            <pc:docMk/>
-            <pc:sldMk cId="1843183195" sldId="491"/>
-            <ac:spMk id="4" creationId="{26942A48-2504-5F40-9578-7ABCDAD90A29}"/>
-          </ac:spMkLst>
-        </pc:spChg>
-        <pc:spChg chg="del">
-          <ac:chgData name="Marco Pavone" userId="614fc057-48e4-49a1-a143-71473b5022f3" providerId="ADAL" clId="{85493198-F5A1-D84A-A2CA-FD6227E497BA}" dt="2025-04-14T02:08:08.765" v="216"/>
-          <ac:spMkLst>
-            <pc:docMk/>
-            <pc:sldMk cId="1843183195" sldId="491"/>
-            <ac:spMk id="5" creationId="{1B43A33E-4771-D04E-B4A2-6144E3892786}"/>
-          </ac:spMkLst>
-        </pc:spChg>
-        <pc:spChg chg="del">
-          <ac:chgData name="Marco Pavone" userId="614fc057-48e4-49a1-a143-71473b5022f3" providerId="ADAL" clId="{85493198-F5A1-D84A-A2CA-FD6227E497BA}" dt="2025-04-14T02:08:08.765" v="216"/>
-          <ac:spMkLst>
-            <pc:docMk/>
-            <pc:sldMk cId="1843183195" sldId="491"/>
-            <ac:spMk id="6" creationId="{E5F15F04-65A2-42FD-8335-57413D47B668}"/>
-          </ac:spMkLst>
-        </pc:spChg>
-        <pc:spChg chg="add del mod">
-          <ac:chgData name="Marco Pavone" userId="614fc057-48e4-49a1-a143-71473b5022f3" providerId="ADAL" clId="{85493198-F5A1-D84A-A2CA-FD6227E497BA}" dt="2025-04-14T02:09:02.180" v="219"/>
-          <ac:spMkLst>
-            <pc:docMk/>
-            <pc:sldMk cId="1843183195" sldId="491"/>
-            <ac:spMk id="7" creationId="{389B5F23-81F4-E258-5F0B-6922A0A1468E}"/>
-          </ac:spMkLst>
-        </pc:spChg>
-        <pc:spChg chg="add del mod">
-          <ac:chgData name="Marco Pavone" userId="614fc057-48e4-49a1-a143-71473b5022f3" providerId="ADAL" clId="{85493198-F5A1-D84A-A2CA-FD6227E497BA}" dt="2025-04-14T02:09:02.180" v="219"/>
-          <ac:spMkLst>
-            <pc:docMk/>
-            <pc:sldMk cId="1843183195" sldId="491"/>
-            <ac:spMk id="8" creationId="{2F91F75B-CFB7-97BF-5EE1-C236414A8FFE}"/>
-          </ac:spMkLst>
-        </pc:spChg>
-        <pc:spChg chg="add mod">
-          <ac:chgData name="Marco Pavone" userId="614fc057-48e4-49a1-a143-71473b5022f3" providerId="ADAL" clId="{85493198-F5A1-D84A-A2CA-FD6227E497BA}" dt="2025-04-14T02:09:18.533" v="220"/>
-          <ac:spMkLst>
-            <pc:docMk/>
-            <pc:sldMk cId="1843183195" sldId="491"/>
-            <ac:spMk id="10" creationId="{5C521188-9089-4E60-E632-33671BA7A2AE}"/>
-          </ac:spMkLst>
-        </pc:spChg>
-        <pc:spChg chg="add mod">
-          <ac:chgData name="Marco Pavone" userId="614fc057-48e4-49a1-a143-71473b5022f3" providerId="ADAL" clId="{85493198-F5A1-D84A-A2CA-FD6227E497BA}" dt="2025-04-14T02:09:18.533" v="220"/>
-          <ac:spMkLst>
-            <pc:docMk/>
-            <pc:sldMk cId="1843183195" sldId="491"/>
-            <ac:spMk id="11" creationId="{612FA555-9E19-60D8-3993-F7D8D3992C9B}"/>
-          </ac:spMkLst>
-        </pc:spChg>
-        <pc:spChg chg="add mod">
-          <ac:chgData name="Marco Pavone" userId="614fc057-48e4-49a1-a143-71473b5022f3" providerId="ADAL" clId="{85493198-F5A1-D84A-A2CA-FD6227E497BA}" dt="2025-04-14T02:09:18.533" v="220"/>
-          <ac:spMkLst>
-            <pc:docMk/>
-            <pc:sldMk cId="1843183195" sldId="491"/>
-            <ac:spMk id="12" creationId="{5C24DDB0-E6F8-B27E-4B01-FC260784FC98}"/>
-          </ac:spMkLst>
-        </pc:spChg>
-      </pc:sldChg>
-      <pc:sldChg chg="addSp delSp modSp">
-        <pc:chgData name="Marco Pavone" userId="614fc057-48e4-49a1-a143-71473b5022f3" providerId="ADAL" clId="{85493198-F5A1-D84A-A2CA-FD6227E497BA}" dt="2025-04-14T02:09:18.533" v="220"/>
-        <pc:sldMkLst>
-          <pc:docMk/>
-          <pc:sldMk cId="1851050611" sldId="492"/>
-        </pc:sldMkLst>
-        <pc:spChg chg="del">
-          <ac:chgData name="Marco Pavone" userId="614fc057-48e4-49a1-a143-71473b5022f3" providerId="ADAL" clId="{85493198-F5A1-D84A-A2CA-FD6227E497BA}" dt="2025-04-14T02:08:31.518" v="217"/>
-          <ac:spMkLst>
-            <pc:docMk/>
-            <pc:sldMk cId="1851050611" sldId="492"/>
-            <ac:spMk id="4" creationId="{FBB824E0-635A-4F4F-9853-EED0AAE92C57}"/>
-          </ac:spMkLst>
-        </pc:spChg>
-        <pc:spChg chg="del">
-          <ac:chgData name="Marco Pavone" userId="614fc057-48e4-49a1-a143-71473b5022f3" providerId="ADAL" clId="{85493198-F5A1-D84A-A2CA-FD6227E497BA}" dt="2025-04-14T02:08:08.765" v="216"/>
-          <ac:spMkLst>
-            <pc:docMk/>
-            <pc:sldMk cId="1851050611" sldId="492"/>
-            <ac:spMk id="5" creationId="{20CCAFB4-9B34-0246-ACC3-6066960E07D8}"/>
-          </ac:spMkLst>
-        </pc:spChg>
-        <pc:spChg chg="del">
-          <ac:chgData name="Marco Pavone" userId="614fc057-48e4-49a1-a143-71473b5022f3" providerId="ADAL" clId="{85493198-F5A1-D84A-A2CA-FD6227E497BA}" dt="2025-04-14T02:08:08.765" v="216"/>
-          <ac:spMkLst>
-            <pc:docMk/>
-            <pc:sldMk cId="1851050611" sldId="492"/>
-            <ac:spMk id="6" creationId="{F260D649-9B24-4267-8CD0-5F15B5A4FFA6}"/>
-          </ac:spMkLst>
-        </pc:spChg>
-        <pc:spChg chg="add del mod">
-          <ac:chgData name="Marco Pavone" userId="614fc057-48e4-49a1-a143-71473b5022f3" providerId="ADAL" clId="{85493198-F5A1-D84A-A2CA-FD6227E497BA}" dt="2025-04-14T02:09:02.180" v="219"/>
-          <ac:spMkLst>
-            <pc:docMk/>
-            <pc:sldMk cId="1851050611" sldId="492"/>
-            <ac:spMk id="12" creationId="{1C98EA1D-AFC7-5311-158B-6FE42797892E}"/>
-          </ac:spMkLst>
-        </pc:spChg>
-        <pc:spChg chg="add del mod">
-          <ac:chgData name="Marco Pavone" userId="614fc057-48e4-49a1-a143-71473b5022f3" providerId="ADAL" clId="{85493198-F5A1-D84A-A2CA-FD6227E497BA}" dt="2025-04-14T02:09:02.180" v="219"/>
-          <ac:spMkLst>
-            <pc:docMk/>
-            <pc:sldMk cId="1851050611" sldId="492"/>
-            <ac:spMk id="13" creationId="{97CB972A-E3A1-6377-A8E6-45C94EE86C29}"/>
-          </ac:spMkLst>
-        </pc:spChg>
-        <pc:spChg chg="add del mod">
-          <ac:chgData name="Marco Pavone" userId="614fc057-48e4-49a1-a143-71473b5022f3" providerId="ADAL" clId="{85493198-F5A1-D84A-A2CA-FD6227E497BA}" dt="2025-04-14T02:09:02.180" v="219"/>
-          <ac:spMkLst>
-            <pc:docMk/>
-            <pc:sldMk cId="1851050611" sldId="492"/>
-            <ac:spMk id="14" creationId="{599D0A8F-7FE5-3D63-7A55-B2044EB88C7F}"/>
-          </ac:spMkLst>
-        </pc:spChg>
-        <pc:spChg chg="add mod">
-          <ac:chgData name="Marco Pavone" userId="614fc057-48e4-49a1-a143-71473b5022f3" providerId="ADAL" clId="{85493198-F5A1-D84A-A2CA-FD6227E497BA}" dt="2025-04-14T02:09:18.533" v="220"/>
-          <ac:spMkLst>
-            <pc:docMk/>
-            <pc:sldMk cId="1851050611" sldId="492"/>
-            <ac:spMk id="15" creationId="{D39650F6-1524-39D3-EBA0-D260C2A42CF3}"/>
-          </ac:spMkLst>
-        </pc:spChg>
-        <pc:spChg chg="add mod">
-          <ac:chgData name="Marco Pavone" userId="614fc057-48e4-49a1-a143-71473b5022f3" providerId="ADAL" clId="{85493198-F5A1-D84A-A2CA-FD6227E497BA}" dt="2025-04-14T02:09:18.533" v="220"/>
-          <ac:spMkLst>
-            <pc:docMk/>
-            <pc:sldMk cId="1851050611" sldId="492"/>
-            <ac:spMk id="16" creationId="{9346642E-67C3-964E-A092-769AEC7F7B69}"/>
-          </ac:spMkLst>
-        </pc:spChg>
-        <pc:spChg chg="add mod">
-          <ac:chgData name="Marco Pavone" userId="614fc057-48e4-49a1-a143-71473b5022f3" providerId="ADAL" clId="{85493198-F5A1-D84A-A2CA-FD6227E497BA}" dt="2025-04-14T02:09:18.533" v="220"/>
-          <ac:spMkLst>
-            <pc:docMk/>
-            <pc:sldMk cId="1851050611" sldId="492"/>
-            <ac:spMk id="17" creationId="{8E142555-872F-6E52-99F9-AA28C5952CEC}"/>
-          </ac:spMkLst>
-        </pc:spChg>
-      </pc:sldChg>
-      <pc:sldChg chg="addSp delSp modSp">
-        <pc:chgData name="Marco Pavone" userId="614fc057-48e4-49a1-a143-71473b5022f3" providerId="ADAL" clId="{85493198-F5A1-D84A-A2CA-FD6227E497BA}" dt="2025-04-14T02:09:18.533" v="220"/>
-        <pc:sldMkLst>
-          <pc:docMk/>
-          <pc:sldMk cId="3907072504" sldId="493"/>
-        </pc:sldMkLst>
-        <pc:spChg chg="del">
-          <ac:chgData name="Marco Pavone" userId="614fc057-48e4-49a1-a143-71473b5022f3" providerId="ADAL" clId="{85493198-F5A1-D84A-A2CA-FD6227E497BA}" dt="2025-04-14T02:08:31.518" v="217"/>
-          <ac:spMkLst>
-            <pc:docMk/>
-            <pc:sldMk cId="3907072504" sldId="493"/>
-            <ac:spMk id="4" creationId="{4601EDBE-CC6A-4B42-AF5A-2C29B475C9E5}"/>
-          </ac:spMkLst>
-        </pc:spChg>
-        <pc:spChg chg="del">
-          <ac:chgData name="Marco Pavone" userId="614fc057-48e4-49a1-a143-71473b5022f3" providerId="ADAL" clId="{85493198-F5A1-D84A-A2CA-FD6227E497BA}" dt="2025-04-14T02:08:08.765" v="216"/>
-          <ac:spMkLst>
-            <pc:docMk/>
-            <pc:sldMk cId="3907072504" sldId="493"/>
-            <ac:spMk id="5" creationId="{06191A92-DAB0-6449-9362-66728C460636}"/>
-          </ac:spMkLst>
-        </pc:spChg>
-        <pc:spChg chg="del">
-          <ac:chgData name="Marco Pavone" userId="614fc057-48e4-49a1-a143-71473b5022f3" providerId="ADAL" clId="{85493198-F5A1-D84A-A2CA-FD6227E497BA}" dt="2025-04-14T02:08:08.765" v="216"/>
-          <ac:spMkLst>
-            <pc:docMk/>
-            <pc:sldMk cId="3907072504" sldId="493"/>
-            <ac:spMk id="6" creationId="{7451A7B9-A96B-4EDF-9395-081FFBFD6ED1}"/>
-          </ac:spMkLst>
-        </pc:spChg>
-        <pc:spChg chg="add del mod">
-          <ac:chgData name="Marco Pavone" userId="614fc057-48e4-49a1-a143-71473b5022f3" providerId="ADAL" clId="{85493198-F5A1-D84A-A2CA-FD6227E497BA}" dt="2025-04-14T02:09:02.180" v="219"/>
-          <ac:spMkLst>
-            <pc:docMk/>
-            <pc:sldMk cId="3907072504" sldId="493"/>
-            <ac:spMk id="7" creationId="{C73B1ED2-7335-DE11-BEA5-61731EE5921D}"/>
-          </ac:spMkLst>
-        </pc:spChg>
-        <pc:spChg chg="add del mod">
-          <ac:chgData name="Marco Pavone" userId="614fc057-48e4-49a1-a143-71473b5022f3" providerId="ADAL" clId="{85493198-F5A1-D84A-A2CA-FD6227E497BA}" dt="2025-04-14T02:09:02.180" v="219"/>
-          <ac:spMkLst>
-            <pc:docMk/>
-            <pc:sldMk cId="3907072504" sldId="493"/>
-            <ac:spMk id="8" creationId="{11379E41-33DA-75C2-00E2-2E7945D6D468}"/>
-          </ac:spMkLst>
-        </pc:spChg>
-        <pc:spChg chg="add del mod">
-          <ac:chgData name="Marco Pavone" userId="614fc057-48e4-49a1-a143-71473b5022f3" providerId="ADAL" clId="{85493198-F5A1-D84A-A2CA-FD6227E497BA}" dt="2025-04-14T02:09:02.180" v="219"/>
-          <ac:spMkLst>
-            <pc:docMk/>
-            <pc:sldMk cId="3907072504" sldId="493"/>
-            <ac:spMk id="9" creationId="{2D00DB63-8753-213D-DB16-CC1473501F78}"/>
-          </ac:spMkLst>
-        </pc:spChg>
-        <pc:spChg chg="add mod">
-          <ac:chgData name="Marco Pavone" userId="614fc057-48e4-49a1-a143-71473b5022f3" providerId="ADAL" clId="{85493198-F5A1-D84A-A2CA-FD6227E497BA}" dt="2025-04-14T02:09:18.533" v="220"/>
-          <ac:spMkLst>
-            <pc:docMk/>
-            <pc:sldMk cId="3907072504" sldId="493"/>
-            <ac:spMk id="10" creationId="{B971DFE3-08A2-C174-45BD-FF18647E20AA}"/>
-          </ac:spMkLst>
-        </pc:spChg>
-        <pc:spChg chg="add mod">
-          <ac:chgData name="Marco Pavone" userId="614fc057-48e4-49a1-a143-71473b5022f3" providerId="ADAL" clId="{85493198-F5A1-D84A-A2CA-FD6227E497BA}" dt="2025-04-14T02:09:18.533" v="220"/>
-          <ac:spMkLst>
-            <pc:docMk/>
-            <pc:sldMk cId="3907072504" sldId="493"/>
-            <ac:spMk id="11" creationId="{82DEC615-72AD-02B1-A879-3CF09CC89E61}"/>
-          </ac:spMkLst>
-        </pc:spChg>
-        <pc:spChg chg="add mod">
-          <ac:chgData name="Marco Pavone" userId="614fc057-48e4-49a1-a143-71473b5022f3" providerId="ADAL" clId="{85493198-F5A1-D84A-A2CA-FD6227E497BA}" dt="2025-04-14T02:09:18.533" v="220"/>
-          <ac:spMkLst>
-            <pc:docMk/>
-            <pc:sldMk cId="3907072504" sldId="493"/>
-            <ac:spMk id="12" creationId="{7DE00116-2E42-0F9C-01E3-ABB928D5113F}"/>
-          </ac:spMkLst>
-        </pc:spChg>
-      </pc:sldChg>
-      <pc:sldChg chg="addSp delSp modSp">
-        <pc:chgData name="Marco Pavone" userId="614fc057-48e4-49a1-a143-71473b5022f3" providerId="ADAL" clId="{85493198-F5A1-D84A-A2CA-FD6227E497BA}" dt="2025-04-14T02:09:18.533" v="220"/>
-        <pc:sldMkLst>
-          <pc:docMk/>
-          <pc:sldMk cId="4219252409" sldId="494"/>
-        </pc:sldMkLst>
-        <pc:spChg chg="del">
-          <ac:chgData name="Marco Pavone" userId="614fc057-48e4-49a1-a143-71473b5022f3" providerId="ADAL" clId="{85493198-F5A1-D84A-A2CA-FD6227E497BA}" dt="2025-04-14T02:08:31.518" v="217"/>
-          <ac:spMkLst>
-            <pc:docMk/>
-            <pc:sldMk cId="4219252409" sldId="494"/>
-            <ac:spMk id="4" creationId="{1B8814ED-5F59-7248-B3A5-E275D2E0D126}"/>
-          </ac:spMkLst>
-        </pc:spChg>
-        <pc:spChg chg="del">
-          <ac:chgData name="Marco Pavone" userId="614fc057-48e4-49a1-a143-71473b5022f3" providerId="ADAL" clId="{85493198-F5A1-D84A-A2CA-FD6227E497BA}" dt="2025-04-14T02:08:08.765" v="216"/>
-          <ac:spMkLst>
-            <pc:docMk/>
-            <pc:sldMk cId="4219252409" sldId="494"/>
-            <ac:spMk id="5" creationId="{E9E9A2AD-1B68-0045-AB3B-F38F86490C5F}"/>
-          </ac:spMkLst>
-        </pc:spChg>
-        <pc:spChg chg="del">
-          <ac:chgData name="Marco Pavone" userId="614fc057-48e4-49a1-a143-71473b5022f3" providerId="ADAL" clId="{85493198-F5A1-D84A-A2CA-FD6227E497BA}" dt="2025-04-14T02:08:08.765" v="216"/>
-          <ac:spMkLst>
-            <pc:docMk/>
-            <pc:sldMk cId="4219252409" sldId="494"/>
-            <ac:spMk id="6" creationId="{342469A3-A9CC-4762-A5E0-9519C12D048A}"/>
-          </ac:spMkLst>
-        </pc:spChg>
-        <pc:spChg chg="add del mod">
-          <ac:chgData name="Marco Pavone" userId="614fc057-48e4-49a1-a143-71473b5022f3" providerId="ADAL" clId="{85493198-F5A1-D84A-A2CA-FD6227E497BA}" dt="2025-04-14T02:09:02.180" v="219"/>
-          <ac:spMkLst>
-            <pc:docMk/>
-            <pc:sldMk cId="4219252409" sldId="494"/>
-            <ac:spMk id="7" creationId="{065A9019-AD81-96A1-3ED1-07003BC2DE08}"/>
-          </ac:spMkLst>
-        </pc:spChg>
-        <pc:spChg chg="add del mod">
-          <ac:chgData name="Marco Pavone" userId="614fc057-48e4-49a1-a143-71473b5022f3" providerId="ADAL" clId="{85493198-F5A1-D84A-A2CA-FD6227E497BA}" dt="2025-04-14T02:09:02.180" v="219"/>
-          <ac:spMkLst>
-            <pc:docMk/>
-            <pc:sldMk cId="4219252409" sldId="494"/>
-            <ac:spMk id="8" creationId="{75803D8E-255A-5200-01AC-31D38DD49283}"/>
-          </ac:spMkLst>
-        </pc:spChg>
-        <pc:spChg chg="add del mod">
-          <ac:chgData name="Marco Pavone" userId="614fc057-48e4-49a1-a143-71473b5022f3" providerId="ADAL" clId="{85493198-F5A1-D84A-A2CA-FD6227E497BA}" dt="2025-04-14T02:09:02.180" v="219"/>
-          <ac:spMkLst>
-            <pc:docMk/>
-            <pc:sldMk cId="4219252409" sldId="494"/>
-            <ac:spMk id="9" creationId="{5891E3BB-03D5-37E7-F554-F2C8F2FFDFFC}"/>
-          </ac:spMkLst>
-        </pc:spChg>
-        <pc:spChg chg="add mod">
-          <ac:chgData name="Marco Pavone" userId="614fc057-48e4-49a1-a143-71473b5022f3" providerId="ADAL" clId="{85493198-F5A1-D84A-A2CA-FD6227E497BA}" dt="2025-04-14T02:09:18.533" v="220"/>
-          <ac:spMkLst>
-            <pc:docMk/>
-            <pc:sldMk cId="4219252409" sldId="494"/>
-            <ac:spMk id="10" creationId="{2DABF1A0-C127-420A-D9EA-E6FA14962332}"/>
-          </ac:spMkLst>
-        </pc:spChg>
-        <pc:spChg chg="add mod">
-          <ac:chgData name="Marco Pavone" userId="614fc057-48e4-49a1-a143-71473b5022f3" providerId="ADAL" clId="{85493198-F5A1-D84A-A2CA-FD6227E497BA}" dt="2025-04-14T02:09:18.533" v="220"/>
-          <ac:spMkLst>
-            <pc:docMk/>
-            <pc:sldMk cId="4219252409" sldId="494"/>
-            <ac:spMk id="11" creationId="{7C009AE0-C5FF-2B1E-C9BB-F6B83B046736}"/>
-          </ac:spMkLst>
-        </pc:spChg>
-        <pc:spChg chg="add mod">
-          <ac:chgData name="Marco Pavone" userId="614fc057-48e4-49a1-a143-71473b5022f3" providerId="ADAL" clId="{85493198-F5A1-D84A-A2CA-FD6227E497BA}" dt="2025-04-14T02:09:18.533" v="220"/>
-          <ac:spMkLst>
-            <pc:docMk/>
-            <pc:sldMk cId="4219252409" sldId="494"/>
-            <ac:spMk id="12" creationId="{CA9477BF-2CA6-A625-4FF5-EC65B2B7699F}"/>
-          </ac:spMkLst>
-        </pc:spChg>
-      </pc:sldChg>
-      <pc:sldChg chg="addSp delSp modSp">
-        <pc:chgData name="Marco Pavone" userId="614fc057-48e4-49a1-a143-71473b5022f3" providerId="ADAL" clId="{85493198-F5A1-D84A-A2CA-FD6227E497BA}" dt="2025-04-14T02:09:18.533" v="220"/>
-        <pc:sldMkLst>
-          <pc:docMk/>
-          <pc:sldMk cId="1839397506" sldId="495"/>
-        </pc:sldMkLst>
-        <pc:spChg chg="del">
-          <ac:chgData name="Marco Pavone" userId="614fc057-48e4-49a1-a143-71473b5022f3" providerId="ADAL" clId="{85493198-F5A1-D84A-A2CA-FD6227E497BA}" dt="2025-04-14T02:08:31.518" v="217"/>
-          <ac:spMkLst>
-            <pc:docMk/>
-            <pc:sldMk cId="1839397506" sldId="495"/>
-            <ac:spMk id="4" creationId="{696FF1FF-27E6-E14B-855E-8507F720FF66}"/>
-          </ac:spMkLst>
-        </pc:spChg>
-        <pc:spChg chg="del">
-          <ac:chgData name="Marco Pavone" userId="614fc057-48e4-49a1-a143-71473b5022f3" providerId="ADAL" clId="{85493198-F5A1-D84A-A2CA-FD6227E497BA}" dt="2025-04-14T02:08:08.765" v="216"/>
-          <ac:spMkLst>
-            <pc:docMk/>
-            <pc:sldMk cId="1839397506" sldId="495"/>
-            <ac:spMk id="5" creationId="{5369E888-22FD-6C47-AA11-36EE4B923282}"/>
-          </ac:spMkLst>
-        </pc:spChg>
-        <pc:spChg chg="del">
-          <ac:chgData name="Marco Pavone" userId="614fc057-48e4-49a1-a143-71473b5022f3" providerId="ADAL" clId="{85493198-F5A1-D84A-A2CA-FD6227E497BA}" dt="2025-04-14T02:08:08.765" v="216"/>
-          <ac:spMkLst>
-            <pc:docMk/>
-            <pc:sldMk cId="1839397506" sldId="495"/>
-            <ac:spMk id="6" creationId="{D02D8DE8-30B5-4459-9ADA-AF4D59448903}"/>
-          </ac:spMkLst>
-        </pc:spChg>
-        <pc:spChg chg="add del mod">
-          <ac:chgData name="Marco Pavone" userId="614fc057-48e4-49a1-a143-71473b5022f3" providerId="ADAL" clId="{85493198-F5A1-D84A-A2CA-FD6227E497BA}" dt="2025-04-14T02:09:02.180" v="219"/>
-          <ac:spMkLst>
-            <pc:docMk/>
-            <pc:sldMk cId="1839397506" sldId="495"/>
-            <ac:spMk id="7" creationId="{3B2CB695-48E0-42A1-A895-2E1384ABF0B4}"/>
-          </ac:spMkLst>
-        </pc:spChg>
-        <pc:spChg chg="add del mod">
-          <ac:chgData name="Marco Pavone" userId="614fc057-48e4-49a1-a143-71473b5022f3" providerId="ADAL" clId="{85493198-F5A1-D84A-A2CA-FD6227E497BA}" dt="2025-04-14T02:09:02.180" v="219"/>
-          <ac:spMkLst>
-            <pc:docMk/>
-            <pc:sldMk cId="1839397506" sldId="495"/>
-            <ac:spMk id="8" creationId="{D4C8E66F-0178-3E79-CAE8-E6FC082172B9}"/>
-          </ac:spMkLst>
-        </pc:spChg>
-        <pc:spChg chg="add del mod">
-          <ac:chgData name="Marco Pavone" userId="614fc057-48e4-49a1-a143-71473b5022f3" providerId="ADAL" clId="{85493198-F5A1-D84A-A2CA-FD6227E497BA}" dt="2025-04-14T02:09:02.180" v="219"/>
-          <ac:spMkLst>
-            <pc:docMk/>
-            <pc:sldMk cId="1839397506" sldId="495"/>
-            <ac:spMk id="9" creationId="{8109E763-5CE5-2EDF-A305-E73679E79342}"/>
-          </ac:spMkLst>
-        </pc:spChg>
-        <pc:spChg chg="add mod">
-          <ac:chgData name="Marco Pavone" userId="614fc057-48e4-49a1-a143-71473b5022f3" providerId="ADAL" clId="{85493198-F5A1-D84A-A2CA-FD6227E497BA}" dt="2025-04-14T02:09:18.533" v="220"/>
-          <ac:spMkLst>
-            <pc:docMk/>
-            <pc:sldMk cId="1839397506" sldId="495"/>
-            <ac:spMk id="10" creationId="{4C9A5C04-498F-C7C3-C3EE-26DE5568ED11}"/>
-          </ac:spMkLst>
-        </pc:spChg>
-        <pc:spChg chg="add mod">
-          <ac:chgData name="Marco Pavone" userId="614fc057-48e4-49a1-a143-71473b5022f3" providerId="ADAL" clId="{85493198-F5A1-D84A-A2CA-FD6227E497BA}" dt="2025-04-14T02:09:18.533" v="220"/>
-          <ac:spMkLst>
-            <pc:docMk/>
-            <pc:sldMk cId="1839397506" sldId="495"/>
-            <ac:spMk id="11" creationId="{78FABA35-EEBC-8A53-DB7F-52C97C17CA5D}"/>
-          </ac:spMkLst>
-        </pc:spChg>
-        <pc:spChg chg="add mod">
-          <ac:chgData name="Marco Pavone" userId="614fc057-48e4-49a1-a143-71473b5022f3" providerId="ADAL" clId="{85493198-F5A1-D84A-A2CA-FD6227E497BA}" dt="2025-04-14T02:09:18.533" v="220"/>
-          <ac:spMkLst>
-            <pc:docMk/>
-            <pc:sldMk cId="1839397506" sldId="495"/>
-            <ac:spMk id="12" creationId="{27C39AF7-A801-31E3-3F39-C4C55D6DF897}"/>
-          </ac:spMkLst>
-        </pc:spChg>
-      </pc:sldChg>
-      <pc:sldChg chg="addSp delSp modSp">
-        <pc:chgData name="Marco Pavone" userId="614fc057-48e4-49a1-a143-71473b5022f3" providerId="ADAL" clId="{85493198-F5A1-D84A-A2CA-FD6227E497BA}" dt="2025-04-14T02:09:18.533" v="220"/>
-        <pc:sldMkLst>
-          <pc:docMk/>
-          <pc:sldMk cId="3543055382" sldId="496"/>
-        </pc:sldMkLst>
-        <pc:spChg chg="del">
-          <ac:chgData name="Marco Pavone" userId="614fc057-48e4-49a1-a143-71473b5022f3" providerId="ADAL" clId="{85493198-F5A1-D84A-A2CA-FD6227E497BA}" dt="2025-04-14T02:08:31.518" v="217"/>
-          <ac:spMkLst>
-            <pc:docMk/>
-            <pc:sldMk cId="3543055382" sldId="496"/>
-            <ac:spMk id="4" creationId="{7B84E977-F718-0445-A7F2-D44647DA424D}"/>
-          </ac:spMkLst>
-        </pc:spChg>
-        <pc:spChg chg="del">
-          <ac:chgData name="Marco Pavone" userId="614fc057-48e4-49a1-a143-71473b5022f3" providerId="ADAL" clId="{85493198-F5A1-D84A-A2CA-FD6227E497BA}" dt="2025-04-14T02:08:08.765" v="216"/>
-          <ac:spMkLst>
-            <pc:docMk/>
-            <pc:sldMk cId="3543055382" sldId="496"/>
-            <ac:spMk id="5" creationId="{93041282-CB56-8940-B6E5-8B3A669264B0}"/>
-          </ac:spMkLst>
-        </pc:spChg>
-        <pc:spChg chg="del">
-          <ac:chgData name="Marco Pavone" userId="614fc057-48e4-49a1-a143-71473b5022f3" providerId="ADAL" clId="{85493198-F5A1-D84A-A2CA-FD6227E497BA}" dt="2025-04-14T02:08:08.765" v="216"/>
-          <ac:spMkLst>
-            <pc:docMk/>
-            <pc:sldMk cId="3543055382" sldId="496"/>
-            <ac:spMk id="6" creationId="{830D2BD5-FDF7-47BE-81A4-A028CF06165E}"/>
-          </ac:spMkLst>
-        </pc:spChg>
-        <pc:spChg chg="add del mod">
-          <ac:chgData name="Marco Pavone" userId="614fc057-48e4-49a1-a143-71473b5022f3" providerId="ADAL" clId="{85493198-F5A1-D84A-A2CA-FD6227E497BA}" dt="2025-04-14T02:09:02.180" v="219"/>
-          <ac:spMkLst>
-            <pc:docMk/>
-            <pc:sldMk cId="3543055382" sldId="496"/>
-            <ac:spMk id="7" creationId="{E73CCBB3-C100-81DD-FB51-F8463EAD78C1}"/>
-          </ac:spMkLst>
-        </pc:spChg>
-        <pc:spChg chg="add del mod">
-          <ac:chgData name="Marco Pavone" userId="614fc057-48e4-49a1-a143-71473b5022f3" providerId="ADAL" clId="{85493198-F5A1-D84A-A2CA-FD6227E497BA}" dt="2025-04-14T02:09:02.180" v="219"/>
-          <ac:spMkLst>
-            <pc:docMk/>
-            <pc:sldMk cId="3543055382" sldId="496"/>
-            <ac:spMk id="8" creationId="{42296B8A-2A7B-AE1D-3AE0-88F235879585}"/>
-          </ac:spMkLst>
-        </pc:spChg>
-        <pc:spChg chg="add del mod">
-          <ac:chgData name="Marco Pavone" userId="614fc057-48e4-49a1-a143-71473b5022f3" providerId="ADAL" clId="{85493198-F5A1-D84A-A2CA-FD6227E497BA}" dt="2025-04-14T02:09:02.180" v="219"/>
-          <ac:spMkLst>
-            <pc:docMk/>
-            <pc:sldMk cId="3543055382" sldId="496"/>
-            <ac:spMk id="9" creationId="{3A68CC34-D0FA-ACB9-C01F-499198AEAC27}"/>
-          </ac:spMkLst>
-        </pc:spChg>
-        <pc:spChg chg="add mod">
-          <ac:chgData name="Marco Pavone" userId="614fc057-48e4-49a1-a143-71473b5022f3" providerId="ADAL" clId="{85493198-F5A1-D84A-A2CA-FD6227E497BA}" dt="2025-04-14T02:09:18.533" v="220"/>
-          <ac:spMkLst>
-            <pc:docMk/>
-            <pc:sldMk cId="3543055382" sldId="496"/>
-            <ac:spMk id="10" creationId="{D96ABBCC-33ED-0612-A7B9-AC9113571CF3}"/>
-          </ac:spMkLst>
-        </pc:spChg>
-        <pc:spChg chg="add mod">
-          <ac:chgData name="Marco Pavone" userId="614fc057-48e4-49a1-a143-71473b5022f3" providerId="ADAL" clId="{85493198-F5A1-D84A-A2CA-FD6227E497BA}" dt="2025-04-14T02:09:18.533" v="220"/>
-          <ac:spMkLst>
-            <pc:docMk/>
-            <pc:sldMk cId="3543055382" sldId="496"/>
-            <ac:spMk id="11" creationId="{51C30EF7-DFDB-4E23-F1E8-508E958D22A0}"/>
-          </ac:spMkLst>
-        </pc:spChg>
-        <pc:spChg chg="add mod">
-          <ac:chgData name="Marco Pavone" userId="614fc057-48e4-49a1-a143-71473b5022f3" providerId="ADAL" clId="{85493198-F5A1-D84A-A2CA-FD6227E497BA}" dt="2025-04-14T02:09:18.533" v="220"/>
-          <ac:spMkLst>
-            <pc:docMk/>
-            <pc:sldMk cId="3543055382" sldId="496"/>
-            <ac:spMk id="12" creationId="{9019BDE6-D9B4-9716-9C33-9C50174A33B9}"/>
-          </ac:spMkLst>
-        </pc:spChg>
-      </pc:sldChg>
-      <pc:sldChg chg="addSp delSp modSp modNotesTx">
-        <pc:chgData name="Marco Pavone" userId="614fc057-48e4-49a1-a143-71473b5022f3" providerId="ADAL" clId="{85493198-F5A1-D84A-A2CA-FD6227E497BA}" dt="2025-04-14T02:09:18.533" v="220"/>
-        <pc:sldMkLst>
-          <pc:docMk/>
-          <pc:sldMk cId="90600401" sldId="497"/>
-        </pc:sldMkLst>
-        <pc:spChg chg="del">
-          <ac:chgData name="Marco Pavone" userId="614fc057-48e4-49a1-a143-71473b5022f3" providerId="ADAL" clId="{85493198-F5A1-D84A-A2CA-FD6227E497BA}" dt="2025-04-14T02:08:31.518" v="217"/>
-          <ac:spMkLst>
-            <pc:docMk/>
-            <pc:sldMk cId="90600401" sldId="497"/>
-            <ac:spMk id="4" creationId="{BF46A501-468E-7D44-95F2-BDAD6AD5C97B}"/>
-          </ac:spMkLst>
-        </pc:spChg>
-        <pc:spChg chg="del">
-          <ac:chgData name="Marco Pavone" userId="614fc057-48e4-49a1-a143-71473b5022f3" providerId="ADAL" clId="{85493198-F5A1-D84A-A2CA-FD6227E497BA}" dt="2025-04-14T02:08:08.765" v="216"/>
-          <ac:spMkLst>
-            <pc:docMk/>
-            <pc:sldMk cId="90600401" sldId="497"/>
-            <ac:spMk id="5" creationId="{9C9D1BF2-9D8B-794F-A0C2-F0C54EFE6F7A}"/>
-          </ac:spMkLst>
-        </pc:spChg>
-        <pc:spChg chg="del">
-          <ac:chgData name="Marco Pavone" userId="614fc057-48e4-49a1-a143-71473b5022f3" providerId="ADAL" clId="{85493198-F5A1-D84A-A2CA-FD6227E497BA}" dt="2025-04-14T02:08:08.765" v="216"/>
-          <ac:spMkLst>
-            <pc:docMk/>
-            <pc:sldMk cId="90600401" sldId="497"/>
-            <ac:spMk id="6" creationId="{28281EEA-C5F8-403D-B69D-9CC486186E67}"/>
-          </ac:spMkLst>
-        </pc:spChg>
-        <pc:spChg chg="add del mod">
-          <ac:chgData name="Marco Pavone" userId="614fc057-48e4-49a1-a143-71473b5022f3" providerId="ADAL" clId="{85493198-F5A1-D84A-A2CA-FD6227E497BA}" dt="2025-04-14T02:09:02.180" v="219"/>
-          <ac:spMkLst>
-            <pc:docMk/>
-            <pc:sldMk cId="90600401" sldId="497"/>
-            <ac:spMk id="10" creationId="{71341652-99B2-E5BA-7BFB-C88832A8C970}"/>
-          </ac:spMkLst>
-        </pc:spChg>
-        <pc:spChg chg="add del mod">
-          <ac:chgData name="Marco Pavone" userId="614fc057-48e4-49a1-a143-71473b5022f3" providerId="ADAL" clId="{85493198-F5A1-D84A-A2CA-FD6227E497BA}" dt="2025-04-14T02:09:02.180" v="219"/>
-          <ac:spMkLst>
-            <pc:docMk/>
-            <pc:sldMk cId="90600401" sldId="497"/>
-            <ac:spMk id="11" creationId="{17051BB9-585F-D2C2-9FB1-6802DD79A159}"/>
-          </ac:spMkLst>
-        </pc:spChg>
-        <pc:spChg chg="add del mod">
-          <ac:chgData name="Marco Pavone" userId="614fc057-48e4-49a1-a143-71473b5022f3" providerId="ADAL" clId="{85493198-F5A1-D84A-A2CA-FD6227E497BA}" dt="2025-04-14T02:09:02.180" v="219"/>
-          <ac:spMkLst>
-            <pc:docMk/>
-            <pc:sldMk cId="90600401" sldId="497"/>
-            <ac:spMk id="12" creationId="{A46CFF61-F905-0C55-DDC9-9C06B647EA94}"/>
-          </ac:spMkLst>
-        </pc:spChg>
-        <pc:spChg chg="add mod">
-          <ac:chgData name="Marco Pavone" userId="614fc057-48e4-49a1-a143-71473b5022f3" providerId="ADAL" clId="{85493198-F5A1-D84A-A2CA-FD6227E497BA}" dt="2025-04-14T02:09:18.533" v="220"/>
-          <ac:spMkLst>
-            <pc:docMk/>
-            <pc:sldMk cId="90600401" sldId="497"/>
-            <ac:spMk id="13" creationId="{9E5CBA4B-2190-3A88-542E-688750A3AEFB}"/>
-          </ac:spMkLst>
-        </pc:spChg>
-        <pc:spChg chg="add mod">
-          <ac:chgData name="Marco Pavone" userId="614fc057-48e4-49a1-a143-71473b5022f3" providerId="ADAL" clId="{85493198-F5A1-D84A-A2CA-FD6227E497BA}" dt="2025-04-14T02:09:18.533" v="220"/>
-          <ac:spMkLst>
-            <pc:docMk/>
-            <pc:sldMk cId="90600401" sldId="497"/>
-            <ac:spMk id="14" creationId="{5B8BD78E-7BA7-E1A6-3C2F-05EA70A90A4B}"/>
-          </ac:spMkLst>
-        </pc:spChg>
-        <pc:spChg chg="add mod">
-          <ac:chgData name="Marco Pavone" userId="614fc057-48e4-49a1-a143-71473b5022f3" providerId="ADAL" clId="{85493198-F5A1-D84A-A2CA-FD6227E497BA}" dt="2025-04-14T02:09:18.533" v="220"/>
-          <ac:spMkLst>
-            <pc:docMk/>
-            <pc:sldMk cId="90600401" sldId="497"/>
-            <ac:spMk id="15" creationId="{43B5391D-05BF-EC1C-EE1F-DAB96CF08185}"/>
-          </ac:spMkLst>
-        </pc:spChg>
-      </pc:sldChg>
-      <pc:sldChg chg="addSp delSp modSp">
-        <pc:chgData name="Marco Pavone" userId="614fc057-48e4-49a1-a143-71473b5022f3" providerId="ADAL" clId="{85493198-F5A1-D84A-A2CA-FD6227E497BA}" dt="2025-04-14T02:09:18.533" v="220"/>
-        <pc:sldMkLst>
-          <pc:docMk/>
-          <pc:sldMk cId="251172492" sldId="498"/>
-        </pc:sldMkLst>
-        <pc:spChg chg="del">
-          <ac:chgData name="Marco Pavone" userId="614fc057-48e4-49a1-a143-71473b5022f3" providerId="ADAL" clId="{85493198-F5A1-D84A-A2CA-FD6227E497BA}" dt="2025-04-14T02:08:31.518" v="217"/>
-          <ac:spMkLst>
-            <pc:docMk/>
-            <pc:sldMk cId="251172492" sldId="498"/>
-            <ac:spMk id="4" creationId="{45E991FB-728D-984A-8A4E-957C681E7A6A}"/>
-          </ac:spMkLst>
-        </pc:spChg>
-        <pc:spChg chg="del">
-          <ac:chgData name="Marco Pavone" userId="614fc057-48e4-49a1-a143-71473b5022f3" providerId="ADAL" clId="{85493198-F5A1-D84A-A2CA-FD6227E497BA}" dt="2025-04-14T02:08:08.765" v="216"/>
-          <ac:spMkLst>
-            <pc:docMk/>
-            <pc:sldMk cId="251172492" sldId="498"/>
-            <ac:spMk id="5" creationId="{A82B4B15-6128-434C-8115-B4AABE96DA31}"/>
-          </ac:spMkLst>
-        </pc:spChg>
-        <pc:spChg chg="del">
-          <ac:chgData name="Marco Pavone" userId="614fc057-48e4-49a1-a143-71473b5022f3" providerId="ADAL" clId="{85493198-F5A1-D84A-A2CA-FD6227E497BA}" dt="2025-04-14T02:08:08.765" v="216"/>
-          <ac:spMkLst>
-            <pc:docMk/>
-            <pc:sldMk cId="251172492" sldId="498"/>
-            <ac:spMk id="6" creationId="{DEA2DD58-4AB4-470E-B359-13E9EEC1BE7C}"/>
-          </ac:spMkLst>
-        </pc:spChg>
-        <pc:spChg chg="add del mod">
-          <ac:chgData name="Marco Pavone" userId="614fc057-48e4-49a1-a143-71473b5022f3" providerId="ADAL" clId="{85493198-F5A1-D84A-A2CA-FD6227E497BA}" dt="2025-04-14T02:09:02.180" v="219"/>
-          <ac:spMkLst>
-            <pc:docMk/>
-            <pc:sldMk cId="251172492" sldId="498"/>
-            <ac:spMk id="7" creationId="{4716EDB7-2A45-DB6B-1095-3BB14B92CEE2}"/>
-          </ac:spMkLst>
-        </pc:spChg>
-        <pc:spChg chg="add del mod">
-          <ac:chgData name="Marco Pavone" userId="614fc057-48e4-49a1-a143-71473b5022f3" providerId="ADAL" clId="{85493198-F5A1-D84A-A2CA-FD6227E497BA}" dt="2025-04-14T02:09:02.180" v="219"/>
-          <ac:spMkLst>
-            <pc:docMk/>
-            <pc:sldMk cId="251172492" sldId="498"/>
-            <ac:spMk id="8" creationId="{762ADEE6-09E8-24DA-674D-9EA89AF1016B}"/>
-          </ac:spMkLst>
-        </pc:spChg>
-        <pc:spChg chg="add del mod">
-          <ac:chgData name="Marco Pavone" userId="614fc057-48e4-49a1-a143-71473b5022f3" providerId="ADAL" clId="{85493198-F5A1-D84A-A2CA-FD6227E497BA}" dt="2025-04-14T02:09:02.180" v="219"/>
-          <ac:spMkLst>
-            <pc:docMk/>
-            <pc:sldMk cId="251172492" sldId="498"/>
-            <ac:spMk id="9" creationId="{2F0A33EB-DD40-C097-7D66-9D3F5D27F65F}"/>
-          </ac:spMkLst>
-        </pc:spChg>
-        <pc:spChg chg="add mod">
-          <ac:chgData name="Marco Pavone" userId="614fc057-48e4-49a1-a143-71473b5022f3" providerId="ADAL" clId="{85493198-F5A1-D84A-A2CA-FD6227E497BA}" dt="2025-04-14T02:09:18.533" v="220"/>
-          <ac:spMkLst>
-            <pc:docMk/>
-            <pc:sldMk cId="251172492" sldId="498"/>
-            <ac:spMk id="10" creationId="{67162B57-A084-74FD-F083-0EC376172FBD}"/>
-          </ac:spMkLst>
-        </pc:spChg>
-        <pc:spChg chg="add mod">
-          <ac:chgData name="Marco Pavone" userId="614fc057-48e4-49a1-a143-71473b5022f3" providerId="ADAL" clId="{85493198-F5A1-D84A-A2CA-FD6227E497BA}" dt="2025-04-14T02:09:18.533" v="220"/>
-          <ac:spMkLst>
-            <pc:docMk/>
-            <pc:sldMk cId="251172492" sldId="498"/>
-            <ac:spMk id="11" creationId="{AD6512D2-6BC8-E7D9-34D5-24AF0BDC07F0}"/>
-          </ac:spMkLst>
-        </pc:spChg>
-        <pc:spChg chg="add mod">
-          <ac:chgData name="Marco Pavone" userId="614fc057-48e4-49a1-a143-71473b5022f3" providerId="ADAL" clId="{85493198-F5A1-D84A-A2CA-FD6227E497BA}" dt="2025-04-14T02:09:18.533" v="220"/>
-          <ac:spMkLst>
-            <pc:docMk/>
-            <pc:sldMk cId="251172492" sldId="498"/>
-            <ac:spMk id="12" creationId="{5205EBB3-CD71-0002-0A41-3CFA57D9AE7C}"/>
-          </ac:spMkLst>
-        </pc:spChg>
-      </pc:sldChg>
-      <pc:sldChg chg="addSp delSp modSp">
-        <pc:chgData name="Marco Pavone" userId="614fc057-48e4-49a1-a143-71473b5022f3" providerId="ADAL" clId="{85493198-F5A1-D84A-A2CA-FD6227E497BA}" dt="2025-04-14T02:09:18.533" v="220"/>
-        <pc:sldMkLst>
-          <pc:docMk/>
-          <pc:sldMk cId="2585164842" sldId="499"/>
-        </pc:sldMkLst>
-        <pc:spChg chg="del">
-          <ac:chgData name="Marco Pavone" userId="614fc057-48e4-49a1-a143-71473b5022f3" providerId="ADAL" clId="{85493198-F5A1-D84A-A2CA-FD6227E497BA}" dt="2025-04-14T02:08:31.518" v="217"/>
-          <ac:spMkLst>
-            <pc:docMk/>
-            <pc:sldMk cId="2585164842" sldId="499"/>
-            <ac:spMk id="4" creationId="{5A308487-E801-5A42-96CB-6EDA0D0F016A}"/>
-          </ac:spMkLst>
-        </pc:spChg>
-        <pc:spChg chg="del">
-          <ac:chgData name="Marco Pavone" userId="614fc057-48e4-49a1-a143-71473b5022f3" providerId="ADAL" clId="{85493198-F5A1-D84A-A2CA-FD6227E497BA}" dt="2025-04-14T02:08:08.765" v="216"/>
-          <ac:spMkLst>
-            <pc:docMk/>
-            <pc:sldMk cId="2585164842" sldId="499"/>
-            <ac:spMk id="5" creationId="{7DB789AB-0DB8-E346-BDDC-E16B671FCA49}"/>
-          </ac:spMkLst>
-        </pc:spChg>
-        <pc:spChg chg="del">
-          <ac:chgData name="Marco Pavone" userId="614fc057-48e4-49a1-a143-71473b5022f3" providerId="ADAL" clId="{85493198-F5A1-D84A-A2CA-FD6227E497BA}" dt="2025-04-14T02:08:08.765" v="216"/>
-          <ac:spMkLst>
-            <pc:docMk/>
-            <pc:sldMk cId="2585164842" sldId="499"/>
-            <ac:spMk id="6" creationId="{61871972-CB6A-43B1-B698-9C2928054335}"/>
-          </ac:spMkLst>
-        </pc:spChg>
-        <pc:spChg chg="add del mod">
-          <ac:chgData name="Marco Pavone" userId="614fc057-48e4-49a1-a143-71473b5022f3" providerId="ADAL" clId="{85493198-F5A1-D84A-A2CA-FD6227E497BA}" dt="2025-04-14T02:09:02.180" v="219"/>
-          <ac:spMkLst>
-            <pc:docMk/>
-            <pc:sldMk cId="2585164842" sldId="499"/>
-            <ac:spMk id="7" creationId="{AAD62305-1577-2082-5812-FE04C3CAEE73}"/>
-          </ac:spMkLst>
-        </pc:spChg>
-        <pc:spChg chg="add del mod">
-          <ac:chgData name="Marco Pavone" userId="614fc057-48e4-49a1-a143-71473b5022f3" providerId="ADAL" clId="{85493198-F5A1-D84A-A2CA-FD6227E497BA}" dt="2025-04-14T02:09:02.180" v="219"/>
-          <ac:spMkLst>
-            <pc:docMk/>
-            <pc:sldMk cId="2585164842" sldId="499"/>
-            <ac:spMk id="8" creationId="{8AD1D9BE-B05A-D734-84EB-B66B3E313E6C}"/>
-          </ac:spMkLst>
-        </pc:spChg>
-        <pc:spChg chg="add del mod">
-          <ac:chgData name="Marco Pavone" userId="614fc057-48e4-49a1-a143-71473b5022f3" providerId="ADAL" clId="{85493198-F5A1-D84A-A2CA-FD6227E497BA}" dt="2025-04-14T02:09:02.180" v="219"/>
-          <ac:spMkLst>
-            <pc:docMk/>
-            <pc:sldMk cId="2585164842" sldId="499"/>
-            <ac:spMk id="9" creationId="{76C858CD-86C0-E003-8155-DA29BCBDFD7F}"/>
-          </ac:spMkLst>
-        </pc:spChg>
-        <pc:spChg chg="add mod">
-          <ac:chgData name="Marco Pavone" userId="614fc057-48e4-49a1-a143-71473b5022f3" providerId="ADAL" clId="{85493198-F5A1-D84A-A2CA-FD6227E497BA}" dt="2025-04-14T02:09:18.533" v="220"/>
-          <ac:spMkLst>
-            <pc:docMk/>
-            <pc:sldMk cId="2585164842" sldId="499"/>
-            <ac:spMk id="10" creationId="{27CC995A-BF77-BAF7-750A-013600ADC19C}"/>
-          </ac:spMkLst>
-        </pc:spChg>
-        <pc:spChg chg="add mod">
-          <ac:chgData name="Marco Pavone" userId="614fc057-48e4-49a1-a143-71473b5022f3" providerId="ADAL" clId="{85493198-F5A1-D84A-A2CA-FD6227E497BA}" dt="2025-04-14T02:09:18.533" v="220"/>
-          <ac:spMkLst>
-            <pc:docMk/>
-            <pc:sldMk cId="2585164842" sldId="499"/>
-            <ac:spMk id="11" creationId="{C140D895-4E2F-63A4-02E3-4E3038AD9CAA}"/>
-          </ac:spMkLst>
-        </pc:spChg>
-        <pc:spChg chg="add mod">
-          <ac:chgData name="Marco Pavone" userId="614fc057-48e4-49a1-a143-71473b5022f3" providerId="ADAL" clId="{85493198-F5A1-D84A-A2CA-FD6227E497BA}" dt="2025-04-14T02:09:18.533" v="220"/>
-          <ac:spMkLst>
-            <pc:docMk/>
-            <pc:sldMk cId="2585164842" sldId="499"/>
-            <ac:spMk id="12" creationId="{F3C808F5-EC72-DCDC-6F1A-BF345EB6A8CF}"/>
-          </ac:spMkLst>
-        </pc:spChg>
-      </pc:sldChg>
-      <pc:sldChg chg="addSp delSp modSp">
-        <pc:chgData name="Marco Pavone" userId="614fc057-48e4-49a1-a143-71473b5022f3" providerId="ADAL" clId="{85493198-F5A1-D84A-A2CA-FD6227E497BA}" dt="2025-04-14T02:09:18.533" v="220"/>
-        <pc:sldMkLst>
-          <pc:docMk/>
-          <pc:sldMk cId="2841134117" sldId="500"/>
-        </pc:sldMkLst>
-        <pc:spChg chg="del">
-          <ac:chgData name="Marco Pavone" userId="614fc057-48e4-49a1-a143-71473b5022f3" providerId="ADAL" clId="{85493198-F5A1-D84A-A2CA-FD6227E497BA}" dt="2025-04-14T02:08:31.518" v="217"/>
-          <ac:spMkLst>
-            <pc:docMk/>
-            <pc:sldMk cId="2841134117" sldId="500"/>
-            <ac:spMk id="4" creationId="{BF46A501-468E-7D44-95F2-BDAD6AD5C97B}"/>
-          </ac:spMkLst>
-        </pc:spChg>
-        <pc:spChg chg="del">
-          <ac:chgData name="Marco Pavone" userId="614fc057-48e4-49a1-a143-71473b5022f3" providerId="ADAL" clId="{85493198-F5A1-D84A-A2CA-FD6227E497BA}" dt="2025-04-14T02:08:08.765" v="216"/>
-          <ac:spMkLst>
-            <pc:docMk/>
-            <pc:sldMk cId="2841134117" sldId="500"/>
-            <ac:spMk id="5" creationId="{9C9D1BF2-9D8B-794F-A0C2-F0C54EFE6F7A}"/>
-          </ac:spMkLst>
-        </pc:spChg>
-        <pc:spChg chg="del">
-          <ac:chgData name="Marco Pavone" userId="614fc057-48e4-49a1-a143-71473b5022f3" providerId="ADAL" clId="{85493198-F5A1-D84A-A2CA-FD6227E497BA}" dt="2025-04-14T02:08:08.765" v="216"/>
-          <ac:spMkLst>
-            <pc:docMk/>
-            <pc:sldMk cId="2841134117" sldId="500"/>
-            <ac:spMk id="7" creationId="{83FF8DA9-BB1A-4DED-B2EB-7FA84CABA1F5}"/>
-          </ac:spMkLst>
-        </pc:spChg>
-        <pc:spChg chg="add del mod">
-          <ac:chgData name="Marco Pavone" userId="614fc057-48e4-49a1-a143-71473b5022f3" providerId="ADAL" clId="{85493198-F5A1-D84A-A2CA-FD6227E497BA}" dt="2025-04-14T02:09:02.180" v="219"/>
-          <ac:spMkLst>
-            <pc:docMk/>
-            <pc:sldMk cId="2841134117" sldId="500"/>
-            <ac:spMk id="9" creationId="{917906B9-6DEE-13E5-D0D5-664721529C70}"/>
-          </ac:spMkLst>
-        </pc:spChg>
-        <pc:spChg chg="add del mod">
-          <ac:chgData name="Marco Pavone" userId="614fc057-48e4-49a1-a143-71473b5022f3" providerId="ADAL" clId="{85493198-F5A1-D84A-A2CA-FD6227E497BA}" dt="2025-04-14T02:09:02.180" v="219"/>
-          <ac:spMkLst>
-            <pc:docMk/>
-            <pc:sldMk cId="2841134117" sldId="500"/>
-            <ac:spMk id="11" creationId="{5F459074-39BF-B674-F0FD-44A07AA47C4C}"/>
-          </ac:spMkLst>
-        </pc:spChg>
-        <pc:spChg chg="add del mod">
-          <ac:chgData name="Marco Pavone" userId="614fc057-48e4-49a1-a143-71473b5022f3" providerId="ADAL" clId="{85493198-F5A1-D84A-A2CA-FD6227E497BA}" dt="2025-04-14T02:09:02.180" v="219"/>
-          <ac:spMkLst>
-            <pc:docMk/>
-            <pc:sldMk cId="2841134117" sldId="500"/>
-            <ac:spMk id="12" creationId="{57DB3784-0490-DC24-7523-2E9FD4DA65F2}"/>
-          </ac:spMkLst>
-        </pc:spChg>
-        <pc:spChg chg="add mod">
-          <ac:chgData name="Marco Pavone" userId="614fc057-48e4-49a1-a143-71473b5022f3" providerId="ADAL" clId="{85493198-F5A1-D84A-A2CA-FD6227E497BA}" dt="2025-04-14T02:09:18.533" v="220"/>
-          <ac:spMkLst>
-            <pc:docMk/>
-            <pc:sldMk cId="2841134117" sldId="500"/>
-            <ac:spMk id="13" creationId="{419AE21D-EAB9-F28D-3602-55989426008C}"/>
-          </ac:spMkLst>
-        </pc:spChg>
-        <pc:spChg chg="add mod">
-          <ac:chgData name="Marco Pavone" userId="614fc057-48e4-49a1-a143-71473b5022f3" providerId="ADAL" clId="{85493198-F5A1-D84A-A2CA-FD6227E497BA}" dt="2025-04-14T02:09:18.533" v="220"/>
-          <ac:spMkLst>
-            <pc:docMk/>
-            <pc:sldMk cId="2841134117" sldId="500"/>
-            <ac:spMk id="14" creationId="{B5F65590-32D3-B23E-8BF6-2255C21E750C}"/>
-          </ac:spMkLst>
-        </pc:spChg>
-        <pc:spChg chg="add mod">
-          <ac:chgData name="Marco Pavone" userId="614fc057-48e4-49a1-a143-71473b5022f3" providerId="ADAL" clId="{85493198-F5A1-D84A-A2CA-FD6227E497BA}" dt="2025-04-14T02:09:18.533" v="220"/>
-          <ac:spMkLst>
-            <pc:docMk/>
-            <pc:sldMk cId="2841134117" sldId="500"/>
-            <ac:spMk id="15" creationId="{023D4DC4-568C-D15D-FC30-1DEEB3665873}"/>
-          </ac:spMkLst>
-        </pc:spChg>
-      </pc:sldChg>
-      <pc:sldChg chg="addSp delSp modSp">
-        <pc:chgData name="Marco Pavone" userId="614fc057-48e4-49a1-a143-71473b5022f3" providerId="ADAL" clId="{85493198-F5A1-D84A-A2CA-FD6227E497BA}" dt="2025-04-14T02:09:18.533" v="220"/>
-        <pc:sldMkLst>
-          <pc:docMk/>
-          <pc:sldMk cId="1677878597" sldId="501"/>
-        </pc:sldMkLst>
-        <pc:spChg chg="del">
-          <ac:chgData name="Marco Pavone" userId="614fc057-48e4-49a1-a143-71473b5022f3" providerId="ADAL" clId="{85493198-F5A1-D84A-A2CA-FD6227E497BA}" dt="2025-04-14T02:08:31.518" v="217"/>
-          <ac:spMkLst>
-            <pc:docMk/>
-            <pc:sldMk cId="1677878597" sldId="501"/>
-            <ac:spMk id="4" creationId="{09BC3A8F-17EB-6445-BB59-0A95454FCBFB}"/>
-          </ac:spMkLst>
-        </pc:spChg>
-        <pc:spChg chg="del">
-          <ac:chgData name="Marco Pavone" userId="614fc057-48e4-49a1-a143-71473b5022f3" providerId="ADAL" clId="{85493198-F5A1-D84A-A2CA-FD6227E497BA}" dt="2025-04-14T02:08:08.765" v="216"/>
-          <ac:spMkLst>
-            <pc:docMk/>
-            <pc:sldMk cId="1677878597" sldId="501"/>
-            <ac:spMk id="5" creationId="{7E972F8F-A737-3C48-95FE-E55703CE6986}"/>
-          </ac:spMkLst>
-        </pc:spChg>
-        <pc:spChg chg="del">
-          <ac:chgData name="Marco Pavone" userId="614fc057-48e4-49a1-a143-71473b5022f3" providerId="ADAL" clId="{85493198-F5A1-D84A-A2CA-FD6227E497BA}" dt="2025-04-14T02:08:08.765" v="216"/>
-          <ac:spMkLst>
-            <pc:docMk/>
-            <pc:sldMk cId="1677878597" sldId="501"/>
-            <ac:spMk id="7" creationId="{5D388006-D86E-43C8-931E-77F565B4A00F}"/>
-          </ac:spMkLst>
-        </pc:spChg>
-        <pc:spChg chg="add del mod">
-          <ac:chgData name="Marco Pavone" userId="614fc057-48e4-49a1-a143-71473b5022f3" providerId="ADAL" clId="{85493198-F5A1-D84A-A2CA-FD6227E497BA}" dt="2025-04-14T02:09:02.180" v="219"/>
-          <ac:spMkLst>
-            <pc:docMk/>
-            <pc:sldMk cId="1677878597" sldId="501"/>
-            <ac:spMk id="8" creationId="{7FD106F9-9C4A-4EF3-E452-9E23B850C266}"/>
-          </ac:spMkLst>
-        </pc:spChg>
-        <pc:spChg chg="add del mod">
-          <ac:chgData name="Marco Pavone" userId="614fc057-48e4-49a1-a143-71473b5022f3" providerId="ADAL" clId="{85493198-F5A1-D84A-A2CA-FD6227E497BA}" dt="2025-04-14T02:09:02.180" v="219"/>
-          <ac:spMkLst>
-            <pc:docMk/>
-            <pc:sldMk cId="1677878597" sldId="501"/>
-            <ac:spMk id="9" creationId="{F7AAB81B-200B-FA40-9F65-E1AD0E313F89}"/>
-          </ac:spMkLst>
-        </pc:spChg>
-        <pc:spChg chg="add del mod">
-          <ac:chgData name="Marco Pavone" userId="614fc057-48e4-49a1-a143-71473b5022f3" providerId="ADAL" clId="{85493198-F5A1-D84A-A2CA-FD6227E497BA}" dt="2025-04-14T02:09:02.180" v="219"/>
-          <ac:spMkLst>
-            <pc:docMk/>
-            <pc:sldMk cId="1677878597" sldId="501"/>
-            <ac:spMk id="10" creationId="{44ADD9A1-E7E3-4D02-9188-09EBC400297C}"/>
-          </ac:spMkLst>
-        </pc:spChg>
-        <pc:spChg chg="add mod">
-          <ac:chgData name="Marco Pavone" userId="614fc057-48e4-49a1-a143-71473b5022f3" providerId="ADAL" clId="{85493198-F5A1-D84A-A2CA-FD6227E497BA}" dt="2025-04-14T02:09:18.533" v="220"/>
-          <ac:spMkLst>
-            <pc:docMk/>
-            <pc:sldMk cId="1677878597" sldId="501"/>
-            <ac:spMk id="11" creationId="{BB54AAEA-C1F8-5A81-E03D-80573EEAD7A2}"/>
-          </ac:spMkLst>
-        </pc:spChg>
-        <pc:spChg chg="add mod">
-          <ac:chgData name="Marco Pavone" userId="614fc057-48e4-49a1-a143-71473b5022f3" providerId="ADAL" clId="{85493198-F5A1-D84A-A2CA-FD6227E497BA}" dt="2025-04-14T02:09:18.533" v="220"/>
-          <ac:spMkLst>
-            <pc:docMk/>
-            <pc:sldMk cId="1677878597" sldId="501"/>
-            <ac:spMk id="12" creationId="{C6EDC4E6-C054-AF78-E9EB-44DC7ED87339}"/>
-          </ac:spMkLst>
-        </pc:spChg>
-        <pc:spChg chg="add mod">
-          <ac:chgData name="Marco Pavone" userId="614fc057-48e4-49a1-a143-71473b5022f3" providerId="ADAL" clId="{85493198-F5A1-D84A-A2CA-FD6227E497BA}" dt="2025-04-14T02:09:18.533" v="220"/>
-          <ac:spMkLst>
-            <pc:docMk/>
-            <pc:sldMk cId="1677878597" sldId="501"/>
-            <ac:spMk id="13" creationId="{11BCD11E-5AAD-0C79-EF52-343597C97F87}"/>
-          </ac:spMkLst>
-        </pc:spChg>
-      </pc:sldChg>
-      <pc:sldChg chg="addSp delSp modSp">
-        <pc:chgData name="Marco Pavone" userId="614fc057-48e4-49a1-a143-71473b5022f3" providerId="ADAL" clId="{85493198-F5A1-D84A-A2CA-FD6227E497BA}" dt="2025-04-14T02:09:18.533" v="220"/>
-        <pc:sldMkLst>
-          <pc:docMk/>
-          <pc:sldMk cId="3161116584" sldId="502"/>
-        </pc:sldMkLst>
-        <pc:spChg chg="del">
-          <ac:chgData name="Marco Pavone" userId="614fc057-48e4-49a1-a143-71473b5022f3" providerId="ADAL" clId="{85493198-F5A1-D84A-A2CA-FD6227E497BA}" dt="2025-04-14T02:08:31.518" v="217"/>
-          <ac:spMkLst>
-            <pc:docMk/>
-            <pc:sldMk cId="3161116584" sldId="502"/>
-            <ac:spMk id="4" creationId="{87970784-5338-0C44-AA37-9C476F3EE768}"/>
-          </ac:spMkLst>
-        </pc:spChg>
-        <pc:spChg chg="del">
-          <ac:chgData name="Marco Pavone" userId="614fc057-48e4-49a1-a143-71473b5022f3" providerId="ADAL" clId="{85493198-F5A1-D84A-A2CA-FD6227E497BA}" dt="2025-04-14T02:08:08.765" v="216"/>
-          <ac:spMkLst>
-            <pc:docMk/>
-            <pc:sldMk cId="3161116584" sldId="502"/>
-            <ac:spMk id="5" creationId="{6AD1AA48-D9EB-A847-ACC7-C14B8A251E96}"/>
-          </ac:spMkLst>
-        </pc:spChg>
-        <pc:spChg chg="del">
-          <ac:chgData name="Marco Pavone" userId="614fc057-48e4-49a1-a143-71473b5022f3" providerId="ADAL" clId="{85493198-F5A1-D84A-A2CA-FD6227E497BA}" dt="2025-04-14T02:08:08.765" v="216"/>
-          <ac:spMkLst>
-            <pc:docMk/>
-            <pc:sldMk cId="3161116584" sldId="502"/>
-            <ac:spMk id="6" creationId="{FDF04A0C-947E-42A9-B3C1-7DD0AB5BD4BD}"/>
-          </ac:spMkLst>
-        </pc:spChg>
-        <pc:spChg chg="add del mod">
-          <ac:chgData name="Marco Pavone" userId="614fc057-48e4-49a1-a143-71473b5022f3" providerId="ADAL" clId="{85493198-F5A1-D84A-A2CA-FD6227E497BA}" dt="2025-04-14T02:09:02.180" v="219"/>
-          <ac:spMkLst>
-            <pc:docMk/>
-            <pc:sldMk cId="3161116584" sldId="502"/>
-            <ac:spMk id="7" creationId="{6B272224-2D2D-A8DC-D56C-721A87697835}"/>
-          </ac:spMkLst>
-        </pc:spChg>
-        <pc:spChg chg="add del mod">
-          <ac:chgData name="Marco Pavone" userId="614fc057-48e4-49a1-a143-71473b5022f3" providerId="ADAL" clId="{85493198-F5A1-D84A-A2CA-FD6227E497BA}" dt="2025-04-14T02:09:02.180" v="219"/>
-          <ac:spMkLst>
-            <pc:docMk/>
-            <pc:sldMk cId="3161116584" sldId="502"/>
-            <ac:spMk id="8" creationId="{9B7AD442-7117-F6FA-787D-B7F452CA7FC6}"/>
-          </ac:spMkLst>
-        </pc:spChg>
-        <pc:spChg chg="add del mod">
-          <ac:chgData name="Marco Pavone" userId="614fc057-48e4-49a1-a143-71473b5022f3" providerId="ADAL" clId="{85493198-F5A1-D84A-A2CA-FD6227E497BA}" dt="2025-04-14T02:09:02.180" v="219"/>
-          <ac:spMkLst>
-            <pc:docMk/>
-            <pc:sldMk cId="3161116584" sldId="502"/>
-            <ac:spMk id="9" creationId="{2E96D082-C3CC-C6E2-1764-ECA377CC0DAE}"/>
-          </ac:spMkLst>
-        </pc:spChg>
-        <pc:spChg chg="add mod">
-          <ac:chgData name="Marco Pavone" userId="614fc057-48e4-49a1-a143-71473b5022f3" providerId="ADAL" clId="{85493198-F5A1-D84A-A2CA-FD6227E497BA}" dt="2025-04-14T02:09:18.533" v="220"/>
-          <ac:spMkLst>
-            <pc:docMk/>
-            <pc:sldMk cId="3161116584" sldId="502"/>
-            <ac:spMk id="10" creationId="{DD6CD1A8-3D57-760C-D6E1-2A741066B198}"/>
-          </ac:spMkLst>
-        </pc:spChg>
-        <pc:spChg chg="add mod">
-          <ac:chgData name="Marco Pavone" userId="614fc057-48e4-49a1-a143-71473b5022f3" providerId="ADAL" clId="{85493198-F5A1-D84A-A2CA-FD6227E497BA}" dt="2025-04-14T02:09:18.533" v="220"/>
-          <ac:spMkLst>
-            <pc:docMk/>
-            <pc:sldMk cId="3161116584" sldId="502"/>
-            <ac:spMk id="11" creationId="{7BD7AE59-7150-52E4-99A0-4DEE49063598}"/>
-          </ac:spMkLst>
-        </pc:spChg>
-        <pc:spChg chg="add mod">
-          <ac:chgData name="Marco Pavone" userId="614fc057-48e4-49a1-a143-71473b5022f3" providerId="ADAL" clId="{85493198-F5A1-D84A-A2CA-FD6227E497BA}" dt="2025-04-14T02:09:18.533" v="220"/>
-          <ac:spMkLst>
-            <pc:docMk/>
-            <pc:sldMk cId="3161116584" sldId="502"/>
-            <ac:spMk id="12" creationId="{76FF7FC3-7CDF-A8CD-6A2E-6DEDA579AF50}"/>
-          </ac:spMkLst>
-        </pc:spChg>
-      </pc:sldChg>
-      <pc:sldChg chg="addSp delSp modSp modNotesTx">
-        <pc:chgData name="Marco Pavone" userId="614fc057-48e4-49a1-a143-71473b5022f3" providerId="ADAL" clId="{85493198-F5A1-D84A-A2CA-FD6227E497BA}" dt="2025-04-14T02:09:18.533" v="220"/>
-        <pc:sldMkLst>
-          <pc:docMk/>
-          <pc:sldMk cId="2688572493" sldId="503"/>
-        </pc:sldMkLst>
-        <pc:spChg chg="mod">
-          <ac:chgData name="Marco Pavone" userId="614fc057-48e4-49a1-a143-71473b5022f3" providerId="ADAL" clId="{85493198-F5A1-D84A-A2CA-FD6227E497BA}" dt="2025-04-13T19:14:07.346" v="107" actId="20577"/>
-          <ac:spMkLst>
-            <pc:docMk/>
-            <pc:sldMk cId="2688572493" sldId="503"/>
-            <ac:spMk id="3" creationId="{0A595498-55AF-8C4F-951F-82534CE98337}"/>
-          </ac:spMkLst>
-        </pc:spChg>
-        <pc:spChg chg="del">
-          <ac:chgData name="Marco Pavone" userId="614fc057-48e4-49a1-a143-71473b5022f3" providerId="ADAL" clId="{85493198-F5A1-D84A-A2CA-FD6227E497BA}" dt="2025-04-14T02:08:31.518" v="217"/>
-          <ac:spMkLst>
-            <pc:docMk/>
-            <pc:sldMk cId="2688572493" sldId="503"/>
-            <ac:spMk id="4" creationId="{33311B0C-39DC-1749-9F45-1685E9DCD0CC}"/>
-          </ac:spMkLst>
-        </pc:spChg>
-        <pc:spChg chg="del">
-          <ac:chgData name="Marco Pavone" userId="614fc057-48e4-49a1-a143-71473b5022f3" providerId="ADAL" clId="{85493198-F5A1-D84A-A2CA-FD6227E497BA}" dt="2025-04-14T02:08:08.765" v="216"/>
-          <ac:spMkLst>
-            <pc:docMk/>
-            <pc:sldMk cId="2688572493" sldId="503"/>
-            <ac:spMk id="5" creationId="{9D1D32DF-D171-9740-B2D0-A6EB53FB4666}"/>
-          </ac:spMkLst>
-        </pc:spChg>
-        <pc:spChg chg="del">
-          <ac:chgData name="Marco Pavone" userId="614fc057-48e4-49a1-a143-71473b5022f3" providerId="ADAL" clId="{85493198-F5A1-D84A-A2CA-FD6227E497BA}" dt="2025-04-14T02:08:08.765" v="216"/>
-          <ac:spMkLst>
-            <pc:docMk/>
-            <pc:sldMk cId="2688572493" sldId="503"/>
-            <ac:spMk id="6" creationId="{C5A0FF41-6FA1-4505-B012-32E3666546AE}"/>
-          </ac:spMkLst>
-        </pc:spChg>
-        <pc:spChg chg="add del mod">
-          <ac:chgData name="Marco Pavone" userId="614fc057-48e4-49a1-a143-71473b5022f3" providerId="ADAL" clId="{85493198-F5A1-D84A-A2CA-FD6227E497BA}" dt="2025-04-14T02:09:02.180" v="219"/>
-          <ac:spMkLst>
-            <pc:docMk/>
-            <pc:sldMk cId="2688572493" sldId="503"/>
-            <ac:spMk id="7" creationId="{55DB07AC-4A60-DFC2-3D1D-A2534BD26710}"/>
-          </ac:spMkLst>
-        </pc:spChg>
-        <pc:spChg chg="add del mod">
-          <ac:chgData name="Marco Pavone" userId="614fc057-48e4-49a1-a143-71473b5022f3" providerId="ADAL" clId="{85493198-F5A1-D84A-A2CA-FD6227E497BA}" dt="2025-04-14T02:09:02.180" v="219"/>
-          <ac:spMkLst>
-            <pc:docMk/>
-            <pc:sldMk cId="2688572493" sldId="503"/>
-            <ac:spMk id="8" creationId="{8C3E4F10-8800-637F-9184-1096D7CF3B32}"/>
-          </ac:spMkLst>
-        </pc:spChg>
-        <pc:spChg chg="add del mod">
-          <ac:chgData name="Marco Pavone" userId="614fc057-48e4-49a1-a143-71473b5022f3" providerId="ADAL" clId="{85493198-F5A1-D84A-A2CA-FD6227E497BA}" dt="2025-04-14T02:09:02.180" v="219"/>
-          <ac:spMkLst>
-            <pc:docMk/>
-            <pc:sldMk cId="2688572493" sldId="503"/>
-            <ac:spMk id="9" creationId="{0D533202-BB3F-FD61-A689-008CEF9B659A}"/>
-          </ac:spMkLst>
-        </pc:spChg>
-        <pc:spChg chg="add mod">
-          <ac:chgData name="Marco Pavone" userId="614fc057-48e4-49a1-a143-71473b5022f3" providerId="ADAL" clId="{85493198-F5A1-D84A-A2CA-FD6227E497BA}" dt="2025-04-14T02:09:18.533" v="220"/>
-          <ac:spMkLst>
-            <pc:docMk/>
-            <pc:sldMk cId="2688572493" sldId="503"/>
-            <ac:spMk id="10" creationId="{9038B51E-81EC-A877-FF61-37E18755E888}"/>
-          </ac:spMkLst>
-        </pc:spChg>
-        <pc:spChg chg="add mod">
-          <ac:chgData name="Marco Pavone" userId="614fc057-48e4-49a1-a143-71473b5022f3" providerId="ADAL" clId="{85493198-F5A1-D84A-A2CA-FD6227E497BA}" dt="2025-04-14T02:09:18.533" v="220"/>
-          <ac:spMkLst>
-            <pc:docMk/>
-            <pc:sldMk cId="2688572493" sldId="503"/>
-            <ac:spMk id="11" creationId="{35B262BC-F21A-1FF5-B4CA-8AC31B28B9AC}"/>
-          </ac:spMkLst>
-        </pc:spChg>
-        <pc:spChg chg="add mod">
-          <ac:chgData name="Marco Pavone" userId="614fc057-48e4-49a1-a143-71473b5022f3" providerId="ADAL" clId="{85493198-F5A1-D84A-A2CA-FD6227E497BA}" dt="2025-04-14T02:09:18.533" v="220"/>
-          <ac:spMkLst>
-            <pc:docMk/>
-            <pc:sldMk cId="2688572493" sldId="503"/>
-            <ac:spMk id="12" creationId="{3181A524-BD2A-903B-6607-43479C33E905}"/>
-          </ac:spMkLst>
-        </pc:spChg>
-      </pc:sldChg>
-      <pc:sldChg chg="addSp delSp modSp">
-        <pc:chgData name="Marco Pavone" userId="614fc057-48e4-49a1-a143-71473b5022f3" providerId="ADAL" clId="{85493198-F5A1-D84A-A2CA-FD6227E497BA}" dt="2025-04-14T02:09:18.533" v="220"/>
-        <pc:sldMkLst>
-          <pc:docMk/>
-          <pc:sldMk cId="517564522" sldId="504"/>
-        </pc:sldMkLst>
-        <pc:spChg chg="del">
-          <ac:chgData name="Marco Pavone" userId="614fc057-48e4-49a1-a143-71473b5022f3" providerId="ADAL" clId="{85493198-F5A1-D84A-A2CA-FD6227E497BA}" dt="2025-04-14T02:08:31.518" v="217"/>
-          <ac:spMkLst>
-            <pc:docMk/>
-            <pc:sldMk cId="517564522" sldId="504"/>
-            <ac:spMk id="4" creationId="{BF46A501-468E-7D44-95F2-BDAD6AD5C97B}"/>
-          </ac:spMkLst>
-        </pc:spChg>
-        <pc:spChg chg="del">
-          <ac:chgData name="Marco Pavone" userId="614fc057-48e4-49a1-a143-71473b5022f3" providerId="ADAL" clId="{85493198-F5A1-D84A-A2CA-FD6227E497BA}" dt="2025-04-14T02:08:08.765" v="216"/>
-          <ac:spMkLst>
-            <pc:docMk/>
-            <pc:sldMk cId="517564522" sldId="504"/>
-            <ac:spMk id="5" creationId="{9C9D1BF2-9D8B-794F-A0C2-F0C54EFE6F7A}"/>
-          </ac:spMkLst>
-        </pc:spChg>
-        <pc:spChg chg="del">
-          <ac:chgData name="Marco Pavone" userId="614fc057-48e4-49a1-a143-71473b5022f3" providerId="ADAL" clId="{85493198-F5A1-D84A-A2CA-FD6227E497BA}" dt="2025-04-14T02:08:08.765" v="216"/>
-          <ac:spMkLst>
-            <pc:docMk/>
-            <pc:sldMk cId="517564522" sldId="504"/>
-            <ac:spMk id="6" creationId="{79F1DDC2-C938-4209-9D53-9ABD80B0D34D}"/>
-          </ac:spMkLst>
-        </pc:spChg>
-        <pc:spChg chg="add del mod">
-          <ac:chgData name="Marco Pavone" userId="614fc057-48e4-49a1-a143-71473b5022f3" providerId="ADAL" clId="{85493198-F5A1-D84A-A2CA-FD6227E497BA}" dt="2025-04-14T02:09:02.180" v="219"/>
-          <ac:spMkLst>
-            <pc:docMk/>
-            <pc:sldMk cId="517564522" sldId="504"/>
-            <ac:spMk id="7" creationId="{85921A8A-0406-84A2-B64A-58C513E55AE1}"/>
-          </ac:spMkLst>
-        </pc:spChg>
-        <pc:spChg chg="add del mod">
-          <ac:chgData name="Marco Pavone" userId="614fc057-48e4-49a1-a143-71473b5022f3" providerId="ADAL" clId="{85493198-F5A1-D84A-A2CA-FD6227E497BA}" dt="2025-04-14T02:09:02.180" v="219"/>
-          <ac:spMkLst>
-            <pc:docMk/>
-            <pc:sldMk cId="517564522" sldId="504"/>
-            <ac:spMk id="9" creationId="{D416C1BE-99CD-FF91-CAE2-8DF2DB50B3B0}"/>
-          </ac:spMkLst>
-        </pc:spChg>
-        <pc:spChg chg="add del mod">
-          <ac:chgData name="Marco Pavone" userId="614fc057-48e4-49a1-a143-71473b5022f3" providerId="ADAL" clId="{85493198-F5A1-D84A-A2CA-FD6227E497BA}" dt="2025-04-14T02:09:02.180" v="219"/>
-          <ac:spMkLst>
-            <pc:docMk/>
-            <pc:sldMk cId="517564522" sldId="504"/>
-            <ac:spMk id="10" creationId="{13876FEB-9B63-6B15-62F7-A9BF36C3E989}"/>
-          </ac:spMkLst>
-        </pc:spChg>
-        <pc:spChg chg="add mod">
-          <ac:chgData name="Marco Pavone" userId="614fc057-48e4-49a1-a143-71473b5022f3" providerId="ADAL" clId="{85493198-F5A1-D84A-A2CA-FD6227E497BA}" dt="2025-04-14T02:09:18.533" v="220"/>
-          <ac:spMkLst>
-            <pc:docMk/>
-            <pc:sldMk cId="517564522" sldId="504"/>
-            <ac:spMk id="11" creationId="{6856F103-0714-DEF3-F89F-13EB0CED6960}"/>
-          </ac:spMkLst>
-        </pc:spChg>
-        <pc:spChg chg="add mod">
-          <ac:chgData name="Marco Pavone" userId="614fc057-48e4-49a1-a143-71473b5022f3" providerId="ADAL" clId="{85493198-F5A1-D84A-A2CA-FD6227E497BA}" dt="2025-04-14T02:09:18.533" v="220"/>
-          <ac:spMkLst>
-            <pc:docMk/>
-            <pc:sldMk cId="517564522" sldId="504"/>
-            <ac:spMk id="12" creationId="{98689432-749A-D3BE-F409-7C41886DAC91}"/>
-          </ac:spMkLst>
-        </pc:spChg>
-        <pc:spChg chg="add mod">
-          <ac:chgData name="Marco Pavone" userId="614fc057-48e4-49a1-a143-71473b5022f3" providerId="ADAL" clId="{85493198-F5A1-D84A-A2CA-FD6227E497BA}" dt="2025-04-14T02:09:18.533" v="220"/>
-          <ac:spMkLst>
-            <pc:docMk/>
-            <pc:sldMk cId="517564522" sldId="504"/>
-            <ac:spMk id="13" creationId="{F104B601-CD34-7C4C-3929-AE05425B2A6A}"/>
-          </ac:spMkLst>
-        </pc:spChg>
-      </pc:sldChg>
-      <pc:sldChg chg="addSp delSp modSp">
-        <pc:chgData name="Marco Pavone" userId="614fc057-48e4-49a1-a143-71473b5022f3" providerId="ADAL" clId="{85493198-F5A1-D84A-A2CA-FD6227E497BA}" dt="2025-04-14T02:09:18.533" v="220"/>
-        <pc:sldMkLst>
-          <pc:docMk/>
-          <pc:sldMk cId="2118912681" sldId="505"/>
-        </pc:sldMkLst>
-        <pc:spChg chg="del">
-          <ac:chgData name="Marco Pavone" userId="614fc057-48e4-49a1-a143-71473b5022f3" providerId="ADAL" clId="{85493198-F5A1-D84A-A2CA-FD6227E497BA}" dt="2025-04-14T02:08:31.518" v="217"/>
-          <ac:spMkLst>
-            <pc:docMk/>
-            <pc:sldMk cId="2118912681" sldId="505"/>
-            <ac:spMk id="4" creationId="{09BC3A8F-17EB-6445-BB59-0A95454FCBFB}"/>
-          </ac:spMkLst>
-        </pc:spChg>
-        <pc:spChg chg="del">
-          <ac:chgData name="Marco Pavone" userId="614fc057-48e4-49a1-a143-71473b5022f3" providerId="ADAL" clId="{85493198-F5A1-D84A-A2CA-FD6227E497BA}" dt="2025-04-14T02:08:08.765" v="216"/>
-          <ac:spMkLst>
-            <pc:docMk/>
-            <pc:sldMk cId="2118912681" sldId="505"/>
-            <ac:spMk id="5" creationId="{7E972F8F-A737-3C48-95FE-E55703CE6986}"/>
-          </ac:spMkLst>
-        </pc:spChg>
-        <pc:spChg chg="del">
-          <ac:chgData name="Marco Pavone" userId="614fc057-48e4-49a1-a143-71473b5022f3" providerId="ADAL" clId="{85493198-F5A1-D84A-A2CA-FD6227E497BA}" dt="2025-04-14T02:08:08.765" v="216"/>
-          <ac:spMkLst>
-            <pc:docMk/>
-            <pc:sldMk cId="2118912681" sldId="505"/>
-            <ac:spMk id="7" creationId="{A9B0B6A0-EC5E-4492-8118-B5F0D8C387D9}"/>
-          </ac:spMkLst>
-        </pc:spChg>
-        <pc:spChg chg="add del mod">
-          <ac:chgData name="Marco Pavone" userId="614fc057-48e4-49a1-a143-71473b5022f3" providerId="ADAL" clId="{85493198-F5A1-D84A-A2CA-FD6227E497BA}" dt="2025-04-14T02:09:02.180" v="219"/>
-          <ac:spMkLst>
-            <pc:docMk/>
-            <pc:sldMk cId="2118912681" sldId="505"/>
-            <ac:spMk id="8" creationId="{CFC96DA6-5398-AA96-84E2-3BAEE9D5EFC2}"/>
-          </ac:spMkLst>
-        </pc:spChg>
-        <pc:spChg chg="add del mod">
-          <ac:chgData name="Marco Pavone" userId="614fc057-48e4-49a1-a143-71473b5022f3" providerId="ADAL" clId="{85493198-F5A1-D84A-A2CA-FD6227E497BA}" dt="2025-04-14T02:09:02.180" v="219"/>
-          <ac:spMkLst>
-            <pc:docMk/>
-            <pc:sldMk cId="2118912681" sldId="505"/>
-            <ac:spMk id="9" creationId="{7A9CB653-8920-F0E9-99A7-647B500459C1}"/>
-          </ac:spMkLst>
-        </pc:spChg>
-        <pc:spChg chg="add del mod">
-          <ac:chgData name="Marco Pavone" userId="614fc057-48e4-49a1-a143-71473b5022f3" providerId="ADAL" clId="{85493198-F5A1-D84A-A2CA-FD6227E497BA}" dt="2025-04-14T02:09:02.180" v="219"/>
-          <ac:spMkLst>
-            <pc:docMk/>
-            <pc:sldMk cId="2118912681" sldId="505"/>
-            <ac:spMk id="10" creationId="{53EE49A2-D803-7BAE-39E9-5D0A0409B22A}"/>
-          </ac:spMkLst>
-        </pc:spChg>
-        <pc:spChg chg="add mod">
-          <ac:chgData name="Marco Pavone" userId="614fc057-48e4-49a1-a143-71473b5022f3" providerId="ADAL" clId="{85493198-F5A1-D84A-A2CA-FD6227E497BA}" dt="2025-04-14T02:09:18.533" v="220"/>
-          <ac:spMkLst>
-            <pc:docMk/>
-            <pc:sldMk cId="2118912681" sldId="505"/>
-            <ac:spMk id="11" creationId="{9DB80244-8892-204B-464E-691907F82885}"/>
-          </ac:spMkLst>
-        </pc:spChg>
-        <pc:spChg chg="add mod">
-          <ac:chgData name="Marco Pavone" userId="614fc057-48e4-49a1-a143-71473b5022f3" providerId="ADAL" clId="{85493198-F5A1-D84A-A2CA-FD6227E497BA}" dt="2025-04-14T02:09:18.533" v="220"/>
-          <ac:spMkLst>
-            <pc:docMk/>
-            <pc:sldMk cId="2118912681" sldId="505"/>
-            <ac:spMk id="12" creationId="{E654DDB9-7F01-9815-B070-EF74F2646096}"/>
-          </ac:spMkLst>
-        </pc:spChg>
-        <pc:spChg chg="add mod">
-          <ac:chgData name="Marco Pavone" userId="614fc057-48e4-49a1-a143-71473b5022f3" providerId="ADAL" clId="{85493198-F5A1-D84A-A2CA-FD6227E497BA}" dt="2025-04-14T02:09:18.533" v="220"/>
-          <ac:spMkLst>
-            <pc:docMk/>
-            <pc:sldMk cId="2118912681" sldId="505"/>
-            <ac:spMk id="13" creationId="{E66FA51D-FD56-B01F-4D8F-E8FC2A54B991}"/>
-          </ac:spMkLst>
-        </pc:spChg>
-      </pc:sldChg>
-      <pc:sldChg chg="addSp delSp modSp">
-        <pc:chgData name="Marco Pavone" userId="614fc057-48e4-49a1-a143-71473b5022f3" providerId="ADAL" clId="{85493198-F5A1-D84A-A2CA-FD6227E497BA}" dt="2025-04-14T02:09:18.533" v="220"/>
-        <pc:sldMkLst>
-          <pc:docMk/>
-          <pc:sldMk cId="3960784806" sldId="548"/>
-        </pc:sldMkLst>
-        <pc:spChg chg="add del mod">
-          <ac:chgData name="Marco Pavone" userId="614fc057-48e4-49a1-a143-71473b5022f3" providerId="ADAL" clId="{85493198-F5A1-D84A-A2CA-FD6227E497BA}" dt="2025-04-14T02:09:02.180" v="219"/>
-          <ac:spMkLst>
-            <pc:docMk/>
-            <pc:sldMk cId="3960784806" sldId="548"/>
-            <ac:spMk id="3" creationId="{2F3C3304-C2AF-CBD9-FDA4-07A9AC4A5E59}"/>
-          </ac:spMkLst>
-        </pc:spChg>
-        <pc:spChg chg="add del mod">
-          <ac:chgData name="Marco Pavone" userId="614fc057-48e4-49a1-a143-71473b5022f3" providerId="ADAL" clId="{85493198-F5A1-D84A-A2CA-FD6227E497BA}" dt="2025-04-14T02:09:02.180" v="219"/>
-          <ac:spMkLst>
-            <pc:docMk/>
-            <pc:sldMk cId="3960784806" sldId="548"/>
-            <ac:spMk id="4" creationId="{831B0CB0-9C0E-3E47-E9AD-A1BF977B2DAD}"/>
-          </ac:spMkLst>
-        </pc:spChg>
-        <pc:spChg chg="add del mod">
-          <ac:chgData name="Marco Pavone" userId="614fc057-48e4-49a1-a143-71473b5022f3" providerId="ADAL" clId="{85493198-F5A1-D84A-A2CA-FD6227E497BA}" dt="2025-04-14T02:09:02.180" v="219"/>
-          <ac:spMkLst>
-            <pc:docMk/>
-            <pc:sldMk cId="3960784806" sldId="548"/>
-            <ac:spMk id="5" creationId="{6B911A69-C4B0-7BFB-28A2-7E032332F59E}"/>
-          </ac:spMkLst>
-        </pc:spChg>
-        <pc:spChg chg="add mod">
-          <ac:chgData name="Marco Pavone" userId="614fc057-48e4-49a1-a143-71473b5022f3" providerId="ADAL" clId="{85493198-F5A1-D84A-A2CA-FD6227E497BA}" dt="2025-04-14T02:09:18.533" v="220"/>
-          <ac:spMkLst>
-            <pc:docMk/>
-            <pc:sldMk cId="3960784806" sldId="548"/>
-            <ac:spMk id="6" creationId="{4F1BEE86-D109-FA2E-0B9E-79DFA0ED8089}"/>
-          </ac:spMkLst>
-        </pc:spChg>
-        <pc:spChg chg="add mod">
-          <ac:chgData name="Marco Pavone" userId="614fc057-48e4-49a1-a143-71473b5022f3" providerId="ADAL" clId="{85493198-F5A1-D84A-A2CA-FD6227E497BA}" dt="2025-04-14T02:09:18.533" v="220"/>
-          <ac:spMkLst>
-            <pc:docMk/>
-            <pc:sldMk cId="3960784806" sldId="548"/>
-            <ac:spMk id="7" creationId="{859BEBE4-5431-ACBB-4A75-C82F478E678B}"/>
-          </ac:spMkLst>
-        </pc:spChg>
-        <pc:spChg chg="add mod">
-          <ac:chgData name="Marco Pavone" userId="614fc057-48e4-49a1-a143-71473b5022f3" providerId="ADAL" clId="{85493198-F5A1-D84A-A2CA-FD6227E497BA}" dt="2025-04-14T02:09:18.533" v="220"/>
-          <ac:spMkLst>
-            <pc:docMk/>
-            <pc:sldMk cId="3960784806" sldId="548"/>
-            <ac:spMk id="8" creationId="{118244CE-C422-257B-6467-079AB72D829A}"/>
-          </ac:spMkLst>
-        </pc:spChg>
-        <pc:spChg chg="del">
-          <ac:chgData name="Marco Pavone" userId="614fc057-48e4-49a1-a143-71473b5022f3" providerId="ADAL" clId="{85493198-F5A1-D84A-A2CA-FD6227E497BA}" dt="2025-04-14T02:08:08.765" v="216"/>
-          <ac:spMkLst>
-            <pc:docMk/>
-            <pc:sldMk cId="3960784806" sldId="548"/>
-            <ac:spMk id="59" creationId="{03111BFD-E9DD-3F4A-B02F-D91E4EDE2C07}"/>
-          </ac:spMkLst>
-        </pc:spChg>
-        <pc:spChg chg="del">
-          <ac:chgData name="Marco Pavone" userId="614fc057-48e4-49a1-a143-71473b5022f3" providerId="ADAL" clId="{85493198-F5A1-D84A-A2CA-FD6227E497BA}" dt="2025-04-14T02:08:31.518" v="217"/>
-          <ac:spMkLst>
-            <pc:docMk/>
-            <pc:sldMk cId="3960784806" sldId="548"/>
-            <ac:spMk id="61" creationId="{F1D8B968-149E-A741-A169-FDBA9B5EF39E}"/>
-          </ac:spMkLst>
-        </pc:spChg>
-        <pc:spChg chg="del">
-          <ac:chgData name="Marco Pavone" userId="614fc057-48e4-49a1-a143-71473b5022f3" providerId="ADAL" clId="{85493198-F5A1-D84A-A2CA-FD6227E497BA}" dt="2025-04-14T02:08:08.765" v="216"/>
-          <ac:spMkLst>
-            <pc:docMk/>
-            <pc:sldMk cId="3960784806" sldId="548"/>
-            <ac:spMk id="63" creationId="{7D231825-85FB-494F-91E3-F641764C75FD}"/>
-          </ac:spMkLst>
-        </pc:spChg>
-      </pc:sldChg>
-      <pc:sldChg chg="addSp delSp modSp mod">
-        <pc:chgData name="Marco Pavone" userId="614fc057-48e4-49a1-a143-71473b5022f3" providerId="ADAL" clId="{85493198-F5A1-D84A-A2CA-FD6227E497BA}" dt="2025-04-14T02:09:18.533" v="220"/>
-        <pc:sldMkLst>
-          <pc:docMk/>
-          <pc:sldMk cId="3352044961" sldId="571"/>
-        </pc:sldMkLst>
-        <pc:spChg chg="mod">
-          <ac:chgData name="Marco Pavone" userId="614fc057-48e4-49a1-a143-71473b5022f3" providerId="ADAL" clId="{85493198-F5A1-D84A-A2CA-FD6227E497BA}" dt="2025-04-13T18:26:51.727" v="1" actId="20577"/>
-          <ac:spMkLst>
-            <pc:docMk/>
-            <pc:sldMk cId="3352044961" sldId="571"/>
-            <ac:spMk id="3" creationId="{7DE306CE-7DCD-D844-BF40-5E3951848DD0}"/>
-          </ac:spMkLst>
-        </pc:spChg>
-        <pc:spChg chg="del">
-          <ac:chgData name="Marco Pavone" userId="614fc057-48e4-49a1-a143-71473b5022f3" providerId="ADAL" clId="{85493198-F5A1-D84A-A2CA-FD6227E497BA}" dt="2025-04-14T02:08:31.518" v="217"/>
-          <ac:spMkLst>
-            <pc:docMk/>
-            <pc:sldMk cId="3352044961" sldId="571"/>
-            <ac:spMk id="4" creationId="{5AD445EE-3F60-4A08-9046-8AAAA4F9DE15}"/>
-          </ac:spMkLst>
-        </pc:spChg>
-        <pc:spChg chg="del">
-          <ac:chgData name="Marco Pavone" userId="614fc057-48e4-49a1-a143-71473b5022f3" providerId="ADAL" clId="{85493198-F5A1-D84A-A2CA-FD6227E497BA}" dt="2025-04-14T02:08:08.765" v="216"/>
-          <ac:spMkLst>
-            <pc:docMk/>
-            <pc:sldMk cId="3352044961" sldId="571"/>
-            <ac:spMk id="5" creationId="{12B7F00A-CEB8-FC42-80B5-5369B90ADCBA}"/>
-          </ac:spMkLst>
-        </pc:spChg>
-        <pc:spChg chg="del">
-          <ac:chgData name="Marco Pavone" userId="614fc057-48e4-49a1-a143-71473b5022f3" providerId="ADAL" clId="{85493198-F5A1-D84A-A2CA-FD6227E497BA}" dt="2025-04-14T02:08:08.765" v="216"/>
-          <ac:spMkLst>
-            <pc:docMk/>
-            <pc:sldMk cId="3352044961" sldId="571"/>
-            <ac:spMk id="6" creationId="{25152498-D0A0-43DA-93F0-08C323714002}"/>
-          </ac:spMkLst>
-        </pc:spChg>
-        <pc:spChg chg="add del mod">
-          <ac:chgData name="Marco Pavone" userId="614fc057-48e4-49a1-a143-71473b5022f3" providerId="ADAL" clId="{85493198-F5A1-D84A-A2CA-FD6227E497BA}" dt="2025-04-14T02:09:02.180" v="219"/>
-          <ac:spMkLst>
-            <pc:docMk/>
-            <pc:sldMk cId="3352044961" sldId="571"/>
-            <ac:spMk id="13" creationId="{88EE6D85-708F-84E7-CA3D-5C5DE1FF071C}"/>
-          </ac:spMkLst>
-        </pc:spChg>
-        <pc:spChg chg="add del mod">
-          <ac:chgData name="Marco Pavone" userId="614fc057-48e4-49a1-a143-71473b5022f3" providerId="ADAL" clId="{85493198-F5A1-D84A-A2CA-FD6227E497BA}" dt="2025-04-14T02:09:02.180" v="219"/>
-          <ac:spMkLst>
-            <pc:docMk/>
-            <pc:sldMk cId="3352044961" sldId="571"/>
-            <ac:spMk id="14" creationId="{6D4E7E37-BAF0-12AB-8ABF-58B4BC3BA20B}"/>
-          </ac:spMkLst>
-        </pc:spChg>
-        <pc:spChg chg="add del mod">
-          <ac:chgData name="Marco Pavone" userId="614fc057-48e4-49a1-a143-71473b5022f3" providerId="ADAL" clId="{85493198-F5A1-D84A-A2CA-FD6227E497BA}" dt="2025-04-14T02:09:02.180" v="219"/>
-          <ac:spMkLst>
-            <pc:docMk/>
-            <pc:sldMk cId="3352044961" sldId="571"/>
-            <ac:spMk id="15" creationId="{EE763FE5-470D-6569-3648-8380C2FFD9B6}"/>
-          </ac:spMkLst>
-        </pc:spChg>
-        <pc:spChg chg="add mod">
-          <ac:chgData name="Marco Pavone" userId="614fc057-48e4-49a1-a143-71473b5022f3" providerId="ADAL" clId="{85493198-F5A1-D84A-A2CA-FD6227E497BA}" dt="2025-04-14T02:09:18.533" v="220"/>
-          <ac:spMkLst>
-            <pc:docMk/>
-            <pc:sldMk cId="3352044961" sldId="571"/>
-            <ac:spMk id="16" creationId="{C343F016-109D-723B-0709-2F0CB691C213}"/>
-          </ac:spMkLst>
-        </pc:spChg>
-        <pc:spChg chg="add mod">
-          <ac:chgData name="Marco Pavone" userId="614fc057-48e4-49a1-a143-71473b5022f3" providerId="ADAL" clId="{85493198-F5A1-D84A-A2CA-FD6227E497BA}" dt="2025-04-14T02:09:18.533" v="220"/>
-          <ac:spMkLst>
-            <pc:docMk/>
-            <pc:sldMk cId="3352044961" sldId="571"/>
-            <ac:spMk id="17" creationId="{B6539A18-80E0-1D04-EC58-551E2443D488}"/>
-          </ac:spMkLst>
-        </pc:spChg>
-        <pc:spChg chg="add mod">
-          <ac:chgData name="Marco Pavone" userId="614fc057-48e4-49a1-a143-71473b5022f3" providerId="ADAL" clId="{85493198-F5A1-D84A-A2CA-FD6227E497BA}" dt="2025-04-14T02:09:18.533" v="220"/>
-          <ac:spMkLst>
-            <pc:docMk/>
-            <pc:sldMk cId="3352044961" sldId="571"/>
-            <ac:spMk id="18" creationId="{02798795-F6A6-FD51-387E-50CFF108D7FF}"/>
-          </ac:spMkLst>
-        </pc:spChg>
-      </pc:sldChg>
-      <pc:sldChg chg="addSp delSp modSp modNotesTx">
-        <pc:chgData name="Marco Pavone" userId="614fc057-48e4-49a1-a143-71473b5022f3" providerId="ADAL" clId="{85493198-F5A1-D84A-A2CA-FD6227E497BA}" dt="2025-04-14T02:09:18.533" v="220"/>
+      <pc:sldChg chg="modNotesTx">
+        <pc:chgData name="Daniele Gammelli" userId="292b8a31-f1ba-4b4c-b196-a231dc095d13" providerId="ADAL" clId="{6E670754-AB6A-5789-AA0A-6F6FD9CE3EEA}" dt="2026-08-13T21:10:17.565" v="5" actId="20577"/>
         <pc:sldMkLst>
           <pc:docMk/>
           <pc:sldMk cId="305125329" sldId="576"/>
         </pc:sldMkLst>
-        <pc:spChg chg="del">
-          <ac:chgData name="Marco Pavone" userId="614fc057-48e4-49a1-a143-71473b5022f3" providerId="ADAL" clId="{85493198-F5A1-D84A-A2CA-FD6227E497BA}" dt="2025-04-14T02:08:31.518" v="217"/>
-          <ac:spMkLst>
-            <pc:docMk/>
-            <pc:sldMk cId="305125329" sldId="576"/>
-            <ac:spMk id="4" creationId="{B1EF10E1-A153-257B-00C6-E5A18059AEF6}"/>
-          </ac:spMkLst>
-        </pc:spChg>
-        <pc:spChg chg="del">
-          <ac:chgData name="Marco Pavone" userId="614fc057-48e4-49a1-a143-71473b5022f3" providerId="ADAL" clId="{85493198-F5A1-D84A-A2CA-FD6227E497BA}" dt="2025-04-14T02:08:08.765" v="216"/>
-          <ac:spMkLst>
-            <pc:docMk/>
-            <pc:sldMk cId="305125329" sldId="576"/>
-            <ac:spMk id="5" creationId="{8CDD656F-A984-E6BE-8769-3CB031F3BE18}"/>
-          </ac:spMkLst>
-        </pc:spChg>
-        <pc:spChg chg="del">
-          <ac:chgData name="Marco Pavone" userId="614fc057-48e4-49a1-a143-71473b5022f3" providerId="ADAL" clId="{85493198-F5A1-D84A-A2CA-FD6227E497BA}" dt="2025-04-14T02:08:08.765" v="216"/>
-          <ac:spMkLst>
-            <pc:docMk/>
-            <pc:sldMk cId="305125329" sldId="576"/>
-            <ac:spMk id="6" creationId="{E46E1D90-73A7-197E-E0A8-D4C8D80CC7FA}"/>
-          </ac:spMkLst>
-        </pc:spChg>
-        <pc:spChg chg="add del mod">
-          <ac:chgData name="Marco Pavone" userId="614fc057-48e4-49a1-a143-71473b5022f3" providerId="ADAL" clId="{85493198-F5A1-D84A-A2CA-FD6227E497BA}" dt="2025-04-14T02:09:02.180" v="219"/>
-          <ac:spMkLst>
-            <pc:docMk/>
-            <pc:sldMk cId="305125329" sldId="576"/>
-            <ac:spMk id="7" creationId="{23BC34B4-7359-A4B4-24DA-F274CFF53DD7}"/>
-          </ac:spMkLst>
-        </pc:spChg>
-        <pc:spChg chg="add del mod">
-          <ac:chgData name="Marco Pavone" userId="614fc057-48e4-49a1-a143-71473b5022f3" providerId="ADAL" clId="{85493198-F5A1-D84A-A2CA-FD6227E497BA}" dt="2025-04-14T02:09:02.180" v="219"/>
-          <ac:spMkLst>
-            <pc:docMk/>
-            <pc:sldMk cId="305125329" sldId="576"/>
-            <ac:spMk id="8" creationId="{D586DE22-EED3-9B0A-DB2E-A3F468A0B7B0}"/>
-          </ac:spMkLst>
-        </pc:spChg>
-        <pc:spChg chg="add del mod">
-          <ac:chgData name="Marco Pavone" userId="614fc057-48e4-49a1-a143-71473b5022f3" providerId="ADAL" clId="{85493198-F5A1-D84A-A2CA-FD6227E497BA}" dt="2025-04-14T02:09:02.180" v="219"/>
-          <ac:spMkLst>
-            <pc:docMk/>
-            <pc:sldMk cId="305125329" sldId="576"/>
-            <ac:spMk id="9" creationId="{7EC7BE5B-2BBB-3E9C-94AD-2B8CAE59982C}"/>
-          </ac:spMkLst>
-        </pc:spChg>
-        <pc:spChg chg="add mod">
-          <ac:chgData name="Marco Pavone" userId="614fc057-48e4-49a1-a143-71473b5022f3" providerId="ADAL" clId="{85493198-F5A1-D84A-A2CA-FD6227E497BA}" dt="2025-04-14T02:09:18.533" v="220"/>
-          <ac:spMkLst>
-            <pc:docMk/>
-            <pc:sldMk cId="305125329" sldId="576"/>
-            <ac:spMk id="10" creationId="{335CF75C-7F31-DF7D-D69B-B56E280AB861}"/>
-          </ac:spMkLst>
-        </pc:spChg>
-        <pc:spChg chg="add mod">
-          <ac:chgData name="Marco Pavone" userId="614fc057-48e4-49a1-a143-71473b5022f3" providerId="ADAL" clId="{85493198-F5A1-D84A-A2CA-FD6227E497BA}" dt="2025-04-14T02:09:18.533" v="220"/>
-          <ac:spMkLst>
-            <pc:docMk/>
-            <pc:sldMk cId="305125329" sldId="576"/>
-            <ac:spMk id="11" creationId="{085DC181-23FA-648D-0FF6-E9EAFE0A0C9A}"/>
-          </ac:spMkLst>
-        </pc:spChg>
-        <pc:spChg chg="add mod">
-          <ac:chgData name="Marco Pavone" userId="614fc057-48e4-49a1-a143-71473b5022f3" providerId="ADAL" clId="{85493198-F5A1-D84A-A2CA-FD6227E497BA}" dt="2025-04-14T02:09:18.533" v="220"/>
-          <ac:spMkLst>
-            <pc:docMk/>
-            <pc:sldMk cId="305125329" sldId="576"/>
-            <ac:spMk id="12" creationId="{BB77AEB9-C2EE-FC4E-120E-23404CD01AB6}"/>
-          </ac:spMkLst>
-        </pc:spChg>
       </pc:sldChg>
-      <pc:sldChg chg="addSp delSp modSp modNotesTx">
-        <pc:chgData name="Marco Pavone" userId="614fc057-48e4-49a1-a143-71473b5022f3" providerId="ADAL" clId="{85493198-F5A1-D84A-A2CA-FD6227E497BA}" dt="2025-04-14T02:09:18.533" v="220"/>
+      <pc:sldChg chg="modNotesTx">
+        <pc:chgData name="Daniele Gammelli" userId="292b8a31-f1ba-4b4c-b196-a231dc095d13" providerId="ADAL" clId="{6E670754-AB6A-5789-AA0A-6F6FD9CE3EEA}" dt="2026-08-13T21:10:21.813" v="6" actId="20577"/>
         <pc:sldMkLst>
           <pc:docMk/>
           <pc:sldMk cId="3992494171" sldId="577"/>
         </pc:sldMkLst>
-        <pc:spChg chg="del">
-          <ac:chgData name="Marco Pavone" userId="614fc057-48e4-49a1-a143-71473b5022f3" providerId="ADAL" clId="{85493198-F5A1-D84A-A2CA-FD6227E497BA}" dt="2025-04-14T02:08:31.518" v="217"/>
-          <ac:spMkLst>
-            <pc:docMk/>
-            <pc:sldMk cId="3992494171" sldId="577"/>
-            <ac:spMk id="4" creationId="{B1EF10E1-A153-257B-00C6-E5A18059AEF6}"/>
-          </ac:spMkLst>
-        </pc:spChg>
-        <pc:spChg chg="del">
-          <ac:chgData name="Marco Pavone" userId="614fc057-48e4-49a1-a143-71473b5022f3" providerId="ADAL" clId="{85493198-F5A1-D84A-A2CA-FD6227E497BA}" dt="2025-04-14T02:08:08.765" v="216"/>
-          <ac:spMkLst>
-            <pc:docMk/>
-            <pc:sldMk cId="3992494171" sldId="577"/>
-            <ac:spMk id="5" creationId="{8CDD656F-A984-E6BE-8769-3CB031F3BE18}"/>
-          </ac:spMkLst>
-        </pc:spChg>
-        <pc:spChg chg="del">
-          <ac:chgData name="Marco Pavone" userId="614fc057-48e4-49a1-a143-71473b5022f3" providerId="ADAL" clId="{85493198-F5A1-D84A-A2CA-FD6227E497BA}" dt="2025-04-14T02:08:08.765" v="216"/>
-          <ac:spMkLst>
-            <pc:docMk/>
-            <pc:sldMk cId="3992494171" sldId="577"/>
-            <ac:spMk id="6" creationId="{E46E1D90-73A7-197E-E0A8-D4C8D80CC7FA}"/>
-          </ac:spMkLst>
-        </pc:spChg>
-        <pc:spChg chg="add del mod">
-          <ac:chgData name="Marco Pavone" userId="614fc057-48e4-49a1-a143-71473b5022f3" providerId="ADAL" clId="{85493198-F5A1-D84A-A2CA-FD6227E497BA}" dt="2025-04-14T02:09:02.180" v="219"/>
-          <ac:spMkLst>
-            <pc:docMk/>
-            <pc:sldMk cId="3992494171" sldId="577"/>
-            <ac:spMk id="8" creationId="{5AEAEA3A-100A-71FC-DC28-256FB09E6C5E}"/>
-          </ac:spMkLst>
-        </pc:spChg>
-        <pc:spChg chg="add del mod">
-          <ac:chgData name="Marco Pavone" userId="614fc057-48e4-49a1-a143-71473b5022f3" providerId="ADAL" clId="{85493198-F5A1-D84A-A2CA-FD6227E497BA}" dt="2025-04-14T02:09:02.180" v="219"/>
-          <ac:spMkLst>
-            <pc:docMk/>
-            <pc:sldMk cId="3992494171" sldId="577"/>
-            <ac:spMk id="9" creationId="{A0907D13-7E9C-9641-B2A9-BBD35D11D10A}"/>
-          </ac:spMkLst>
-        </pc:spChg>
-        <pc:spChg chg="add del mod">
-          <ac:chgData name="Marco Pavone" userId="614fc057-48e4-49a1-a143-71473b5022f3" providerId="ADAL" clId="{85493198-F5A1-D84A-A2CA-FD6227E497BA}" dt="2025-04-14T02:09:02.180" v="219"/>
-          <ac:spMkLst>
-            <pc:docMk/>
-            <pc:sldMk cId="3992494171" sldId="577"/>
-            <ac:spMk id="10" creationId="{4E4A2A37-6AE8-A261-FCBA-8D73B0CC4BEB}"/>
-          </ac:spMkLst>
-        </pc:spChg>
-        <pc:spChg chg="add mod">
-          <ac:chgData name="Marco Pavone" userId="614fc057-48e4-49a1-a143-71473b5022f3" providerId="ADAL" clId="{85493198-F5A1-D84A-A2CA-FD6227E497BA}" dt="2025-04-14T02:09:18.533" v="220"/>
-          <ac:spMkLst>
-            <pc:docMk/>
-            <pc:sldMk cId="3992494171" sldId="577"/>
-            <ac:spMk id="11" creationId="{35DBD8A6-6857-E323-1B2B-A6971101EE53}"/>
-          </ac:spMkLst>
-        </pc:spChg>
-        <pc:spChg chg="add mod">
-          <ac:chgData name="Marco Pavone" userId="614fc057-48e4-49a1-a143-71473b5022f3" providerId="ADAL" clId="{85493198-F5A1-D84A-A2CA-FD6227E497BA}" dt="2025-04-14T02:09:18.533" v="220"/>
-          <ac:spMkLst>
-            <pc:docMk/>
-            <pc:sldMk cId="3992494171" sldId="577"/>
-            <ac:spMk id="12" creationId="{A149F5B0-8827-B8CA-F609-8CBCD252A1D0}"/>
-          </ac:spMkLst>
-        </pc:spChg>
-        <pc:spChg chg="add mod">
-          <ac:chgData name="Marco Pavone" userId="614fc057-48e4-49a1-a143-71473b5022f3" providerId="ADAL" clId="{85493198-F5A1-D84A-A2CA-FD6227E497BA}" dt="2025-04-14T02:09:18.533" v="220"/>
-          <ac:spMkLst>
-            <pc:docMk/>
-            <pc:sldMk cId="3992494171" sldId="577"/>
-            <ac:spMk id="13" creationId="{FFE7D1FB-8299-7BAD-3408-0509FFB61511}"/>
-          </ac:spMkLst>
-        </pc:spChg>
       </pc:sldChg>
-      <pc:sldChg chg="addSp delSp modSp">
-        <pc:chgData name="Marco Pavone" userId="614fc057-48e4-49a1-a143-71473b5022f3" providerId="ADAL" clId="{85493198-F5A1-D84A-A2CA-FD6227E497BA}" dt="2025-04-14T02:09:18.533" v="220"/>
+      <pc:sldChg chg="modNotesTx">
+        <pc:chgData name="Daniele Gammelli" userId="292b8a31-f1ba-4b4c-b196-a231dc095d13" providerId="ADAL" clId="{6E670754-AB6A-5789-AA0A-6F6FD9CE3EEA}" dt="2026-08-13T21:10:24.398" v="7" actId="20577"/>
         <pc:sldMkLst>
           <pc:docMk/>
           <pc:sldMk cId="1479610164" sldId="579"/>
         </pc:sldMkLst>
-        <pc:spChg chg="del">
-          <ac:chgData name="Marco Pavone" userId="614fc057-48e4-49a1-a143-71473b5022f3" providerId="ADAL" clId="{85493198-F5A1-D84A-A2CA-FD6227E497BA}" dt="2025-04-14T02:08:31.518" v="217"/>
-          <ac:spMkLst>
-            <pc:docMk/>
-            <pc:sldMk cId="1479610164" sldId="579"/>
-            <ac:spMk id="4" creationId="{B1EF10E1-A153-257B-00C6-E5A18059AEF6}"/>
-          </ac:spMkLst>
-        </pc:spChg>
-        <pc:spChg chg="del">
-          <ac:chgData name="Marco Pavone" userId="614fc057-48e4-49a1-a143-71473b5022f3" providerId="ADAL" clId="{85493198-F5A1-D84A-A2CA-FD6227E497BA}" dt="2025-04-14T02:08:08.765" v="216"/>
-          <ac:spMkLst>
-            <pc:docMk/>
-            <pc:sldMk cId="1479610164" sldId="579"/>
-            <ac:spMk id="5" creationId="{8CDD656F-A984-E6BE-8769-3CB031F3BE18}"/>
-          </ac:spMkLst>
-        </pc:spChg>
-        <pc:spChg chg="del">
-          <ac:chgData name="Marco Pavone" userId="614fc057-48e4-49a1-a143-71473b5022f3" providerId="ADAL" clId="{85493198-F5A1-D84A-A2CA-FD6227E497BA}" dt="2025-04-14T02:08:08.765" v="216"/>
-          <ac:spMkLst>
-            <pc:docMk/>
-            <pc:sldMk cId="1479610164" sldId="579"/>
-            <ac:spMk id="6" creationId="{E46E1D90-73A7-197E-E0A8-D4C8D80CC7FA}"/>
-          </ac:spMkLst>
-        </pc:spChg>
-        <pc:spChg chg="add del mod">
-          <ac:chgData name="Marco Pavone" userId="614fc057-48e4-49a1-a143-71473b5022f3" providerId="ADAL" clId="{85493198-F5A1-D84A-A2CA-FD6227E497BA}" dt="2025-04-14T02:09:02.180" v="219"/>
-          <ac:spMkLst>
-            <pc:docMk/>
-            <pc:sldMk cId="1479610164" sldId="579"/>
-            <ac:spMk id="7" creationId="{28540282-712E-10C6-7DC5-F3CDEDC92E92}"/>
-          </ac:spMkLst>
-        </pc:spChg>
-        <pc:spChg chg="add del mod">
-          <ac:chgData name="Marco Pavone" userId="614fc057-48e4-49a1-a143-71473b5022f3" providerId="ADAL" clId="{85493198-F5A1-D84A-A2CA-FD6227E497BA}" dt="2025-04-14T02:09:02.180" v="219"/>
-          <ac:spMkLst>
-            <pc:docMk/>
-            <pc:sldMk cId="1479610164" sldId="579"/>
-            <ac:spMk id="9" creationId="{A465D2CE-5CA9-410B-2BF6-C374D239F79C}"/>
-          </ac:spMkLst>
-        </pc:spChg>
-        <pc:spChg chg="add del mod">
-          <ac:chgData name="Marco Pavone" userId="614fc057-48e4-49a1-a143-71473b5022f3" providerId="ADAL" clId="{85493198-F5A1-D84A-A2CA-FD6227E497BA}" dt="2025-04-14T02:09:02.180" v="219"/>
-          <ac:spMkLst>
-            <pc:docMk/>
-            <pc:sldMk cId="1479610164" sldId="579"/>
-            <ac:spMk id="10" creationId="{7C3BCA8C-B6F7-941F-8D4F-3A8EE0D412AE}"/>
-          </ac:spMkLst>
-        </pc:spChg>
-        <pc:spChg chg="add mod">
-          <ac:chgData name="Marco Pavone" userId="614fc057-48e4-49a1-a143-71473b5022f3" providerId="ADAL" clId="{85493198-F5A1-D84A-A2CA-FD6227E497BA}" dt="2025-04-14T02:09:18.533" v="220"/>
-          <ac:spMkLst>
-            <pc:docMk/>
-            <pc:sldMk cId="1479610164" sldId="579"/>
-            <ac:spMk id="11" creationId="{712B82E1-B8E2-D4E1-13E5-651D21780BD0}"/>
-          </ac:spMkLst>
-        </pc:spChg>
-        <pc:spChg chg="add mod">
-          <ac:chgData name="Marco Pavone" userId="614fc057-48e4-49a1-a143-71473b5022f3" providerId="ADAL" clId="{85493198-F5A1-D84A-A2CA-FD6227E497BA}" dt="2025-04-14T02:09:18.533" v="220"/>
-          <ac:spMkLst>
-            <pc:docMk/>
-            <pc:sldMk cId="1479610164" sldId="579"/>
-            <ac:spMk id="12" creationId="{C265F223-C86A-3DC4-FEEA-5A10D118D890}"/>
-          </ac:spMkLst>
-        </pc:spChg>
-        <pc:spChg chg="add mod">
-          <ac:chgData name="Marco Pavone" userId="614fc057-48e4-49a1-a143-71473b5022f3" providerId="ADAL" clId="{85493198-F5A1-D84A-A2CA-FD6227E497BA}" dt="2025-04-14T02:09:18.533" v="220"/>
-          <ac:spMkLst>
-            <pc:docMk/>
-            <pc:sldMk cId="1479610164" sldId="579"/>
-            <ac:spMk id="13" creationId="{2E27668A-A089-086D-5B1D-DAEE315753FC}"/>
-          </ac:spMkLst>
-        </pc:spChg>
       </pc:sldChg>
-      <pc:sldChg chg="addSp delSp modSp">
-        <pc:chgData name="Marco Pavone" userId="614fc057-48e4-49a1-a143-71473b5022f3" providerId="ADAL" clId="{85493198-F5A1-D84A-A2CA-FD6227E497BA}" dt="2025-04-14T02:09:18.533" v="220"/>
+      <pc:sldChg chg="modNotesTx">
+        <pc:chgData name="Daniele Gammelli" userId="292b8a31-f1ba-4b4c-b196-a231dc095d13" providerId="ADAL" clId="{6E670754-AB6A-5789-AA0A-6F6FD9CE3EEA}" dt="2026-08-13T21:10:26.533" v="8" actId="20577"/>
         <pc:sldMkLst>
           <pc:docMk/>
           <pc:sldMk cId="157415201" sldId="580"/>
         </pc:sldMkLst>
-        <pc:spChg chg="add del mod">
-          <ac:chgData name="Marco Pavone" userId="614fc057-48e4-49a1-a143-71473b5022f3" providerId="ADAL" clId="{85493198-F5A1-D84A-A2CA-FD6227E497BA}" dt="2025-04-14T02:09:02.180" v="219"/>
-          <ac:spMkLst>
-            <pc:docMk/>
-            <pc:sldMk cId="157415201" sldId="580"/>
-            <ac:spMk id="3" creationId="{B3798DFF-1014-0440-7AC0-415A08E492CA}"/>
-          </ac:spMkLst>
-        </pc:spChg>
-        <pc:spChg chg="del">
-          <ac:chgData name="Marco Pavone" userId="614fc057-48e4-49a1-a143-71473b5022f3" providerId="ADAL" clId="{85493198-F5A1-D84A-A2CA-FD6227E497BA}" dt="2025-04-14T02:08:31.518" v="217"/>
-          <ac:spMkLst>
-            <pc:docMk/>
-            <pc:sldMk cId="157415201" sldId="580"/>
-            <ac:spMk id="4" creationId="{B1EF10E1-A153-257B-00C6-E5A18059AEF6}"/>
-          </ac:spMkLst>
-        </pc:spChg>
-        <pc:spChg chg="del">
-          <ac:chgData name="Marco Pavone" userId="614fc057-48e4-49a1-a143-71473b5022f3" providerId="ADAL" clId="{85493198-F5A1-D84A-A2CA-FD6227E497BA}" dt="2025-04-14T02:08:08.765" v="216"/>
-          <ac:spMkLst>
-            <pc:docMk/>
-            <pc:sldMk cId="157415201" sldId="580"/>
-            <ac:spMk id="5" creationId="{8CDD656F-A984-E6BE-8769-3CB031F3BE18}"/>
-          </ac:spMkLst>
-        </pc:spChg>
-        <pc:spChg chg="del">
-          <ac:chgData name="Marco Pavone" userId="614fc057-48e4-49a1-a143-71473b5022f3" providerId="ADAL" clId="{85493198-F5A1-D84A-A2CA-FD6227E497BA}" dt="2025-04-14T02:08:08.765" v="216"/>
-          <ac:spMkLst>
-            <pc:docMk/>
-            <pc:sldMk cId="157415201" sldId="580"/>
-            <ac:spMk id="6" creationId="{E46E1D90-73A7-197E-E0A8-D4C8D80CC7FA}"/>
-          </ac:spMkLst>
-        </pc:spChg>
-        <pc:spChg chg="add del mod">
-          <ac:chgData name="Marco Pavone" userId="614fc057-48e4-49a1-a143-71473b5022f3" providerId="ADAL" clId="{85493198-F5A1-D84A-A2CA-FD6227E497BA}" dt="2025-04-14T02:09:02.180" v="219"/>
-          <ac:spMkLst>
-            <pc:docMk/>
-            <pc:sldMk cId="157415201" sldId="580"/>
-            <ac:spMk id="7" creationId="{0C355AB3-92D3-A59C-363D-FF3819C159AC}"/>
-          </ac:spMkLst>
-        </pc:spChg>
-        <pc:spChg chg="add del mod">
-          <ac:chgData name="Marco Pavone" userId="614fc057-48e4-49a1-a143-71473b5022f3" providerId="ADAL" clId="{85493198-F5A1-D84A-A2CA-FD6227E497BA}" dt="2025-04-14T02:09:02.180" v="219"/>
-          <ac:spMkLst>
-            <pc:docMk/>
-            <pc:sldMk cId="157415201" sldId="580"/>
-            <ac:spMk id="8" creationId="{77143905-7D36-CD2D-7C98-2D9FD70455DE}"/>
-          </ac:spMkLst>
-        </pc:spChg>
-        <pc:spChg chg="add mod">
-          <ac:chgData name="Marco Pavone" userId="614fc057-48e4-49a1-a143-71473b5022f3" providerId="ADAL" clId="{85493198-F5A1-D84A-A2CA-FD6227E497BA}" dt="2025-04-14T02:09:18.533" v="220"/>
-          <ac:spMkLst>
-            <pc:docMk/>
-            <pc:sldMk cId="157415201" sldId="580"/>
-            <ac:spMk id="10" creationId="{37A92A44-E993-880C-FED7-C8482BE95492}"/>
-          </ac:spMkLst>
-        </pc:spChg>
-        <pc:spChg chg="add mod">
-          <ac:chgData name="Marco Pavone" userId="614fc057-48e4-49a1-a143-71473b5022f3" providerId="ADAL" clId="{85493198-F5A1-D84A-A2CA-FD6227E497BA}" dt="2025-04-14T02:09:18.533" v="220"/>
-          <ac:spMkLst>
-            <pc:docMk/>
-            <pc:sldMk cId="157415201" sldId="580"/>
-            <ac:spMk id="11" creationId="{99F41ACF-41CD-C89F-E324-D446529B41C8}"/>
-          </ac:spMkLst>
-        </pc:spChg>
-        <pc:spChg chg="add mod">
-          <ac:chgData name="Marco Pavone" userId="614fc057-48e4-49a1-a143-71473b5022f3" providerId="ADAL" clId="{85493198-F5A1-D84A-A2CA-FD6227E497BA}" dt="2025-04-14T02:09:18.533" v="220"/>
-          <ac:spMkLst>
-            <pc:docMk/>
-            <pc:sldMk cId="157415201" sldId="580"/>
-            <ac:spMk id="12" creationId="{485D08E5-1390-11E3-E8ED-49F6AA569FDE}"/>
-          </ac:spMkLst>
-        </pc:spChg>
-        <pc:spChg chg="mod">
-          <ac:chgData name="Marco Pavone" userId="614fc057-48e4-49a1-a143-71473b5022f3" providerId="ADAL" clId="{85493198-F5A1-D84A-A2CA-FD6227E497BA}" dt="2025-04-13T18:40:09.362" v="2" actId="20577"/>
-          <ac:spMkLst>
-            <pc:docMk/>
-            <pc:sldMk cId="157415201" sldId="580"/>
-            <ac:spMk id="13" creationId="{2272EB36-C042-C153-7BBB-54AB4F2BE11E}"/>
-          </ac:spMkLst>
-        </pc:spChg>
-      </pc:sldChg>
-      <pc:sldChg chg="addSp delSp modSp">
-        <pc:chgData name="Marco Pavone" userId="614fc057-48e4-49a1-a143-71473b5022f3" providerId="ADAL" clId="{85493198-F5A1-D84A-A2CA-FD6227E497BA}" dt="2025-04-14T02:09:18.533" v="220"/>
-        <pc:sldMkLst>
-          <pc:docMk/>
-          <pc:sldMk cId="2755241734" sldId="582"/>
-        </pc:sldMkLst>
-        <pc:spChg chg="del">
-          <ac:chgData name="Marco Pavone" userId="614fc057-48e4-49a1-a143-71473b5022f3" providerId="ADAL" clId="{85493198-F5A1-D84A-A2CA-FD6227E497BA}" dt="2025-04-14T02:08:31.518" v="217"/>
-          <ac:spMkLst>
-            <pc:docMk/>
-            <pc:sldMk cId="2755241734" sldId="582"/>
-            <ac:spMk id="4" creationId="{EACF6BAE-6A00-4A06-9084-0584442DE385}"/>
-          </ac:spMkLst>
-        </pc:spChg>
-        <pc:spChg chg="del">
-          <ac:chgData name="Marco Pavone" userId="614fc057-48e4-49a1-a143-71473b5022f3" providerId="ADAL" clId="{85493198-F5A1-D84A-A2CA-FD6227E497BA}" dt="2025-04-14T02:08:08.765" v="216"/>
-          <ac:spMkLst>
-            <pc:docMk/>
-            <pc:sldMk cId="2755241734" sldId="582"/>
-            <ac:spMk id="5" creationId="{17C0ED6E-5D11-0345-A155-2ADADBDCC5CA}"/>
-          </ac:spMkLst>
-        </pc:spChg>
-        <pc:spChg chg="del">
-          <ac:chgData name="Marco Pavone" userId="614fc057-48e4-49a1-a143-71473b5022f3" providerId="ADAL" clId="{85493198-F5A1-D84A-A2CA-FD6227E497BA}" dt="2025-04-14T02:08:08.765" v="216"/>
-          <ac:spMkLst>
-            <pc:docMk/>
-            <pc:sldMk cId="2755241734" sldId="582"/>
-            <ac:spMk id="6" creationId="{4A938BD2-076B-4E1B-8F1C-D4F1B37C5458}"/>
-          </ac:spMkLst>
-        </pc:spChg>
-        <pc:spChg chg="add del mod">
-          <ac:chgData name="Marco Pavone" userId="614fc057-48e4-49a1-a143-71473b5022f3" providerId="ADAL" clId="{85493198-F5A1-D84A-A2CA-FD6227E497BA}" dt="2025-04-14T02:09:02.180" v="219"/>
-          <ac:spMkLst>
-            <pc:docMk/>
-            <pc:sldMk cId="2755241734" sldId="582"/>
-            <ac:spMk id="7" creationId="{58EB0A95-AE80-70D4-941E-72EB5B81E8E6}"/>
-          </ac:spMkLst>
-        </pc:spChg>
-        <pc:spChg chg="add del mod">
-          <ac:chgData name="Marco Pavone" userId="614fc057-48e4-49a1-a143-71473b5022f3" providerId="ADAL" clId="{85493198-F5A1-D84A-A2CA-FD6227E497BA}" dt="2025-04-14T02:09:02.180" v="219"/>
-          <ac:spMkLst>
-            <pc:docMk/>
-            <pc:sldMk cId="2755241734" sldId="582"/>
-            <ac:spMk id="8" creationId="{77DCAD66-908C-D64C-ACA8-72CBB7C07D56}"/>
-          </ac:spMkLst>
-        </pc:spChg>
-        <pc:spChg chg="add del mod">
-          <ac:chgData name="Marco Pavone" userId="614fc057-48e4-49a1-a143-71473b5022f3" providerId="ADAL" clId="{85493198-F5A1-D84A-A2CA-FD6227E497BA}" dt="2025-04-14T02:09:02.180" v="219"/>
-          <ac:spMkLst>
-            <pc:docMk/>
-            <pc:sldMk cId="2755241734" sldId="582"/>
-            <ac:spMk id="9" creationId="{8A57F793-C7DF-D44C-F69F-521EE74E26EA}"/>
-          </ac:spMkLst>
-        </pc:spChg>
-        <pc:spChg chg="add mod">
-          <ac:chgData name="Marco Pavone" userId="614fc057-48e4-49a1-a143-71473b5022f3" providerId="ADAL" clId="{85493198-F5A1-D84A-A2CA-FD6227E497BA}" dt="2025-04-14T02:09:18.533" v="220"/>
-          <ac:spMkLst>
-            <pc:docMk/>
-            <pc:sldMk cId="2755241734" sldId="582"/>
-            <ac:spMk id="10" creationId="{50DD416E-FCAC-132D-7922-0A269E799C7B}"/>
-          </ac:spMkLst>
-        </pc:spChg>
-        <pc:spChg chg="add mod">
-          <ac:chgData name="Marco Pavone" userId="614fc057-48e4-49a1-a143-71473b5022f3" providerId="ADAL" clId="{85493198-F5A1-D84A-A2CA-FD6227E497BA}" dt="2025-04-14T02:09:18.533" v="220"/>
-          <ac:spMkLst>
-            <pc:docMk/>
-            <pc:sldMk cId="2755241734" sldId="582"/>
-            <ac:spMk id="11" creationId="{B8AAD486-855B-C845-D381-F0D717D99FBE}"/>
-          </ac:spMkLst>
-        </pc:spChg>
-        <pc:spChg chg="add mod">
-          <ac:chgData name="Marco Pavone" userId="614fc057-48e4-49a1-a143-71473b5022f3" providerId="ADAL" clId="{85493198-F5A1-D84A-A2CA-FD6227E497BA}" dt="2025-04-14T02:09:18.533" v="220"/>
-          <ac:spMkLst>
-            <pc:docMk/>
-            <pc:sldMk cId="2755241734" sldId="582"/>
-            <ac:spMk id="12" creationId="{4B584C7A-55B6-E70E-2545-A3AB0C64411E}"/>
-          </ac:spMkLst>
-        </pc:spChg>
       </pc:sldChg>
     </pc:docChg>
   </pc:docChgLst>
@@ -2903,7 +337,7 @@
           <a:p>
             <a:fld id="{EBD6F028-2067-3740-AA48-A91E93570B1D}" type="datetimeFigureOut">
               <a:rPr lang="en-US" smtClean="0"/>
-              <a:t>4/13/25</a:t>
+              <a:t>8/13/26</a:t>
             </a:fld>
             <a:endParaRPr lang="en-US"/>
           </a:p>
@@ -3554,26 +988,7 @@
               <a:buFont typeface="Arial" panose="020B0604020202020204" pitchFamily="34" charset="0"/>
               <a:buChar char="•"/>
             </a:pPr>
-            <a:r>
-              <a:rPr lang="en-US" dirty="0"/>
-              <a:t>For sec </a:t>
-            </a:r>
-            <a:r>
-              <a:rPr lang="en-US" dirty="0" err="1"/>
-              <a:t>ond</a:t>
-            </a:r>
-            <a:r>
-              <a:rPr lang="en-US" dirty="0"/>
-              <a:t> example, Our conclusion is that if </a:t>
-            </a:r>
-            <a:r>
-              <a:rPr lang="en-US" dirty="0" err="1"/>
-              <a:t>tf</a:t>
-            </a:r>
-            <a:r>
-              <a:rPr lang="en-US" dirty="0"/>
-              <a:t>  is free an optimal control does not exist-given any candidate for an optimal control, it is always possible to find a control that transfers the system to the zero state with less fuel.</a:t>
-            </a:r>
+            <a:endParaRPr lang="en-US" dirty="0"/>
           </a:p>
         </p:txBody>
       </p:sp>
@@ -3656,139 +1071,6 @@
         <p:txBody>
           <a:bodyPr/>
           <a:lstStyle/>
-          <a:p>
-            <a:pPr>
-              <a:buNone/>
-            </a:pPr>
-            <a:r>
-              <a:rPr lang="en-US" b="1" dirty="0"/>
-              <a:t>Shooting Method</a:t>
-            </a:r>
-            <a:r>
-              <a:rPr lang="en-US" dirty="0"/>
-              <a:t>:</a:t>
-            </a:r>
-          </a:p>
-          <a:p>
-            <a:pPr>
-              <a:buFont typeface="Arial" panose="020B0604020202020204" pitchFamily="34" charset="0"/>
-              <a:buChar char="•"/>
-            </a:pPr>
-            <a:r>
-              <a:rPr lang="en-US" dirty="0"/>
-              <a:t>Treats the problem like an </a:t>
-            </a:r>
-            <a:r>
-              <a:rPr lang="en-US" b="1" dirty="0"/>
-              <a:t>initial value problem (IVP)</a:t>
-            </a:r>
-            <a:r>
-              <a:rPr lang="en-US" dirty="0"/>
-              <a:t>.</a:t>
-            </a:r>
-          </a:p>
-          <a:p>
-            <a:pPr>
-              <a:buFont typeface="Arial" panose="020B0604020202020204" pitchFamily="34" charset="0"/>
-              <a:buChar char="•"/>
-            </a:pPr>
-            <a:r>
-              <a:rPr lang="en-US" dirty="0"/>
-              <a:t>You guess the unknown initial values (usually co-states) and </a:t>
-            </a:r>
-            <a:r>
-              <a:rPr lang="en-US" b="1" dirty="0"/>
-              <a:t>integrate forward in time</a:t>
-            </a:r>
-            <a:r>
-              <a:rPr lang="en-US" dirty="0"/>
-              <a:t>.</a:t>
-            </a:r>
-          </a:p>
-          <a:p>
-            <a:pPr>
-              <a:buFont typeface="Arial" panose="020B0604020202020204" pitchFamily="34" charset="0"/>
-              <a:buChar char="•"/>
-            </a:pPr>
-            <a:r>
-              <a:rPr lang="en-US" dirty="0"/>
-              <a:t>Then you adjust your guess until you hit the terminal boundary conditions.</a:t>
-            </a:r>
-          </a:p>
-          <a:p>
-            <a:pPr>
-              <a:buFont typeface="Arial" panose="020B0604020202020204" pitchFamily="34" charset="0"/>
-              <a:buChar char="•"/>
-            </a:pPr>
-            <a:endParaRPr lang="en-US" dirty="0"/>
-          </a:p>
-          <a:p>
-            <a:pPr>
-              <a:buNone/>
-            </a:pPr>
-            <a:r>
-              <a:rPr lang="en-US" b="1" dirty="0"/>
-              <a:t>Collocation Method</a:t>
-            </a:r>
-            <a:r>
-              <a:rPr lang="en-US" dirty="0"/>
-              <a:t>:</a:t>
-            </a:r>
-          </a:p>
-          <a:p>
-            <a:pPr>
-              <a:buFont typeface="Arial" panose="020B0604020202020204" pitchFamily="34" charset="0"/>
-              <a:buChar char="•"/>
-            </a:pPr>
-            <a:r>
-              <a:rPr lang="en-US" dirty="0"/>
-              <a:t>Approximates the state and control trajectories using </a:t>
-            </a:r>
-            <a:r>
-              <a:rPr lang="en-US" b="1" dirty="0"/>
-              <a:t>basis functions</a:t>
-            </a:r>
-            <a:r>
-              <a:rPr lang="en-US" dirty="0"/>
-              <a:t> (e.g., polynomials).</a:t>
-            </a:r>
-          </a:p>
-          <a:p>
-            <a:pPr>
-              <a:buFont typeface="Arial" panose="020B0604020202020204" pitchFamily="34" charset="0"/>
-              <a:buChar char="•"/>
-            </a:pPr>
-            <a:r>
-              <a:rPr lang="en-US" dirty="0"/>
-              <a:t>Enforces the dynamics and boundary conditions at selected </a:t>
-            </a:r>
-            <a:r>
-              <a:rPr lang="en-US" b="1" dirty="0"/>
-              <a:t>collocation points</a:t>
-            </a:r>
-            <a:r>
-              <a:rPr lang="en-US" dirty="0"/>
-              <a:t> (discrete time points).</a:t>
-            </a:r>
-          </a:p>
-          <a:p>
-            <a:pPr>
-              <a:buFont typeface="Arial" panose="020B0604020202020204" pitchFamily="34" charset="0"/>
-              <a:buChar char="•"/>
-            </a:pPr>
-            <a:r>
-              <a:rPr lang="en-US" dirty="0"/>
-              <a:t>Solves everything as a </a:t>
-            </a:r>
-            <a:r>
-              <a:rPr lang="en-US" b="1" dirty="0"/>
-              <a:t>large nonlinear optimization problem</a:t>
-            </a:r>
-            <a:r>
-              <a:rPr lang="en-US" dirty="0"/>
-              <a:t> (often using NLP solvers).</a:t>
-            </a:r>
-          </a:p>
           <a:p>
             <a:pPr>
               <a:buFont typeface="Arial" panose="020B0604020202020204" pitchFamily="34" charset="0"/>
@@ -3882,76 +1164,6 @@
               <a:buFont typeface="Arial" panose="020B0604020202020204" pitchFamily="34" charset="0"/>
               <a:buChar char="•"/>
             </a:pPr>
-            <a:r>
-              <a:rPr lang="en-US" dirty="0"/>
-              <a:t>Fun: </a:t>
-            </a:r>
-            <a:r>
-              <a:rPr lang="en-US" b="0" i="0" dirty="0">
-                <a:solidFill>
-                  <a:srgbClr val="222832"/>
-                </a:solidFill>
-                <a:effectLst/>
-                <a:latin typeface="-apple-system"/>
-              </a:rPr>
-              <a:t>Right-hand side of the system.</a:t>
-            </a:r>
-          </a:p>
-          <a:p>
-            <a:pPr marL="171450" indent="-171450">
-              <a:buFont typeface="Arial" panose="020B0604020202020204" pitchFamily="34" charset="0"/>
-              <a:buChar char="•"/>
-            </a:pPr>
-            <a:r>
-              <a:rPr lang="en-US" dirty="0" err="1"/>
-              <a:t>Bc</a:t>
-            </a:r>
-            <a:r>
-              <a:rPr lang="en-US" dirty="0"/>
-              <a:t>: </a:t>
-            </a:r>
-            <a:r>
-              <a:rPr lang="en-US" b="0" i="0" dirty="0">
-                <a:solidFill>
-                  <a:srgbClr val="222832"/>
-                </a:solidFill>
-                <a:effectLst/>
-                <a:latin typeface="-apple-system"/>
-              </a:rPr>
-              <a:t>Function evaluating residuals of the boundary conditions</a:t>
-            </a:r>
-          </a:p>
-          <a:p>
-            <a:pPr marL="171450" indent="-171450">
-              <a:buFont typeface="Arial" panose="020B0604020202020204" pitchFamily="34" charset="0"/>
-              <a:buChar char="•"/>
-            </a:pPr>
-            <a:r>
-              <a:rPr lang="en-US" b="0" i="0" dirty="0">
-                <a:solidFill>
-                  <a:srgbClr val="222832"/>
-                </a:solidFill>
-                <a:effectLst/>
-                <a:latin typeface="-apple-system"/>
-              </a:rPr>
-              <a:t>t: Initial mesh. Must be a strictly increasing sequence of real numbers  </a:t>
-            </a:r>
-          </a:p>
-          <a:p>
-            <a:pPr marL="171450" indent="-171450">
-              <a:buFont typeface="Arial" panose="020B0604020202020204" pitchFamily="34" charset="0"/>
-              <a:buChar char="•"/>
-            </a:pPr>
-            <a:r>
-              <a:rPr lang="en-US" b="0" i="0" dirty="0">
-                <a:solidFill>
-                  <a:srgbClr val="222832"/>
-                </a:solidFill>
-                <a:effectLst/>
-                <a:latin typeface="-apple-system"/>
-              </a:rPr>
-              <a:t>Z: Initial guess for the function values at the mesh nodes, </a:t>
-            </a:r>
             <a:endParaRPr lang="en-US" dirty="0"/>
           </a:p>
         </p:txBody>
@@ -4036,50 +1248,7 @@
           <a:bodyPr/>
           <a:lstStyle/>
           <a:p>
-            <a:r>
-              <a:rPr lang="en-US" dirty="0"/>
-              <a:t>Add:</a:t>
-            </a:r>
-          </a:p>
-          <a:p>
-            <a:pPr marL="171450" indent="-171450">
-              <a:buFontTx/>
-              <a:buChar char="-"/>
-            </a:pPr>
-            <a:r>
-              <a:rPr lang="en-US" dirty="0"/>
-              <a:t>Indirect methods translates into solving TPBVP</a:t>
-            </a:r>
-          </a:p>
-          <a:p>
-            <a:pPr marL="171450" indent="-171450">
-              <a:buFontTx/>
-              <a:buChar char="-"/>
-            </a:pPr>
-            <a:r>
-              <a:rPr lang="en-US" dirty="0"/>
-              <a:t>Explain Python notation</a:t>
-            </a:r>
-          </a:p>
-          <a:p>
-            <a:pPr marL="171450" indent="-171450">
-              <a:buFontTx/>
-              <a:buChar char="-"/>
-            </a:pPr>
-            <a:r>
-              <a:rPr lang="en-US" dirty="0"/>
-              <a:t>TPBVP simple example</a:t>
-            </a:r>
-          </a:p>
-          <a:p>
-            <a:pPr marL="171450" indent="-171450">
-              <a:buFontTx/>
-              <a:buChar char="-"/>
-            </a:pPr>
-            <a:r>
-              <a:rPr lang="en-US" dirty="0"/>
-              <a:t>Time reformulation (and ref to paper) </a:t>
-            </a:r>
+            <a:endParaRPr lang="en-US" dirty="0"/>
           </a:p>
         </p:txBody>
       </p:sp>
@@ -4163,50 +1332,7 @@
           <a:bodyPr/>
           <a:lstStyle/>
           <a:p>
-            <a:r>
-              <a:rPr lang="en-US" dirty="0"/>
-              <a:t>Add:</a:t>
-            </a:r>
-          </a:p>
-          <a:p>
-            <a:pPr marL="171450" indent="-171450">
-              <a:buFontTx/>
-              <a:buChar char="-"/>
-            </a:pPr>
-            <a:r>
-              <a:rPr lang="en-US" dirty="0"/>
-              <a:t>Indirect methods translates into solving TPBVP</a:t>
-            </a:r>
-          </a:p>
-          <a:p>
-            <a:pPr marL="171450" indent="-171450">
-              <a:buFontTx/>
-              <a:buChar char="-"/>
-            </a:pPr>
-            <a:r>
-              <a:rPr lang="en-US" dirty="0"/>
-              <a:t>Explain Python notation</a:t>
-            </a:r>
-          </a:p>
-          <a:p>
-            <a:pPr marL="171450" indent="-171450">
-              <a:buFontTx/>
-              <a:buChar char="-"/>
-            </a:pPr>
-            <a:r>
-              <a:rPr lang="en-US" dirty="0"/>
-              <a:t>TPBVP simple example</a:t>
-            </a:r>
-          </a:p>
-          <a:p>
-            <a:pPr marL="171450" indent="-171450">
-              <a:buFontTx/>
-              <a:buChar char="-"/>
-            </a:pPr>
-            <a:r>
-              <a:rPr lang="en-US" dirty="0"/>
-              <a:t>Time reformulation (and ref to paper) </a:t>
-            </a:r>
+            <a:endParaRPr lang="en-US" dirty="0"/>
           </a:p>
         </p:txBody>
       </p:sp>
@@ -4462,20 +1588,7 @@
               <a:buFont typeface="Arial" panose="020B0604020202020204" pitchFamily="34" charset="0"/>
               <a:buChar char="•"/>
             </a:pPr>
-            <a:r>
-              <a:rPr lang="en-US" dirty="0"/>
-              <a:t>\delta J is linear in \delta u and the higher-order terms approach zero as the norm of \delta u approaches zero.</a:t>
-            </a:r>
-          </a:p>
-          <a:p>
-            <a:pPr marL="171450" indent="-171450">
-              <a:buFont typeface="Arial" panose="020B0604020202020204" pitchFamily="34" charset="0"/>
-              <a:buChar char="•"/>
-            </a:pPr>
-            <a:r>
-              <a:rPr lang="en-US" dirty="0"/>
-              <a:t>if the control were unbounded, we could use the linearity of \delta J with respect to \delta  u , and the fact that \delta  u can vary arbitrarily to show that a necessary condition for u* to be an extremal control is that the variation \delta J (u * , \delta  u) must be zero for all admissible \delta  u having a sufficiently small norm. </a:t>
-            </a:r>
+            <a:endParaRPr lang="en-US" dirty="0"/>
           </a:p>
         </p:txBody>
       </p:sp>
@@ -4563,10 +1676,7 @@
               <a:buFont typeface="Arial" panose="020B0604020202020204" pitchFamily="34" charset="0"/>
               <a:buChar char="•"/>
             </a:pPr>
-            <a:r>
-              <a:rPr lang="en-US" dirty="0"/>
-              <a:t>An analogous result exists for calculus </a:t>
-            </a:r>
+            <a:endParaRPr lang="en-US" dirty="0"/>
           </a:p>
         </p:txBody>
       </p:sp>
@@ -4650,10 +1760,7 @@
           <a:bodyPr/>
           <a:lstStyle/>
           <a:p>
-            <a:r>
-              <a:rPr lang="en-US" dirty="0"/>
-              <a:t>Add state variable constraints?</a:t>
-            </a:r>
+            <a:endParaRPr lang="en-US" dirty="0"/>
           </a:p>
         </p:txBody>
       </p:sp>
@@ -4825,10 +1932,7 @@
               <a:buFont typeface="Arial" panose="020B0604020202020204" pitchFamily="34" charset="0"/>
               <a:buChar char="•"/>
             </a:pPr>
-            <a:r>
-              <a:rPr lang="en-US" dirty="0"/>
-              <a:t>the optimal control to obtain minimum-time response is maximum effort throughout the interval of operation. </a:t>
-            </a:r>
+            <a:endParaRPr lang="en-US" dirty="0"/>
           </a:p>
         </p:txBody>
       </p:sp>
@@ -5081,7 +2185,7 @@
           <a:p>
             <a:fld id="{86B8ACB5-20B5-BD42-8AA1-9F178B001405}" type="datetime1">
               <a:rPr lang="en-US" smtClean="0"/>
-              <a:t>4/13/25</a:t>
+              <a:t>8/13/26</a:t>
             </a:fld>
             <a:endParaRPr lang="en-US" dirty="0"/>
           </a:p>
@@ -5307,7 +2411,7 @@
           <a:p>
             <a:fld id="{E9F7059A-AFE0-AD4B-BE8E-5E8950C1E14D}" type="datetime1">
               <a:rPr lang="en-US" smtClean="0"/>
-              <a:t>4/13/25</a:t>
+              <a:t>8/13/26</a:t>
             </a:fld>
             <a:endParaRPr lang="en-US"/>
           </a:p>
@@ -5489,7 +2593,7 @@
           <a:p>
             <a:fld id="{3C855CFB-C96B-4C42-99B7-02D3035D5640}" type="datetime1">
               <a:rPr lang="en-US" smtClean="0"/>
-              <a:t>4/13/25</a:t>
+              <a:t>8/13/26</a:t>
             </a:fld>
             <a:endParaRPr lang="en-US"/>
           </a:p>
@@ -5666,7 +2770,7 @@
           <a:p>
             <a:fld id="{AF006457-61FA-F44C-84BF-F7FC618AF027}" type="datetime1">
               <a:rPr lang="en-US" smtClean="0"/>
-              <a:t>4/13/25</a:t>
+              <a:t>8/13/26</a:t>
             </a:fld>
             <a:endParaRPr lang="en-US" dirty="0"/>
           </a:p>
@@ -5979,7 +3083,7 @@
           <a:p>
             <a:fld id="{1DFECA8D-496A-D240-94D7-D4E99D760162}" type="datetime1">
               <a:rPr lang="en-US" smtClean="0"/>
-              <a:t>4/13/25</a:t>
+              <a:t>8/13/26</a:t>
             </a:fld>
             <a:endParaRPr lang="en-US"/>
           </a:p>
@@ -6212,7 +3316,7 @@
           <a:p>
             <a:fld id="{57CC9B9E-E89E-4540-ACEA-012D530ED6B8}" type="datetime1">
               <a:rPr lang="en-US" smtClean="0"/>
-              <a:t>4/13/25</a:t>
+              <a:t>8/13/26</a:t>
             </a:fld>
             <a:endParaRPr lang="en-US"/>
           </a:p>
@@ -6580,7 +3684,7 @@
           <a:p>
             <a:fld id="{4CDE6C28-4B8D-8142-863E-B6DC2F71F317}" type="datetime1">
               <a:rPr lang="en-US" smtClean="0"/>
-              <a:t>4/13/25</a:t>
+              <a:t>8/13/26</a:t>
             </a:fld>
             <a:endParaRPr lang="en-US"/>
           </a:p>
@@ -6701,7 +3805,7 @@
           <a:p>
             <a:fld id="{3CC63356-A8B4-CE48-8262-8222B016EF8F}" type="datetime1">
               <a:rPr lang="en-US" smtClean="0"/>
-              <a:t>4/13/25</a:t>
+              <a:t>8/13/26</a:t>
             </a:fld>
             <a:endParaRPr lang="en-US"/>
           </a:p>
@@ -6800,7 +3904,7 @@
           <a:p>
             <a:fld id="{5001E0E6-2046-6B47-B02C-A227E242634E}" type="datetime1">
               <a:rPr lang="en-US" smtClean="0"/>
-              <a:t>4/13/25</a:t>
+              <a:t>8/13/26</a:t>
             </a:fld>
             <a:endParaRPr lang="en-US"/>
           </a:p>
@@ -7079,7 +4183,7 @@
           <a:p>
             <a:fld id="{7C63231D-088A-6740-A596-8731D31BDFAC}" type="datetime1">
               <a:rPr lang="en-US" smtClean="0"/>
-              <a:t>4/13/25</a:t>
+              <a:t>8/13/26</a:t>
             </a:fld>
             <a:endParaRPr lang="en-US"/>
           </a:p>
@@ -7335,7 +4439,7 @@
           <a:p>
             <a:fld id="{F99B8A35-731A-814C-9D5A-B86AA37B4721}" type="datetime1">
               <a:rPr lang="en-US" smtClean="0"/>
-              <a:t>4/13/25</a:t>
+              <a:t>8/13/26</a:t>
             </a:fld>
             <a:endParaRPr lang="en-US"/>
           </a:p>
@@ -7550,7 +4654,7 @@
           <a:p>
             <a:fld id="{8F233919-A12E-BE43-828F-DF21F4F7D9B1}" type="datetime1">
               <a:rPr lang="en-US" smtClean="0"/>
-              <a:t>4/13/25</a:t>
+              <a:t>8/13/26</a:t>
             </a:fld>
             <a:endParaRPr lang="en-US" dirty="0"/>
           </a:p>
@@ -8158,7 +5262,7 @@
                     <m:sSup>
                       <m:sSupPr>
                         <m:ctrlPr>
-                          <a:rPr lang="en-US" sz="2400" b="1" i="1" smtClean="0">
+                          <a:rPr lang="en-US" sz="2400" b="1">
                             <a:latin typeface="Cambria Math" panose="02040503050406030204" pitchFamily="18" charset="0"/>
                           </a:rPr>
                         </m:ctrlPr>
@@ -8220,7 +5324,7 @@
                     <m:d>
                       <m:dPr>
                         <m:ctrlPr>
-                          <a:rPr lang="en-US" sz="2400" i="1">
+                          <a:rPr lang="en-US" sz="2400" b="1" i="1">
                             <a:solidFill>
                               <a:schemeClr val="tx1"/>
                             </a:solidFill>
@@ -8232,7 +5336,7 @@
                         <m:sSup>
                           <m:sSupPr>
                             <m:ctrlPr>
-                              <a:rPr lang="en-US" sz="2400" b="1" i="1">
+                              <a:rPr lang="en-US" sz="2400" b="1">
                                 <a:solidFill>
                                   <a:schemeClr val="tx1"/>
                                 </a:solidFill>
@@ -8339,7 +5443,7 @@
                         <m:sSup>
                           <m:sSupPr>
                             <m:ctrlPr>
-                              <a:rPr lang="en-US" sz="2400" b="1" i="1">
+                              <a:rPr lang="en-US" sz="2400" b="1">
                                 <a:solidFill>
                                   <a:schemeClr val="tx1"/>
                                 </a:solidFill>
@@ -8479,7 +5583,7 @@
                     <m:sSub>
                       <m:sSubPr>
                         <m:ctrlPr>
-                          <a:rPr lang="en-US" sz="2400" b="0" i="1" smtClean="0">
+                          <a:rPr lang="en-US" sz="2400" i="1" smtClean="0">
                             <a:solidFill>
                               <a:schemeClr val="tx1"/>
                             </a:solidFill>
@@ -8492,7 +5596,7 @@
                           <m:accPr>
                             <m:chr m:val="̇"/>
                             <m:ctrlPr>
-                              <a:rPr lang="en-US" sz="2400" i="1" smtClean="0">
+                              <a:rPr lang="en-US" sz="2400" b="0" i="1" smtClean="0">
                                 <a:solidFill>
                                   <a:schemeClr val="tx1"/>
                                 </a:solidFill>
@@ -8596,7 +5700,7 @@
                     <m:sSub>
                       <m:sSubPr>
                         <m:ctrlPr>
-                          <a:rPr lang="en-US" sz="2400" i="1">
+                          <a:rPr lang="en-US" sz="2400" b="0" i="1" smtClean="0">
                             <a:latin typeface="Cambria Math" panose="02040503050406030204" pitchFamily="18" charset="0"/>
                           </a:rPr>
                         </m:ctrlPr>
@@ -8765,10 +5869,7 @@
                 </a:pPr>
                 <a14:m>
                   <m:oMathPara xmlns:m="http://schemas.openxmlformats.org/officeDocument/2006/math">
-                    <m:oMathParaPr>
-                      <m:jc m:val="centerGroup"/>
-                    </m:oMathParaPr>
-                    <m:oMath xmlns:m="http://schemas.openxmlformats.org/officeDocument/2006/math">
+                    <m:oMath>
                       <m:r>
                         <a:rPr lang="en-US" sz="2400" b="0" i="1" smtClean="0">
                           <a:solidFill>
@@ -8880,7 +5981,7 @@
                           <m:f>
                             <m:fPr>
                               <m:ctrlPr>
-                                <a:rPr lang="en-US" sz="2400" i="1">
+                                <a:rPr lang="en-US" sz="2400" b="0" i="1" smtClean="0">
                                   <a:latin typeface="Cambria Math" panose="02040503050406030204" pitchFamily="18" charset="0"/>
                                 </a:rPr>
                               </m:ctrlPr>
@@ -9216,7 +6317,7 @@
           <a:p>
             <a:fld id="{45638A04-DB05-2D49-8FBE-B0F671346521}" type="datetime1">
               <a:rPr lang="en-US" smtClean="0"/>
-              <a:t>4/13/25</a:t>
+              <a:t>8/13/26</a:t>
             </a:fld>
             <a:endParaRPr lang="en-US" dirty="0"/>
           </a:p>
@@ -9401,10 +6502,7 @@
                 </a:pPr>
                 <a14:m>
                   <m:oMathPara xmlns:m="http://schemas.openxmlformats.org/officeDocument/2006/math">
-                    <m:oMathParaPr>
-                      <m:jc m:val="centerGroup"/>
-                    </m:oMathParaPr>
-                    <m:oMath xmlns:m="http://schemas.openxmlformats.org/officeDocument/2006/math">
+                    <m:oMath>
                       <m:sSup>
                         <m:sSupPr>
                           <m:ctrlPr>
@@ -9582,10 +6680,7 @@
                 </a:pPr>
                 <a14:m>
                   <m:oMathPara xmlns:m="http://schemas.openxmlformats.org/officeDocument/2006/math">
-                    <m:oMathParaPr>
-                      <m:jc m:val="centerGroup"/>
-                    </m:oMathParaPr>
-                    <m:oMath xmlns:m="http://schemas.openxmlformats.org/officeDocument/2006/math">
+                    <m:oMath>
                       <m:sSup>
                         <m:sSupPr>
                           <m:ctrlPr>
@@ -9883,7 +6978,7 @@
                               <m:sSubSup>
                                 <m:sSubSupPr>
                                   <m:ctrlPr>
-                                    <a:rPr lang="en-US" sz="2400" i="1">
+                                    <a:rPr lang="en-US" sz="2400">
                                       <a:latin typeface="Cambria Math" panose="02040503050406030204" pitchFamily="18" charset="0"/>
                                     </a:rPr>
                                   </m:ctrlPr>
@@ -10095,7 +7190,7 @@
           <a:p>
             <a:fld id="{0EF1D108-D1DB-2640-9908-4AB3576BA3F9}" type="datetime1">
               <a:rPr lang="en-US" smtClean="0"/>
-              <a:t>4/13/25</a:t>
+              <a:t>8/13/26</a:t>
             </a:fld>
             <a:endParaRPr lang="en-US" dirty="0"/>
           </a:p>
@@ -10277,7 +7372,7 @@
                     <m:d>
                       <m:dPr>
                         <m:ctrlPr>
-                          <a:rPr lang="en-US" sz="2400" i="1">
+                          <a:rPr lang="en-US" sz="2400" b="1" i="1">
                             <a:solidFill>
                               <a:schemeClr val="tx1"/>
                             </a:solidFill>
@@ -10289,7 +7384,7 @@
                         <m:sSup>
                           <m:sSupPr>
                             <m:ctrlPr>
-                              <a:rPr lang="en-US" sz="2400" b="1" i="1">
+                              <a:rPr lang="en-US" sz="2400" b="1">
                                 <a:solidFill>
                                   <a:schemeClr val="tx1"/>
                                 </a:solidFill>
@@ -10355,7 +7450,7 @@
                         <m:sSup>
                           <m:sSupPr>
                             <m:ctrlPr>
-                              <a:rPr lang="en-US" sz="2400" b="1" i="1">
+                              <a:rPr lang="en-US" sz="2400" b="1">
                                 <a:solidFill>
                                   <a:schemeClr val="tx1"/>
                                 </a:solidFill>
@@ -10421,7 +7516,7 @@
                         <m:sSup>
                           <m:sSupPr>
                             <m:ctrlPr>
-                              <a:rPr lang="en-US" sz="2400" b="1" i="1">
+                              <a:rPr lang="en-US" sz="2400" b="1">
                                 <a:solidFill>
                                   <a:schemeClr val="tx1"/>
                                 </a:solidFill>
@@ -10679,7 +7774,7 @@
                     <m:d>
                       <m:dPr>
                         <m:ctrlPr>
-                          <a:rPr lang="en-US" sz="2400" i="1">
+                          <a:rPr lang="en-US" sz="2400" b="1" i="1">
                             <a:latin typeface="Cambria Math" panose="02040503050406030204" pitchFamily="18" charset="0"/>
                           </a:rPr>
                         </m:ctrlPr>
@@ -10688,7 +7783,7 @@
                         <m:sSup>
                           <m:sSupPr>
                             <m:ctrlPr>
-                              <a:rPr lang="en-US" sz="2400" b="1" i="1">
+                              <a:rPr lang="en-US" sz="2400" b="1">
                                 <a:latin typeface="Cambria Math" panose="02040503050406030204" pitchFamily="18" charset="0"/>
                               </a:rPr>
                             </m:ctrlPr>
@@ -10736,7 +7831,7 @@
                         <m:sSup>
                           <m:sSupPr>
                             <m:ctrlPr>
-                              <a:rPr lang="en-US" sz="2400" b="1" i="1">
+                              <a:rPr lang="en-US" sz="2400" b="1">
                                 <a:latin typeface="Cambria Math" panose="02040503050406030204" pitchFamily="18" charset="0"/>
                               </a:rPr>
                             </m:ctrlPr>
@@ -10784,7 +7879,7 @@
                         <m:sSup>
                           <m:sSupPr>
                             <m:ctrlPr>
-                              <a:rPr lang="en-US" sz="2400" b="1" i="1">
+                              <a:rPr lang="en-US" sz="2400" b="1">
                                 <a:latin typeface="Cambria Math" panose="02040503050406030204" pitchFamily="18" charset="0"/>
                               </a:rPr>
                             </m:ctrlPr>
@@ -11020,7 +8115,7 @@
           <a:p>
             <a:fld id="{92EFC115-8432-E541-9C43-F38A9B8C39AB}" type="datetime1">
               <a:rPr lang="en-US" smtClean="0"/>
-              <a:t>4/13/25</a:t>
+              <a:t>8/13/26</a:t>
             </a:fld>
             <a:endParaRPr lang="en-US" dirty="0"/>
           </a:p>
@@ -11372,15 +8467,12 @@
                 </a:pPr>
                 <a14:m>
                   <m:oMathPara xmlns:m="http://schemas.openxmlformats.org/officeDocument/2006/math">
-                    <m:oMathParaPr>
-                      <m:jc m:val="centerGroup"/>
-                    </m:oMathParaPr>
-                    <m:oMath xmlns:m="http://schemas.openxmlformats.org/officeDocument/2006/math">
+                    <m:oMath>
                       <m:acc>
                         <m:accPr>
                           <m:chr m:val="̇"/>
                           <m:ctrlPr>
-                            <a:rPr lang="en-US" sz="2400" b="0" i="1" smtClean="0">
+                            <a:rPr lang="en-US" sz="2400" b="1" i="0" smtClean="0">
                               <a:latin typeface="Cambria Math" panose="02040503050406030204" pitchFamily="18" charset="0"/>
                             </a:rPr>
                           </m:ctrlPr>
@@ -11409,7 +8501,7 @@
                       <m:d>
                         <m:dPr>
                           <m:ctrlPr>
-                            <a:rPr lang="en-US" sz="2400" b="0" i="1" dirty="0" smtClean="0">
+                            <a:rPr lang="en-US" sz="2400" b="1" i="0" dirty="0" smtClean="0">
                               <a:latin typeface="Cambria Math" panose="02040503050406030204" pitchFamily="18" charset="0"/>
                             </a:rPr>
                           </m:ctrlPr>
@@ -11450,7 +8542,7 @@
                       <m:d>
                         <m:dPr>
                           <m:ctrlPr>
-                            <a:rPr lang="en-US" sz="2400" b="0" i="1" dirty="0" smtClean="0">
+                            <a:rPr lang="en-US" sz="2400" b="1" i="0" dirty="0" smtClean="0">
                               <a:latin typeface="Cambria Math" panose="02040503050406030204" pitchFamily="18" charset="0"/>
                             </a:rPr>
                           </m:ctrlPr>
@@ -11523,7 +8615,7 @@
                     <m:sSub>
                       <m:sSubPr>
                         <m:ctrlPr>
-                          <a:rPr lang="en-US" sz="2400" b="1" i="1" dirty="0" smtClean="0">
+                          <a:rPr lang="en-US" sz="2400" b="1" dirty="0">
                             <a:latin typeface="Cambria Math" panose="02040503050406030204" pitchFamily="18" charset="0"/>
                           </a:rPr>
                         </m:ctrlPr>
@@ -11564,10 +8656,7 @@
                 </a:pPr>
                 <a14:m>
                   <m:oMathPara xmlns:m="http://schemas.openxmlformats.org/officeDocument/2006/math">
-                    <m:oMathParaPr>
-                      <m:jc m:val="centerGroup"/>
-                    </m:oMathParaPr>
-                    <m:oMath xmlns:m="http://schemas.openxmlformats.org/officeDocument/2006/math">
+                    <m:oMath>
                       <m:r>
                         <a:rPr lang="en-US" sz="2400" b="0" i="1" smtClean="0">
                           <a:latin typeface="Cambria Math" panose="02040503050406030204" pitchFamily="18" charset="0"/>
@@ -11741,7 +8830,7 @@
           <a:p>
             <a:fld id="{78DF34E9-067F-8C44-B660-F0C942A4C724}" type="datetime1">
               <a:rPr lang="en-US" smtClean="0"/>
-              <a:t>4/13/25</a:t>
+              <a:t>8/13/26</a:t>
             </a:fld>
             <a:endParaRPr lang="en-US" dirty="0"/>
           </a:p>
@@ -11983,7 +9072,7 @@
                     <m:d>
                       <m:dPr>
                         <m:ctrlPr>
-                          <a:rPr lang="en-US" sz="2400" i="1" dirty="0">
+                          <a:rPr lang="en-US" sz="2400" b="1" dirty="0">
                             <a:latin typeface="Cambria Math" panose="02040503050406030204" pitchFamily="18" charset="0"/>
                           </a:rPr>
                         </m:ctrlPr>
@@ -12024,7 +9113,7 @@
                     <m:d>
                       <m:dPr>
                         <m:ctrlPr>
-                          <a:rPr lang="en-US" sz="2400" i="1" dirty="0">
+                          <a:rPr lang="en-US" sz="2400" b="1" dirty="0">
                             <a:latin typeface="Cambria Math" panose="02040503050406030204" pitchFamily="18" charset="0"/>
                           </a:rPr>
                         </m:ctrlPr>
@@ -12211,11 +9300,11 @@
                     <m:oMathParaPr>
                       <m:jc m:val="center"/>
                     </m:oMathParaPr>
-                    <m:oMath xmlns:m="http://schemas.openxmlformats.org/officeDocument/2006/math">
+                    <m:oMath>
                       <m:sSubSup>
                         <m:sSubSupPr>
                           <m:ctrlPr>
-                            <a:rPr lang="en-US" sz="2400" b="0" i="1" smtClean="0">
+                            <a:rPr lang="en-US" sz="2400" i="1">
                               <a:latin typeface="Cambria Math" panose="02040503050406030204" pitchFamily="18" charset="0"/>
                             </a:rPr>
                           </m:ctrlPr>
@@ -12273,7 +9362,7 @@
                           <m:begChr m:val="{"/>
                           <m:endChr m:val=""/>
                           <m:ctrlPr>
-                            <a:rPr lang="en-US" sz="2400" i="1" smtClean="0">
+                            <a:rPr lang="en-US" sz="2400" i="1">
                               <a:latin typeface="Cambria Math" panose="02040503050406030204" pitchFamily="18" charset="0"/>
                             </a:rPr>
                           </m:ctrlPr>
@@ -12429,7 +9518,7 @@
                           <m:sSub>
                             <m:sSubPr>
                               <m:ctrlPr>
-                                <a:rPr lang="en-US" sz="2400" i="1" dirty="0">
+                                <a:rPr lang="en-US" sz="2400" b="1" i="0" dirty="0">
                                   <a:latin typeface="Cambria Math" panose="02040503050406030204" pitchFamily="18" charset="0"/>
                                 </a:rPr>
                               </m:ctrlPr>
@@ -12454,7 +9543,7 @@
                           <m:d>
                             <m:dPr>
                               <m:ctrlPr>
-                                <a:rPr lang="en-US" sz="2400" i="1" dirty="0">
+                                <a:rPr lang="en-US" sz="2400" b="1" dirty="0">
                                   <a:latin typeface="Cambria Math" panose="02040503050406030204" pitchFamily="18" charset="0"/>
                                 </a:rPr>
                               </m:ctrlPr>
@@ -12548,7 +9637,7 @@
                           <m:sSub>
                             <m:sSubPr>
                               <m:ctrlPr>
-                                <a:rPr lang="en-US" sz="2400" i="1" dirty="0">
+                                <a:rPr lang="en-US" sz="2400" b="1" i="0" dirty="0">
                                   <a:latin typeface="Cambria Math" panose="02040503050406030204" pitchFamily="18" charset="0"/>
                                 </a:rPr>
                               </m:ctrlPr>
@@ -12573,7 +9662,7 @@
                           <m:d>
                             <m:dPr>
                               <m:ctrlPr>
-                                <a:rPr lang="en-US" sz="2400" i="1" dirty="0">
+                                <a:rPr lang="en-US" sz="2400" b="1" dirty="0">
                                   <a:latin typeface="Cambria Math" panose="02040503050406030204" pitchFamily="18" charset="0"/>
                                 </a:rPr>
                               </m:ctrlPr>
@@ -12636,7 +9725,7 @@
                     <m:sSup>
                       <m:sSupPr>
                         <m:ctrlPr>
-                          <a:rPr lang="en-US" sz="2400" b="1" i="1" smtClean="0">
+                          <a:rPr lang="en-US" sz="2400" b="1">
                             <a:solidFill>
                               <a:schemeClr val="bg1"/>
                             </a:solidFill>
@@ -12670,7 +9759,7 @@
                     <m:d>
                       <m:dPr>
                         <m:ctrlPr>
-                          <a:rPr lang="en-US" sz="2400" b="0" i="1" smtClean="0">
+                          <a:rPr lang="en-US" sz="2400" b="0" i="0" smtClean="0">
                             <a:solidFill>
                               <a:schemeClr val="bg1"/>
                             </a:solidFill>
@@ -12710,6 +9799,7 @@
                               <a:schemeClr val="bg1"/>
                             </a:solidFill>
                             <a:latin typeface="Cambria Math" panose="02040503050406030204" pitchFamily="18" charset="0"/>
+                            <a:ea typeface="Cambria Math" panose="02040503050406030204" pitchFamily="18" charset="0"/>
                           </a:rPr>
                         </m:ctrlPr>
                       </m:sSubPr>
@@ -12773,7 +9863,7 @@
                         <m:sSup>
                           <m:sSupPr>
                             <m:ctrlPr>
-                              <a:rPr lang="en-US" sz="2400" b="0" i="1" smtClean="0">
+                              <a:rPr lang="en-US" sz="2400" b="1">
                                 <a:solidFill>
                                   <a:schemeClr val="bg1"/>
                                 </a:solidFill>
@@ -12807,7 +9897,7 @@
                         <m:d>
                           <m:dPr>
                             <m:ctrlPr>
-                              <a:rPr lang="en-US" sz="2400" b="0" i="1" smtClean="0">
+                              <a:rPr lang="en-US" sz="2400" b="0" i="0" smtClean="0">
                                 <a:solidFill>
                                   <a:schemeClr val="bg1"/>
                                 </a:solidFill>
@@ -12963,10 +10053,7 @@
                 <a:pPr/>
                 <a14:m>
                   <m:oMathPara xmlns:m="http://schemas.openxmlformats.org/officeDocument/2006/math">
-                    <m:oMathParaPr>
-                      <m:jc m:val="centerGroup"/>
-                    </m:oMathParaPr>
-                    <m:oMath xmlns:m="http://schemas.openxmlformats.org/officeDocument/2006/math">
+                    <m:oMath>
                       <m:r>
                         <a:rPr lang="en-US" sz="2400" i="1" smtClean="0">
                           <a:latin typeface="Cambria Math" panose="02040503050406030204" pitchFamily="18" charset="0"/>
@@ -13030,7 +10117,7 @@
                       <m:d>
                         <m:dPr>
                           <m:ctrlPr>
-                            <a:rPr lang="en-US" sz="2400" i="1" dirty="0">
+                            <a:rPr lang="en-US" sz="2400" b="1" dirty="0">
                               <a:latin typeface="Cambria Math" panose="02040503050406030204" pitchFamily="18" charset="0"/>
                             </a:rPr>
                           </m:ctrlPr>
@@ -13065,7 +10152,7 @@
                       <m:sSub>
                         <m:sSubPr>
                           <m:ctrlPr>
-                            <a:rPr lang="en-US" sz="2400" b="0" i="1" dirty="0" smtClean="0">
+                            <a:rPr lang="en-US" sz="2400" b="1" i="0" dirty="0" smtClean="0">
                               <a:latin typeface="Cambria Math" panose="02040503050406030204" pitchFamily="18" charset="0"/>
                             </a:rPr>
                           </m:ctrlPr>
@@ -13090,7 +10177,7 @@
                       <m:d>
                         <m:dPr>
                           <m:ctrlPr>
-                            <a:rPr lang="en-US" sz="2400" i="1" dirty="0">
+                            <a:rPr lang="en-US" sz="2400" b="1" dirty="0">
                               <a:latin typeface="Cambria Math" panose="02040503050406030204" pitchFamily="18" charset="0"/>
                             </a:rPr>
                           </m:ctrlPr>
@@ -13119,7 +10206,7 @@
                       <m:sSub>
                         <m:sSubPr>
                           <m:ctrlPr>
-                            <a:rPr lang="en-US" sz="2400" i="1" dirty="0">
+                            <a:rPr lang="en-US" sz="2400" b="0" i="1" dirty="0" smtClean="0">
                               <a:latin typeface="Cambria Math" panose="02040503050406030204" pitchFamily="18" charset="0"/>
                             </a:rPr>
                           </m:ctrlPr>
@@ -13150,7 +10237,7 @@
                       <m:d>
                         <m:dPr>
                           <m:ctrlPr>
-                            <a:rPr lang="en-US" sz="2400" i="1" dirty="0">
+                            <a:rPr lang="en-US" sz="2400" b="1" dirty="0">
                               <a:latin typeface="Cambria Math" panose="02040503050406030204" pitchFamily="18" charset="0"/>
                             </a:rPr>
                           </m:ctrlPr>
@@ -13185,7 +10272,7 @@
                       <m:sSub>
                         <m:sSubPr>
                           <m:ctrlPr>
-                            <a:rPr lang="en-US" sz="2400" i="1" dirty="0">
+                            <a:rPr lang="en-US" sz="2400" b="1" i="0" dirty="0">
                               <a:latin typeface="Cambria Math" panose="02040503050406030204" pitchFamily="18" charset="0"/>
                             </a:rPr>
                           </m:ctrlPr>
@@ -13210,7 +10297,7 @@
                       <m:d>
                         <m:dPr>
                           <m:ctrlPr>
-                            <a:rPr lang="en-US" sz="2400" i="1" dirty="0">
+                            <a:rPr lang="en-US" sz="2400" b="1" dirty="0">
                               <a:latin typeface="Cambria Math" panose="02040503050406030204" pitchFamily="18" charset="0"/>
                             </a:rPr>
                           </m:ctrlPr>
@@ -13360,10 +10447,7 @@
                 <a:pPr/>
                 <a14:m>
                   <m:oMathPara xmlns:m="http://schemas.openxmlformats.org/officeDocument/2006/math">
-                    <m:oMathParaPr>
-                      <m:jc m:val="centerGroup"/>
-                    </m:oMathParaPr>
-                    <m:oMath xmlns:m="http://schemas.openxmlformats.org/officeDocument/2006/math">
+                    <m:oMath>
                       <m:r>
                         <a:rPr lang="en-US" sz="2400" i="1" smtClean="0">
                           <a:latin typeface="Cambria Math" panose="02040503050406030204" pitchFamily="18" charset="0"/>
@@ -13421,7 +10505,7 @@
                       <m:d>
                         <m:dPr>
                           <m:ctrlPr>
-                            <a:rPr lang="en-US" sz="2400" i="1" dirty="0">
+                            <a:rPr lang="en-US" sz="2400" b="1" dirty="0">
                               <a:latin typeface="Cambria Math" panose="02040503050406030204" pitchFamily="18" charset="0"/>
                             </a:rPr>
                           </m:ctrlPr>
@@ -13457,7 +10541,7 @@
                         <m:naryPr>
                           <m:chr m:val="∑"/>
                           <m:ctrlPr>
-                            <a:rPr lang="en-US" sz="2400" i="1">
+                            <a:rPr lang="en-US" sz="2400" b="0" i="1" smtClean="0">
                               <a:latin typeface="Cambria Math" panose="02040503050406030204" pitchFamily="18" charset="0"/>
                             </a:rPr>
                           </m:ctrlPr>
@@ -13533,7 +10617,7 @@
                           <m:sSub>
                             <m:sSubPr>
                               <m:ctrlPr>
-                                <a:rPr lang="en-US" sz="2400" i="1" dirty="0">
+                                <a:rPr lang="en-US" sz="2400" b="1" i="0" dirty="0">
                                   <a:latin typeface="Cambria Math" panose="02040503050406030204" pitchFamily="18" charset="0"/>
                                 </a:rPr>
                               </m:ctrlPr>
@@ -13558,7 +10642,7 @@
                           <m:d>
                             <m:dPr>
                               <m:ctrlPr>
-                                <a:rPr lang="en-US" sz="2400" i="1" dirty="0">
+                                <a:rPr lang="en-US" sz="2400" b="1" dirty="0">
                                   <a:latin typeface="Cambria Math" panose="02040503050406030204" pitchFamily="18" charset="0"/>
                                 </a:rPr>
                               </m:ctrlPr>
@@ -13744,7 +10828,7 @@
           <a:p>
             <a:fld id="{8079D255-4E8F-8B43-9A55-3163DADC1AD5}" type="datetime1">
               <a:rPr lang="en-US" smtClean="0"/>
-              <a:t>4/13/25</a:t>
+              <a:t>8/13/26</a:t>
             </a:fld>
             <a:endParaRPr lang="en-US" dirty="0"/>
           </a:p>
@@ -13950,7 +11034,7 @@
                     <m:sSub>
                       <m:sSubPr>
                         <m:ctrlPr>
-                          <a:rPr lang="en-US" sz="2400" i="1" dirty="0">
+                          <a:rPr lang="en-US" sz="2400" b="1" i="0" dirty="0">
                             <a:latin typeface="Cambria Math" panose="02040503050406030204" pitchFamily="18" charset="0"/>
                           </a:rPr>
                         </m:ctrlPr>
@@ -13975,7 +11059,7 @@
                     <m:d>
                       <m:dPr>
                         <m:ctrlPr>
-                          <a:rPr lang="en-US" sz="2400" i="1" dirty="0">
+                          <a:rPr lang="en-US" sz="2400" b="1" dirty="0">
                             <a:latin typeface="Cambria Math" panose="02040503050406030204" pitchFamily="18" charset="0"/>
                           </a:rPr>
                         </m:ctrlPr>
@@ -14069,7 +11153,7 @@
                     <m:sSub>
                       <m:sSubPr>
                         <m:ctrlPr>
-                          <a:rPr lang="en-US" sz="2400" i="1" dirty="0">
+                          <a:rPr lang="en-US" sz="2400" b="1" i="0" dirty="0">
                             <a:latin typeface="Cambria Math" panose="02040503050406030204" pitchFamily="18" charset="0"/>
                           </a:rPr>
                         </m:ctrlPr>
@@ -14094,7 +11178,7 @@
                     <m:d>
                       <m:dPr>
                         <m:ctrlPr>
-                          <a:rPr lang="en-US" sz="2400" i="1" dirty="0">
+                          <a:rPr lang="en-US" sz="2400" b="1" dirty="0">
                             <a:latin typeface="Cambria Math" panose="02040503050406030204" pitchFamily="18" charset="0"/>
                           </a:rPr>
                         </m:ctrlPr>
@@ -14194,7 +11278,7 @@
                     <m:sSub>
                       <m:sSubPr>
                         <m:ctrlPr>
-                          <a:rPr lang="en-US" sz="2400" i="1" dirty="0">
+                          <a:rPr lang="en-US" sz="2400" b="1" i="0" dirty="0">
                             <a:latin typeface="Cambria Math" panose="02040503050406030204" pitchFamily="18" charset="0"/>
                           </a:rPr>
                         </m:ctrlPr>
@@ -14219,7 +11303,7 @@
                     <m:d>
                       <m:dPr>
                         <m:ctrlPr>
-                          <a:rPr lang="en-US" sz="2400" i="1" dirty="0">
+                          <a:rPr lang="en-US" sz="2400" b="1" dirty="0">
                             <a:latin typeface="Cambria Math" panose="02040503050406030204" pitchFamily="18" charset="0"/>
                           </a:rPr>
                         </m:ctrlPr>
@@ -14489,7 +11573,7 @@
           <a:p>
             <a:fld id="{74772945-2760-D24B-BF82-280CDE3AB356}" type="datetime1">
               <a:rPr lang="en-US" smtClean="0"/>
-              <a:t>4/13/25</a:t>
+              <a:t>8/13/26</a:t>
             </a:fld>
             <a:endParaRPr lang="en-US" dirty="0"/>
           </a:p>
@@ -14838,15 +11922,12 @@
                 </a:pPr>
                 <a14:m>
                   <m:oMathPara xmlns:m="http://schemas.openxmlformats.org/officeDocument/2006/math">
-                    <m:oMathParaPr>
-                      <m:jc m:val="centerGroup"/>
-                    </m:oMathParaPr>
-                    <m:oMath xmlns:m="http://schemas.openxmlformats.org/officeDocument/2006/math">
+                    <m:oMath>
                       <m:acc>
                         <m:accPr>
                           <m:chr m:val="̇"/>
                           <m:ctrlPr>
-                            <a:rPr lang="en-US" sz="2400" i="1">
+                            <a:rPr lang="en-US" sz="2400" b="1">
                               <a:latin typeface="Cambria Math" panose="02040503050406030204" pitchFamily="18" charset="0"/>
                             </a:rPr>
                           </m:ctrlPr>
@@ -14875,7 +11956,7 @@
                       <m:d>
                         <m:dPr>
                           <m:ctrlPr>
-                            <a:rPr lang="en-US" sz="2400" i="1" dirty="0">
+                            <a:rPr lang="en-US" sz="2400" b="1" dirty="0">
                               <a:latin typeface="Cambria Math" panose="02040503050406030204" pitchFamily="18" charset="0"/>
                             </a:rPr>
                           </m:ctrlPr>
@@ -14916,7 +11997,7 @@
                       <m:d>
                         <m:dPr>
                           <m:ctrlPr>
-                            <a:rPr lang="en-US" sz="2400" i="1" dirty="0">
+                            <a:rPr lang="en-US" sz="2400" b="1" dirty="0">
                               <a:latin typeface="Cambria Math" panose="02040503050406030204" pitchFamily="18" charset="0"/>
                             </a:rPr>
                           </m:ctrlPr>
@@ -14989,7 +12070,7 @@
                     <m:sSub>
                       <m:sSubPr>
                         <m:ctrlPr>
-                          <a:rPr lang="en-US" sz="2400" b="1" i="1" dirty="0">
+                          <a:rPr lang="en-US" sz="2400" b="1" dirty="0">
                             <a:latin typeface="Cambria Math" panose="02040503050406030204" pitchFamily="18" charset="0"/>
                           </a:rPr>
                         </m:ctrlPr>
@@ -15030,10 +12111,7 @@
                 </a:pPr>
                 <a14:m>
                   <m:oMathPara xmlns:m="http://schemas.openxmlformats.org/officeDocument/2006/math">
-                    <m:oMathParaPr>
-                      <m:jc m:val="centerGroup"/>
-                    </m:oMathParaPr>
-                    <m:oMath xmlns:m="http://schemas.openxmlformats.org/officeDocument/2006/math">
+                    <m:oMath>
                       <m:r>
                         <a:rPr lang="en-US" sz="2400" i="1">
                           <a:latin typeface="Cambria Math" panose="02040503050406030204" pitchFamily="18" charset="0"/>
@@ -15324,7 +12402,7 @@
           <a:p>
             <a:fld id="{3E40F82F-6460-534E-B486-AE1AE8BCE921}" type="datetime1">
               <a:rPr lang="en-US" smtClean="0"/>
-              <a:t>4/13/25</a:t>
+              <a:t>8/13/26</a:t>
             </a:fld>
             <a:endParaRPr lang="en-US" dirty="0"/>
           </a:p>
@@ -15689,7 +12767,7 @@
                     <m:d>
                       <m:dPr>
                         <m:ctrlPr>
-                          <a:rPr lang="en-US" sz="2600" i="1" dirty="0">
+                          <a:rPr lang="en-US" sz="2600" b="1" dirty="0">
                             <a:latin typeface="Cambria Math" panose="02040503050406030204" pitchFamily="18" charset="0"/>
                           </a:rPr>
                         </m:ctrlPr>
@@ -15730,7 +12808,7 @@
                     <m:d>
                       <m:dPr>
                         <m:ctrlPr>
-                          <a:rPr lang="en-US" sz="2600" i="1" dirty="0">
+                          <a:rPr lang="en-US" sz="2600" b="1" dirty="0">
                             <a:latin typeface="Cambria Math" panose="02040503050406030204" pitchFamily="18" charset="0"/>
                           </a:rPr>
                         </m:ctrlPr>
@@ -15927,7 +13005,7 @@
                       <m:naryPr>
                         <m:chr m:val="∑"/>
                         <m:ctrlPr>
-                          <a:rPr lang="en-US" sz="2400" i="1" smtClean="0">
+                          <a:rPr lang="en-US" sz="2400" i="1">
                             <a:latin typeface="Cambria Math" panose="02040503050406030204" pitchFamily="18" charset="0"/>
                           </a:rPr>
                         </m:ctrlPr>
@@ -15998,7 +13076,7 @@
                         <m:sSubSup>
                           <m:sSubSupPr>
                             <m:ctrlPr>
-                              <a:rPr lang="en-US" sz="2400" b="0" i="1" dirty="0" smtClean="0">
+                              <a:rPr lang="en-US" sz="2400" i="1" dirty="0">
                                 <a:latin typeface="Cambria Math" panose="02040503050406030204" pitchFamily="18" charset="0"/>
                               </a:rPr>
                             </m:ctrlPr>
@@ -16105,7 +13183,7 @@
                     <m:sSub>
                       <m:sSubPr>
                         <m:ctrlPr>
-                          <a:rPr lang="en-US" sz="2400" i="1" dirty="0">
+                          <a:rPr lang="en-US" sz="2400" b="1" dirty="0">
                             <a:latin typeface="Cambria Math" panose="02040503050406030204" pitchFamily="18" charset="0"/>
                           </a:rPr>
                         </m:ctrlPr>
@@ -16130,7 +13208,7 @@
                     <m:d>
                       <m:dPr>
                         <m:ctrlPr>
-                          <a:rPr lang="en-US" sz="2400" i="1" dirty="0">
+                          <a:rPr lang="en-US" sz="2400" b="1" dirty="0">
                             <a:latin typeface="Cambria Math" panose="02040503050406030204" pitchFamily="18" charset="0"/>
                           </a:rPr>
                         </m:ctrlPr>
@@ -16159,7 +13237,7 @@
                     <m:sSubSup>
                       <m:sSubSupPr>
                         <m:ctrlPr>
-                          <a:rPr lang="en-US" sz="2400" b="0" i="1" dirty="0" smtClean="0">
+                          <a:rPr lang="en-US" sz="2400" i="1" dirty="0">
                             <a:latin typeface="Cambria Math" panose="02040503050406030204" pitchFamily="18" charset="0"/>
                           </a:rPr>
                         </m:ctrlPr>
@@ -16205,19 +13283,7 @@
                       <a:rPr lang="en-US" sz="2400" i="1" dirty="0">
                         <a:latin typeface="Cambria Math" panose="02040503050406030204" pitchFamily="18" charset="0"/>
                       </a:rPr>
-                      <m:t>)</m:t>
-                    </m:r>
-                    <m:r>
-                      <a:rPr lang="en-US" sz="2400" b="1" dirty="0">
-                        <a:latin typeface="Cambria Math" panose="02040503050406030204" pitchFamily="18" charset="0"/>
-                      </a:rPr>
-                      <m:t>]</m:t>
-                    </m:r>
-                    <m:r>
-                      <a:rPr lang="en-US" sz="2400" b="1" i="1" dirty="0" smtClean="0">
-                        <a:latin typeface="Cambria Math" panose="02040503050406030204" pitchFamily="18" charset="0"/>
-                      </a:rPr>
-                      <m:t>≤</m:t>
+                      <m:t>)]≤</m:t>
                     </m:r>
                   </m:oMath>
                 </a14:m>
@@ -16327,10 +13393,7 @@
                 <a:pPr/>
                 <a14:m>
                   <m:oMathPara xmlns:m="http://schemas.openxmlformats.org/officeDocument/2006/math">
-                    <m:oMathParaPr>
-                      <m:jc m:val="centerGroup"/>
-                    </m:oMathParaPr>
-                    <m:oMath xmlns:m="http://schemas.openxmlformats.org/officeDocument/2006/math">
+                    <m:oMath>
                       <m:r>
                         <a:rPr lang="en-US" sz="2400" i="1" smtClean="0">
                           <a:latin typeface="Cambria Math" panose="02040503050406030204" pitchFamily="18" charset="0"/>
@@ -16511,7 +13574,7 @@
                       <m:d>
                         <m:dPr>
                           <m:ctrlPr>
-                            <a:rPr lang="en-US" sz="2400" i="1" dirty="0">
+                            <a:rPr lang="en-US" sz="2400" b="1" dirty="0">
                               <a:latin typeface="Cambria Math" panose="02040503050406030204" pitchFamily="18" charset="0"/>
                             </a:rPr>
                           </m:ctrlPr>
@@ -16547,7 +13610,7 @@
                         <m:naryPr>
                           <m:chr m:val="∑"/>
                           <m:ctrlPr>
-                            <a:rPr lang="en-US" sz="2400" i="1">
+                            <a:rPr lang="en-US" sz="2400" b="0" i="1" smtClean="0">
                               <a:latin typeface="Cambria Math" panose="02040503050406030204" pitchFamily="18" charset="0"/>
                             </a:rPr>
                           </m:ctrlPr>
@@ -16623,7 +13686,7 @@
                           <m:sSub>
                             <m:sSubPr>
                               <m:ctrlPr>
-                                <a:rPr lang="en-US" sz="2400" i="1" dirty="0">
+                                <a:rPr lang="en-US" sz="2400" b="1" i="0" dirty="0">
                                   <a:latin typeface="Cambria Math" panose="02040503050406030204" pitchFamily="18" charset="0"/>
                                 </a:rPr>
                               </m:ctrlPr>
@@ -16648,7 +13711,7 @@
                           <m:d>
                             <m:dPr>
                               <m:ctrlPr>
-                                <a:rPr lang="en-US" sz="2400" i="1" dirty="0">
+                                <a:rPr lang="en-US" sz="2400" b="1" dirty="0">
                                   <a:latin typeface="Cambria Math" panose="02040503050406030204" pitchFamily="18" charset="0"/>
                                 </a:rPr>
                               </m:ctrlPr>
@@ -16805,10 +13868,7 @@
                 <a:pPr/>
                 <a14:m>
                   <m:oMathPara xmlns:m="http://schemas.openxmlformats.org/officeDocument/2006/math">
-                    <m:oMathParaPr>
-                      <m:jc m:val="centerGroup"/>
-                    </m:oMathParaPr>
-                    <m:oMath xmlns:m="http://schemas.openxmlformats.org/officeDocument/2006/math">
+                    <m:oMath>
                       <m:r>
                         <a:rPr lang="en-US" sz="2400" i="1" smtClean="0">
                           <a:latin typeface="Cambria Math" panose="02040503050406030204" pitchFamily="18" charset="0"/>
@@ -16989,7 +14049,7 @@
                       <m:sSub>
                         <m:sSubPr>
                           <m:ctrlPr>
-                            <a:rPr lang="en-US" sz="2400" i="1" dirty="0">
+                            <a:rPr lang="en-US" sz="2400" b="1" dirty="0">
                               <a:latin typeface="Cambria Math" panose="02040503050406030204" pitchFamily="18" charset="0"/>
                             </a:rPr>
                           </m:ctrlPr>
@@ -17014,7 +14074,7 @@
                       <m:d>
                         <m:dPr>
                           <m:ctrlPr>
-                            <a:rPr lang="en-US" sz="2400" i="1" dirty="0">
+                            <a:rPr lang="en-US" sz="2400" b="1" dirty="0">
                               <a:latin typeface="Cambria Math" panose="02040503050406030204" pitchFamily="18" charset="0"/>
                             </a:rPr>
                           </m:ctrlPr>
@@ -17081,13 +14141,7 @@
                         <a:rPr lang="en-US" sz="2400" i="1" dirty="0">
                           <a:latin typeface="Cambria Math" panose="02040503050406030204" pitchFamily="18" charset="0"/>
                         </a:rPr>
-                        <m:t>)</m:t>
-                      </m:r>
-                      <m:r>
-                        <a:rPr lang="en-US" sz="2400" b="1" i="0" dirty="0" smtClean="0">
-                          <a:latin typeface="Cambria Math" panose="02040503050406030204" pitchFamily="18" charset="0"/>
-                        </a:rPr>
-                        <m:t>]+ </m:t>
+                        <m:t>)]+ </m:t>
                       </m:r>
                       <m:r>
                         <a:rPr lang="en-US" sz="2400" b="1">
@@ -17140,7 +14194,7 @@
                       <m:d>
                         <m:dPr>
                           <m:ctrlPr>
-                            <a:rPr lang="en-US" sz="2400" i="1" dirty="0">
+                            <a:rPr lang="en-US" sz="2400" b="1" dirty="0">
                               <a:latin typeface="Cambria Math" panose="02040503050406030204" pitchFamily="18" charset="0"/>
                             </a:rPr>
                           </m:ctrlPr>
@@ -17430,7 +14484,7 @@
                     <m:sSub>
                       <m:sSubPr>
                         <m:ctrlPr>
-                          <a:rPr lang="en-US" sz="2400" i="1" dirty="0">
+                          <a:rPr lang="en-US" sz="2400" b="1" dirty="0">
                             <a:latin typeface="Cambria Math" panose="02040503050406030204" pitchFamily="18" charset="0"/>
                           </a:rPr>
                         </m:ctrlPr>
@@ -17455,7 +14509,7 @@
                     <m:d>
                       <m:dPr>
                         <m:ctrlPr>
-                          <a:rPr lang="en-US" sz="2400" i="1" dirty="0">
+                          <a:rPr lang="en-US" sz="2400" b="1" dirty="0">
                             <a:latin typeface="Cambria Math" panose="02040503050406030204" pitchFamily="18" charset="0"/>
                           </a:rPr>
                         </m:ctrlPr>
@@ -17522,13 +14576,7 @@
                       <a:rPr lang="en-US" sz="2400" i="1" dirty="0">
                         <a:latin typeface="Cambria Math" panose="02040503050406030204" pitchFamily="18" charset="0"/>
                       </a:rPr>
-                      <m:t>)</m:t>
-                    </m:r>
-                    <m:r>
-                      <a:rPr lang="en-US" sz="2400" b="1" dirty="0">
-                        <a:latin typeface="Cambria Math" panose="02040503050406030204" pitchFamily="18" charset="0"/>
-                      </a:rPr>
-                      <m:t>]</m:t>
+                      <m:t>)]</m:t>
                     </m:r>
                   </m:oMath>
                 </a14:m>
@@ -17605,7 +14653,7 @@
           <a:p>
             <a:fld id="{D213E760-DC45-6A42-A580-C7F05A8FCDA3}" type="datetime1">
               <a:rPr lang="en-US" smtClean="0"/>
-              <a:t>4/13/25</a:t>
+              <a:t>8/13/26</a:t>
             </a:fld>
             <a:endParaRPr lang="en-US" dirty="0"/>
           </a:p>
@@ -17806,10 +14854,7 @@
                 </a:pPr>
                 <a14:m>
                   <m:oMathPara xmlns:m="http://schemas.openxmlformats.org/officeDocument/2006/math">
-                    <m:oMathParaPr>
-                      <m:jc m:val="centerGroup"/>
-                    </m:oMathParaPr>
-                    <m:oMath xmlns:m="http://schemas.openxmlformats.org/officeDocument/2006/math">
+                    <m:oMath>
                       <m:sSub>
                         <m:sSubPr>
                           <m:ctrlPr>
@@ -17943,7 +14988,7 @@
                       <m:sSub>
                         <m:sSubPr>
                           <m:ctrlPr>
-                            <a:rPr lang="en-US" sz="2400" i="1" dirty="0">
+                            <a:rPr lang="en-US" sz="2400" b="1" dirty="0">
                               <a:latin typeface="Cambria Math" panose="02040503050406030204" pitchFamily="18" charset="0"/>
                             </a:rPr>
                           </m:ctrlPr>
@@ -17968,7 +15013,7 @@
                       <m:d>
                         <m:dPr>
                           <m:ctrlPr>
-                            <a:rPr lang="en-US" sz="2400" i="1" dirty="0">
+                            <a:rPr lang="en-US" sz="2400" b="1" dirty="0">
                               <a:latin typeface="Cambria Math" panose="02040503050406030204" pitchFamily="18" charset="0"/>
                             </a:rPr>
                           </m:ctrlPr>
@@ -18175,7 +15220,7 @@
                       <m:sSub>
                         <m:sSubPr>
                           <m:ctrlPr>
-                            <a:rPr lang="en-US" sz="2400" i="1" dirty="0">
+                            <a:rPr lang="en-US" sz="2400" b="1" dirty="0">
                               <a:latin typeface="Cambria Math" panose="02040503050406030204" pitchFamily="18" charset="0"/>
                             </a:rPr>
                           </m:ctrlPr>
@@ -18200,7 +15245,7 @@
                       <m:d>
                         <m:dPr>
                           <m:ctrlPr>
-                            <a:rPr lang="en-US" sz="2400" i="1" dirty="0">
+                            <a:rPr lang="en-US" sz="2400" b="1" dirty="0">
                               <a:latin typeface="Cambria Math" panose="02040503050406030204" pitchFamily="18" charset="0"/>
                             </a:rPr>
                           </m:ctrlPr>
@@ -18301,11 +15346,11 @@
                     <m:oMathParaPr>
                       <m:jc m:val="center"/>
                     </m:oMathParaPr>
-                    <m:oMath xmlns:m="http://schemas.openxmlformats.org/officeDocument/2006/math">
+                    <m:oMath>
                       <m:sSubSup>
                         <m:sSubSupPr>
                           <m:ctrlPr>
-                            <a:rPr lang="en-US" sz="2400" b="0" i="1" smtClean="0">
+                            <a:rPr lang="en-US" sz="2400" i="1">
                               <a:latin typeface="Cambria Math" panose="02040503050406030204" pitchFamily="18" charset="0"/>
                             </a:rPr>
                           </m:ctrlPr>
@@ -18485,7 +15530,7 @@
                           <m:sSub>
                             <m:sSubPr>
                               <m:ctrlPr>
-                                <a:rPr lang="en-US" sz="2400" i="1" smtClean="0">
+                                <a:rPr lang="en-US" sz="2400" b="0" i="1" smtClean="0">
                                   <a:latin typeface="Cambria Math" panose="02040503050406030204" pitchFamily="18" charset="0"/>
                                 </a:rPr>
                               </m:ctrlPr>
@@ -18558,7 +15603,7 @@
                           <m:sSub>
                             <m:sSubPr>
                               <m:ctrlPr>
-                                <a:rPr lang="en-US" sz="2400" i="1" dirty="0">
+                                <a:rPr lang="en-US" sz="2400" b="1" dirty="0">
                                   <a:latin typeface="Cambria Math" panose="02040503050406030204" pitchFamily="18" charset="0"/>
                                 </a:rPr>
                               </m:ctrlPr>
@@ -18583,7 +15628,7 @@
                           <m:d>
                             <m:dPr>
                               <m:ctrlPr>
-                                <a:rPr lang="en-US" sz="2400" i="1" dirty="0">
+                                <a:rPr lang="en-US" sz="2400" b="1" dirty="0">
                                   <a:latin typeface="Cambria Math" panose="02040503050406030204" pitchFamily="18" charset="0"/>
                                 </a:rPr>
                               </m:ctrlPr>
@@ -18708,7 +15753,7 @@
                           <m:sSub>
                             <m:sSubPr>
                               <m:ctrlPr>
-                                <a:rPr lang="en-US" sz="2400" i="1" dirty="0">
+                                <a:rPr lang="en-US" sz="2400" b="1" dirty="0">
                                   <a:latin typeface="Cambria Math" panose="02040503050406030204" pitchFamily="18" charset="0"/>
                                 </a:rPr>
                               </m:ctrlPr>
@@ -18733,7 +15778,7 @@
                           <m:d>
                             <m:dPr>
                               <m:ctrlPr>
-                                <a:rPr lang="en-US" sz="2400" i="1" dirty="0">
+                                <a:rPr lang="en-US" sz="2400" b="1" dirty="0">
                                   <a:latin typeface="Cambria Math" panose="02040503050406030204" pitchFamily="18" charset="0"/>
                                 </a:rPr>
                               </m:ctrlPr>
@@ -18864,7 +15909,7 @@
                           <m:sSub>
                             <m:sSubPr>
                               <m:ctrlPr>
-                                <a:rPr lang="en-US" sz="2400" i="1" dirty="0">
+                                <a:rPr lang="en-US" sz="2400" b="1" dirty="0">
                                   <a:latin typeface="Cambria Math" panose="02040503050406030204" pitchFamily="18" charset="0"/>
                                 </a:rPr>
                               </m:ctrlPr>
@@ -18889,7 +15934,7 @@
                           <m:d>
                             <m:dPr>
                               <m:ctrlPr>
-                                <a:rPr lang="en-US" sz="2400" i="1" dirty="0">
+                                <a:rPr lang="en-US" sz="2400" b="1" dirty="0">
                                   <a:latin typeface="Cambria Math" panose="02040503050406030204" pitchFamily="18" charset="0"/>
                                 </a:rPr>
                               </m:ctrlPr>
@@ -19082,7 +16127,7 @@
           <a:p>
             <a:fld id="{8EA0E311-2F0D-6D43-9368-2C9929460BC8}" type="datetime1">
               <a:rPr lang="en-US" smtClean="0"/>
-              <a:t>4/13/25</a:t>
+              <a:t>8/13/26</a:t>
             </a:fld>
             <a:endParaRPr lang="en-US" dirty="0"/>
           </a:p>
@@ -19431,15 +16476,12 @@
                 </a:pPr>
                 <a14:m>
                   <m:oMathPara xmlns:m="http://schemas.openxmlformats.org/officeDocument/2006/math">
-                    <m:oMathParaPr>
-                      <m:jc m:val="centerGroup"/>
-                    </m:oMathParaPr>
-                    <m:oMath xmlns:m="http://schemas.openxmlformats.org/officeDocument/2006/math">
+                    <m:oMath>
                       <m:acc>
                         <m:accPr>
                           <m:chr m:val="̇"/>
                           <m:ctrlPr>
-                            <a:rPr lang="en-US" sz="2400" i="1">
+                            <a:rPr lang="en-US" sz="2400" b="1">
                               <a:latin typeface="Cambria Math" panose="02040503050406030204" pitchFamily="18" charset="0"/>
                             </a:rPr>
                           </m:ctrlPr>
@@ -19468,7 +16510,7 @@
                       <m:d>
                         <m:dPr>
                           <m:ctrlPr>
-                            <a:rPr lang="en-US" sz="2400" i="1" dirty="0">
+                            <a:rPr lang="en-US" sz="2400" b="1" dirty="0">
                               <a:latin typeface="Cambria Math" panose="02040503050406030204" pitchFamily="18" charset="0"/>
                             </a:rPr>
                           </m:ctrlPr>
@@ -19509,7 +16551,7 @@
                       <m:d>
                         <m:dPr>
                           <m:ctrlPr>
-                            <a:rPr lang="en-US" sz="2400" i="1" dirty="0">
+                            <a:rPr lang="en-US" sz="2400" b="1" dirty="0">
                               <a:latin typeface="Cambria Math" panose="02040503050406030204" pitchFamily="18" charset="0"/>
                             </a:rPr>
                           </m:ctrlPr>
@@ -19582,7 +16624,7 @@
                     <m:sSub>
                       <m:sSubPr>
                         <m:ctrlPr>
-                          <a:rPr lang="en-US" sz="2400" b="1" i="1" dirty="0">
+                          <a:rPr lang="en-US" sz="2400" b="1" dirty="0">
                             <a:latin typeface="Cambria Math" panose="02040503050406030204" pitchFamily="18" charset="0"/>
                           </a:rPr>
                         </m:ctrlPr>
@@ -19623,10 +16665,7 @@
                 </a:pPr>
                 <a14:m>
                   <m:oMathPara xmlns:m="http://schemas.openxmlformats.org/officeDocument/2006/math">
-                    <m:oMathParaPr>
-                      <m:jc m:val="centerGroup"/>
-                    </m:oMathParaPr>
-                    <m:oMath xmlns:m="http://schemas.openxmlformats.org/officeDocument/2006/math">
+                    <m:oMath>
                       <m:r>
                         <a:rPr lang="en-US" sz="2400" i="1">
                           <a:latin typeface="Cambria Math" panose="02040503050406030204" pitchFamily="18" charset="0"/>
@@ -19642,7 +16681,7 @@
                       <m:f>
                         <m:fPr>
                           <m:ctrlPr>
-                            <a:rPr lang="en-US" sz="2400" i="1" smtClean="0">
+                            <a:rPr lang="en-US" sz="2400" b="0" i="1" smtClean="0">
                               <a:latin typeface="Cambria Math" panose="02040503050406030204" pitchFamily="18" charset="0"/>
                             </a:rPr>
                           </m:ctrlPr>
@@ -19667,7 +16706,7 @@
                       <m:nary>
                         <m:naryPr>
                           <m:ctrlPr>
-                            <a:rPr lang="en-US" sz="2400" i="1" smtClean="0">
+                            <a:rPr lang="en-US" sz="2400" i="1">
                               <a:latin typeface="Cambria Math" panose="02040503050406030204" pitchFamily="18" charset="0"/>
                             </a:rPr>
                           </m:ctrlPr>
@@ -19742,7 +16781,7 @@
                           <m:sSup>
                             <m:sSupPr>
                               <m:ctrlPr>
-                                <a:rPr lang="en-US" sz="2400" b="0" i="1" dirty="0" smtClean="0">
+                                <a:rPr lang="en-US" sz="2400" i="1" dirty="0">
                                   <a:latin typeface="Cambria Math" panose="02040503050406030204" pitchFamily="18" charset="0"/>
                                 </a:rPr>
                               </m:ctrlPr>
@@ -19936,7 +16975,7 @@
           <a:p>
             <a:fld id="{D7E06E3F-A9B4-6541-A6A5-659E5768A616}" type="datetime1">
               <a:rPr lang="en-US" smtClean="0"/>
-              <a:t>4/13/25</a:t>
+              <a:t>8/13/26</a:t>
             </a:fld>
             <a:endParaRPr lang="en-US" dirty="0"/>
           </a:p>
@@ -22800,7 +19839,7 @@
           <a:p>
             <a:fld id="{25809BF1-D458-824A-8D4A-C0CE7CC1C2CB}" type="datetime1">
               <a:rPr lang="en-US" smtClean="0"/>
-              <a:t>4/13/25</a:t>
+              <a:t>8/13/26</a:t>
             </a:fld>
             <a:endParaRPr lang="en-US" dirty="0"/>
           </a:p>
@@ -23139,7 +20178,7 @@
                     <m:d>
                       <m:dPr>
                         <m:ctrlPr>
-                          <a:rPr lang="en-US" sz="2600" i="1" dirty="0">
+                          <a:rPr lang="en-US" sz="2600" b="1" dirty="0">
                             <a:latin typeface="Cambria Math" panose="02040503050406030204" pitchFamily="18" charset="0"/>
                           </a:rPr>
                         </m:ctrlPr>
@@ -23180,7 +20219,7 @@
                     <m:d>
                       <m:dPr>
                         <m:ctrlPr>
-                          <a:rPr lang="en-US" sz="2600" i="1" dirty="0">
+                          <a:rPr lang="en-US" sz="2600" b="1" dirty="0">
                             <a:latin typeface="Cambria Math" panose="02040503050406030204" pitchFamily="18" charset="0"/>
                           </a:rPr>
                         </m:ctrlPr>
@@ -23287,14 +20326,11 @@
                 </a:pPr>
                 <a14:m>
                   <m:oMathPara xmlns:m="http://schemas.openxmlformats.org/officeDocument/2006/math">
-                    <m:oMathParaPr>
-                      <m:jc m:val="centerGroup"/>
-                    </m:oMathParaPr>
-                    <m:oMath xmlns:m="http://schemas.openxmlformats.org/officeDocument/2006/math">
+                    <m:oMath>
                       <m:sSup>
                         <m:sSupPr>
                           <m:ctrlPr>
-                            <a:rPr lang="en-US" sz="2400" b="0" i="1" smtClean="0">
+                            <a:rPr lang="en-US" sz="2400" b="1" i="0" smtClean="0">
                               <a:latin typeface="Cambria Math" panose="02040503050406030204" pitchFamily="18" charset="0"/>
                             </a:rPr>
                           </m:ctrlPr>
@@ -23351,7 +20387,7 @@
                       <m:limLow>
                         <m:limLowPr>
                           <m:ctrlPr>
-                            <a:rPr lang="en-US" sz="2400" b="0" i="1" smtClean="0">
+                            <a:rPr lang="en-US" sz="2400" b="0" i="0" smtClean="0">
                               <a:latin typeface="Cambria Math" panose="02040503050406030204" pitchFamily="18" charset="0"/>
                             </a:rPr>
                           </m:ctrlPr>
@@ -23410,7 +20446,7 @@
                           <m:begChr m:val="["/>
                           <m:endChr m:val="]"/>
                           <m:ctrlPr>
-                            <a:rPr lang="en-US" sz="2400" b="0" i="1" smtClean="0">
+                            <a:rPr lang="en-US" sz="2400" i="1">
                               <a:latin typeface="Cambria Math" panose="02040503050406030204" pitchFamily="18" charset="0"/>
                             </a:rPr>
                           </m:ctrlPr>
@@ -23613,7 +20649,7 @@
                               <m:sSub>
                                 <m:sSubPr>
                                   <m:ctrlPr>
-                                    <a:rPr lang="en-US" sz="2400" i="1" dirty="0">
+                                    <a:rPr lang="en-US" sz="2400" b="1" dirty="0">
                                       <a:latin typeface="Cambria Math" panose="02040503050406030204" pitchFamily="18" charset="0"/>
                                     </a:rPr>
                                   </m:ctrlPr>
@@ -23638,7 +20674,7 @@
                               <m:d>
                                 <m:dPr>
                                   <m:ctrlPr>
-                                    <a:rPr lang="en-US" sz="2400" i="1" dirty="0">
+                                    <a:rPr lang="en-US" sz="2400" b="1" dirty="0">
                                       <a:latin typeface="Cambria Math" panose="02040503050406030204" pitchFamily="18" charset="0"/>
                                     </a:rPr>
                                   </m:ctrlPr>
@@ -23886,7 +20922,7 @@
                     <m:d>
                       <m:dPr>
                         <m:ctrlPr>
-                          <a:rPr lang="en-US" sz="2600" b="1" i="1">
+                          <a:rPr lang="en-US" sz="2600" i="1">
                             <a:latin typeface="Cambria Math" panose="02040503050406030204" pitchFamily="18" charset="0"/>
                           </a:rPr>
                         </m:ctrlPr>
@@ -23957,7 +20993,7 @@
                     <m:d>
                       <m:dPr>
                         <m:ctrlPr>
-                          <a:rPr lang="en-US" sz="2600" i="1" dirty="0">
+                          <a:rPr lang="en-US" sz="2600" b="1" dirty="0">
                             <a:latin typeface="Cambria Math" panose="02040503050406030204" pitchFamily="18" charset="0"/>
                           </a:rPr>
                         </m:ctrlPr>
@@ -24071,7 +21107,7 @@
                     <m:d>
                       <m:dPr>
                         <m:ctrlPr>
-                          <a:rPr lang="en-US" sz="2600" i="1" dirty="0">
+                          <a:rPr lang="en-US" sz="2600" b="1" dirty="0">
                             <a:latin typeface="Cambria Math" panose="02040503050406030204" pitchFamily="18" charset="0"/>
                           </a:rPr>
                         </m:ctrlPr>
@@ -24172,7 +21208,7 @@
           <a:p>
             <a:fld id="{6B731A05-417E-AD40-BEA7-7E8E6DD95C99}" type="datetime1">
               <a:rPr lang="en-US" smtClean="0"/>
-              <a:t>4/13/25</a:t>
+              <a:t>8/13/26</a:t>
             </a:fld>
             <a:endParaRPr lang="en-US" dirty="0"/>
           </a:p>
@@ -24379,7 +21415,7 @@
                     <m:sSub>
                       <m:sSubPr>
                         <m:ctrlPr>
-                          <a:rPr lang="en-US" sz="2400" b="0" i="1" smtClean="0">
+                          <a:rPr lang="en-US" sz="2400" i="1" smtClean="0">
                             <a:latin typeface="Cambria Math" panose="02040503050406030204" pitchFamily="18" charset="0"/>
                           </a:rPr>
                         </m:ctrlPr>
@@ -24389,7 +21425,7 @@
                           <m:accPr>
                             <m:chr m:val="̂"/>
                             <m:ctrlPr>
-                              <a:rPr lang="en-US" sz="2400" i="1" smtClean="0">
+                              <a:rPr lang="en-US" sz="2400" b="0" i="1" smtClean="0">
                                 <a:latin typeface="Cambria Math" panose="02040503050406030204" pitchFamily="18" charset="0"/>
                               </a:rPr>
                             </m:ctrlPr>
@@ -24525,7 +21561,7 @@
                     <m:sSub>
                       <m:sSubPr>
                         <m:ctrlPr>
-                          <a:rPr lang="en-US" sz="2400" i="1" dirty="0">
+                          <a:rPr lang="en-US" sz="2400" b="1" dirty="0">
                             <a:latin typeface="Cambria Math" panose="02040503050406030204" pitchFamily="18" charset="0"/>
                           </a:rPr>
                         </m:ctrlPr>
@@ -24550,7 +21586,7 @@
                     <m:d>
                       <m:dPr>
                         <m:ctrlPr>
-                          <a:rPr lang="en-US" sz="2400" i="1" dirty="0">
+                          <a:rPr lang="en-US" sz="2400" b="1" dirty="0">
                             <a:latin typeface="Cambria Math" panose="02040503050406030204" pitchFamily="18" charset="0"/>
                           </a:rPr>
                         </m:ctrlPr>
@@ -24941,18 +21977,12 @@
                           <a:rPr lang="en-US" sz="2400">
                             <a:latin typeface="Cambria Math" panose="02040503050406030204" pitchFamily="18" charset="0"/>
                           </a:rPr>
-                          <m:t>  </m:t>
-                        </m:r>
-                        <m:r>
-                          <a:rPr lang="en-US" sz="2400" b="0" i="1" smtClean="0">
-                            <a:latin typeface="Cambria Math" panose="02040503050406030204" pitchFamily="18" charset="0"/>
-                          </a:rPr>
-                          <m:t>  </m:t>
+                          <m:t>    </m:t>
                         </m:r>
                         <m:sSubSup>
                           <m:sSubSupPr>
                             <m:ctrlPr>
-                              <a:rPr lang="en-US" sz="2400" i="1" smtClean="0">
+                              <a:rPr lang="en-US" sz="2400" b="0" i="1" smtClean="0">
                                 <a:latin typeface="Cambria Math" panose="02040503050406030204" pitchFamily="18" charset="0"/>
                               </a:rPr>
                             </m:ctrlPr>
@@ -25068,7 +22098,7 @@
                         <m:sSubSup>
                           <m:sSubSupPr>
                             <m:ctrlPr>
-                              <a:rPr lang="en-US" sz="2400" i="1">
+                              <a:rPr lang="en-US" sz="2400" b="0" i="1" smtClean="0">
                                 <a:latin typeface="Cambria Math" panose="02040503050406030204" pitchFamily="18" charset="0"/>
                               </a:rPr>
                             </m:ctrlPr>
@@ -25340,7 +22370,7 @@
           <a:p>
             <a:fld id="{E519B2E0-5F0C-4545-9029-7BD23BB81B73}" type="datetime1">
               <a:rPr lang="en-US" smtClean="0"/>
-              <a:t>4/13/25</a:t>
+              <a:t>8/13/26</a:t>
             </a:fld>
             <a:endParaRPr lang="en-US" dirty="0"/>
           </a:p>
@@ -25462,8 +22492,8 @@
           </a:p>
         </p:txBody>
       </p:sp>
-      <mc:AlternateContent xmlns:mc="http://schemas.openxmlformats.org/markup-compatibility/2006">
-        <mc:Choice xmlns:a14="http://schemas.microsoft.com/office/drawing/2010/main" Requires="a14">
+      <mc:AlternateContent xmlns:mc="http://schemas.openxmlformats.org/markup-compatibility/2006" xmlns:a14="http://schemas.microsoft.com/office/drawing/2010/main">
+        <mc:Choice Requires="a14">
           <p:sp>
             <p:nvSpPr>
               <p:cNvPr id="3" name="Content Placeholder 2">
@@ -26212,7 +23242,7 @@
             </p:txBody>
           </p:sp>
         </mc:Choice>
-        <mc:Fallback>
+        <mc:Fallback xmlns="">
           <p:sp>
             <p:nvSpPr>
               <p:cNvPr id="3" name="Content Placeholder 2">
@@ -26279,7 +23309,7 @@
           <a:p>
             <a:fld id="{240AF110-2D33-5948-B48E-1CBF55ADF75D}" type="datetime1">
               <a:rPr lang="en-US" smtClean="0"/>
-              <a:t>4/13/25</a:t>
+              <a:t>8/13/26</a:t>
             </a:fld>
             <a:endParaRPr lang="en-US" dirty="0"/>
           </a:p>
@@ -26488,7 +23518,7 @@
           <a:p>
             <a:fld id="{5227FE58-2921-644D-AE9F-A3EC03383698}" type="datetime1">
               <a:rPr lang="en-US" smtClean="0"/>
-              <a:t>4/13/25</a:t>
+              <a:t>8/13/26</a:t>
             </a:fld>
             <a:endParaRPr lang="en-US" dirty="0"/>
           </a:p>
@@ -26701,15 +23731,12 @@
                 </a:pPr>
                 <a14:m>
                   <m:oMathPara xmlns:m="http://schemas.openxmlformats.org/officeDocument/2006/math">
-                    <m:oMathParaPr>
-                      <m:jc m:val="centerGroup"/>
-                    </m:oMathParaPr>
-                    <m:oMath xmlns:m="http://schemas.openxmlformats.org/officeDocument/2006/math">
+                    <m:oMath>
                       <m:acc>
                         <m:accPr>
                           <m:chr m:val="̈"/>
                           <m:ctrlPr>
-                            <a:rPr lang="en-US" sz="2400" i="1" smtClean="0">
+                            <a:rPr lang="en-US" sz="2400" b="0" i="1" smtClean="0">
                               <a:latin typeface="Cambria Math" panose="02040503050406030204" pitchFamily="18" charset="0"/>
                             </a:rPr>
                           </m:ctrlPr>
@@ -26833,7 +23860,7 @@
                       <m:accPr>
                         <m:chr m:val="̇"/>
                         <m:ctrlPr>
-                          <a:rPr lang="en-US" sz="2400" i="1" smtClean="0">
+                          <a:rPr lang="en-US" sz="2400" b="0" i="1" smtClean="0">
                             <a:latin typeface="Cambria Math" panose="02040503050406030204" pitchFamily="18" charset="0"/>
                           </a:rPr>
                         </m:ctrlPr>
@@ -26890,7 +23917,7 @@
                     <m:d>
                       <m:dPr>
                         <m:ctrlPr>
-                          <a:rPr lang="en-US" sz="2400" i="1">
+                          <a:rPr lang="en-US" sz="2400" b="0" i="1" smtClean="0">
                             <a:latin typeface="Cambria Math" panose="02040503050406030204" pitchFamily="18" charset="0"/>
                           </a:rPr>
                         </m:ctrlPr>
@@ -26961,7 +23988,7 @@
                     <m:d>
                       <m:dPr>
                         <m:ctrlPr>
-                          <a:rPr lang="en-US" sz="2400" i="1">
+                          <a:rPr lang="en-US" sz="2400" b="0" i="1" smtClean="0">
                             <a:latin typeface="Cambria Math" panose="02040503050406030204" pitchFamily="18" charset="0"/>
                           </a:rPr>
                         </m:ctrlPr>
@@ -27146,7 +24173,7 @@
                     <m:nary>
                       <m:naryPr>
                         <m:ctrlPr>
-                          <a:rPr lang="en-US" sz="2400" i="1" smtClean="0">
+                          <a:rPr lang="en-US" sz="2400" b="0" i="1" smtClean="0">
                             <a:latin typeface="Cambria Math" panose="02040503050406030204" pitchFamily="18" charset="0"/>
                             <a:ea typeface="Source Sans Pro" panose="020B0503030403020204" pitchFamily="34" charset="0"/>
                           </a:rPr>
@@ -27360,7 +24387,7 @@
                     <m:oMathParaPr>
                       <m:jc m:val="center"/>
                     </m:oMathParaPr>
-                    <m:oMath xmlns:m="http://schemas.openxmlformats.org/officeDocument/2006/math">
+                    <m:oMath>
                       <m:sSub>
                         <m:sSubPr>
                           <m:ctrlPr>
@@ -27567,7 +24594,7 @@
           <a:p>
             <a:fld id="{6A593010-C541-1549-BADF-F97F88DFE4EC}" type="datetime1">
               <a:rPr lang="en-US" smtClean="0"/>
-              <a:t>4/13/25</a:t>
+              <a:t>8/13/26</a:t>
             </a:fld>
             <a:endParaRPr lang="en-US" dirty="0"/>
           </a:p>
@@ -27768,15 +24795,12 @@
                 </a:pPr>
                 <a14:m>
                   <m:oMathPara xmlns:m="http://schemas.openxmlformats.org/officeDocument/2006/math">
-                    <m:oMathParaPr>
-                      <m:jc m:val="centerGroup"/>
-                    </m:oMathParaPr>
-                    <m:oMath xmlns:m="http://schemas.openxmlformats.org/officeDocument/2006/math">
+                    <m:oMath>
                       <m:acc>
                         <m:accPr>
                           <m:chr m:val="̇"/>
                           <m:ctrlPr>
-                            <a:rPr lang="en-US" sz="2400" i="1" smtClean="0">
+                            <a:rPr lang="en-US" sz="2400" b="0" i="1" smtClean="0">
                               <a:latin typeface="Cambria Math" panose="02040503050406030204" pitchFamily="18" charset="0"/>
                               <a:cs typeface="Courier New" panose="02070309020205020404" pitchFamily="49" charset="0"/>
                             </a:rPr>
@@ -28087,7 +25111,7 @@
                     <m:sSub>
                       <m:sSubPr>
                         <m:ctrlPr>
-                          <a:rPr lang="en-US" sz="2400" i="1" smtClean="0">
+                          <a:rPr lang="en-US" sz="2400" i="1">
                             <a:latin typeface="Cambria Math" panose="02040503050406030204" pitchFamily="18" charset="0"/>
                             <a:cs typeface="Courier New" panose="02070309020205020404" pitchFamily="49" charset="0"/>
                           </a:rPr>
@@ -28170,7 +25194,7 @@
                     <m:sSub>
                       <m:sSubPr>
                         <m:ctrlPr>
-                          <a:rPr lang="en-US" sz="2400" i="1">
+                          <a:rPr lang="en-US" sz="2400" b="0" i="1" smtClean="0">
                             <a:latin typeface="Cambria Math" panose="02040503050406030204" pitchFamily="18" charset="0"/>
                             <a:cs typeface="Courier New" panose="02070309020205020404" pitchFamily="49" charset="0"/>
                           </a:rPr>
@@ -28234,7 +25258,7 @@
                         <m:begChr m:val="|"/>
                         <m:endChr m:val="|"/>
                         <m:ctrlPr>
-                          <a:rPr lang="en-US" sz="2400" b="0" i="1" smtClean="0">
+                          <a:rPr lang="en-US" sz="2400" i="1">
                             <a:latin typeface="Cambria Math" panose="02040503050406030204" pitchFamily="18" charset="0"/>
                             <a:cs typeface="Courier New" panose="02070309020205020404" pitchFamily="49" charset="0"/>
                           </a:rPr>
@@ -28363,7 +25387,7 @@
                     <m:d>
                       <m:dPr>
                         <m:ctrlPr>
-                          <a:rPr lang="en-US" sz="2400" i="1">
+                          <a:rPr lang="en-US" sz="2400" b="0" i="1" smtClean="0">
                             <a:latin typeface="Cambria Math" panose="02040503050406030204" pitchFamily="18" charset="0"/>
                             <a:cs typeface="Courier New" panose="02070309020205020404" pitchFamily="49" charset="0"/>
                           </a:rPr>
@@ -28529,7 +25553,7 @@
           <a:p>
             <a:fld id="{477CB210-6664-694A-A196-93F98706EB12}" type="datetime1">
               <a:rPr lang="en-US" smtClean="0"/>
-              <a:t>4/13/25</a:t>
+              <a:t>8/13/26</a:t>
             </a:fld>
             <a:endParaRPr lang="en-US" dirty="0"/>
           </a:p>
@@ -29223,7 +26247,7 @@
                       <m:accPr>
                         <m:chr m:val="̇"/>
                         <m:ctrlPr>
-                          <a:rPr lang="en-US" sz="2400" i="1" smtClean="0">
+                          <a:rPr lang="en-US" sz="2400" b="0" i="1" smtClean="0">
                             <a:latin typeface="Cambria Math" panose="02040503050406030204" pitchFamily="18" charset="0"/>
                           </a:rPr>
                         </m:ctrlPr>
@@ -29389,7 +26413,7 @@
           <a:p>
             <a:fld id="{D3F16334-2701-9A42-BCC1-A08F29865D77}" type="datetime1">
               <a:rPr lang="en-US" smtClean="0"/>
-              <a:t>4/13/25</a:t>
+              <a:t>8/13/26</a:t>
             </a:fld>
             <a:endParaRPr lang="en-US" dirty="0"/>
           </a:p>
@@ -30277,8 +27301,8 @@
           </p:sp>
         </mc:Fallback>
       </mc:AlternateContent>
-      <mc:AlternateContent xmlns:mc="http://schemas.openxmlformats.org/markup-compatibility/2006">
-        <mc:Choice xmlns:a14="http://schemas.microsoft.com/office/drawing/2010/main" Requires="a14">
+      <mc:AlternateContent xmlns:mc="http://schemas.openxmlformats.org/markup-compatibility/2006" xmlns:a14="http://schemas.microsoft.com/office/drawing/2010/main">
+        <mc:Choice Requires="a14">
           <p:sp>
             <p:nvSpPr>
               <p:cNvPr id="13" name="Content Placeholder 2">
@@ -30512,7 +27536,7 @@
                         <m:begChr m:val="["/>
                         <m:endChr m:val="]"/>
                         <m:ctrlPr>
-                          <a:rPr lang="en-US" sz="2400" b="0" i="1" smtClean="0">
+                          <a:rPr lang="en-US" sz="2400" b="1" i="1" smtClean="0">
                             <a:latin typeface="Cambria Math" panose="02040503050406030204" pitchFamily="18" charset="0"/>
                           </a:rPr>
                         </m:ctrlPr>
@@ -30568,7 +27592,7 @@
                     <m:sSub>
                       <m:sSubPr>
                         <m:ctrlPr>
-                          <a:rPr lang="en-US" sz="2400" i="1" smtClean="0">
+                          <a:rPr lang="en-US" sz="2400" b="0" i="1" smtClean="0">
                             <a:latin typeface="Cambria Math" panose="02040503050406030204" pitchFamily="18" charset="0"/>
                           </a:rPr>
                         </m:ctrlPr>
@@ -30760,7 +27784,7 @@
                     <m:sSub>
                       <m:sSubPr>
                         <m:ctrlPr>
-                          <a:rPr lang="en-US" sz="2400" i="1">
+                          <a:rPr lang="en-US" sz="2400" b="0" i="1" smtClean="0">
                             <a:latin typeface="Cambria Math" panose="02040503050406030204" pitchFamily="18" charset="0"/>
                           </a:rPr>
                         </m:ctrlPr>
@@ -30839,7 +27863,7 @@
                     <m:f>
                       <m:fPr>
                         <m:ctrlPr>
-                          <a:rPr lang="en-US" sz="2400" i="1">
+                          <a:rPr lang="en-US" sz="2400" i="1" smtClean="0">
                             <a:latin typeface="Cambria Math" panose="02040503050406030204" pitchFamily="18" charset="0"/>
                           </a:rPr>
                         </m:ctrlPr>
@@ -30848,7 +27872,7 @@
                         <m:sSup>
                           <m:sSupPr>
                             <m:ctrlPr>
-                              <a:rPr lang="en-US" sz="2400" i="1" smtClean="0">
+                              <a:rPr lang="en-US" sz="2400" i="1">
                                 <a:latin typeface="Cambria Math" panose="02040503050406030204" pitchFamily="18" charset="0"/>
                               </a:rPr>
                             </m:ctrlPr>
@@ -31003,7 +28027,7 @@
                     <m:f>
                       <m:fPr>
                         <m:ctrlPr>
-                          <a:rPr lang="en-US" sz="2400" i="1" smtClean="0">
+                          <a:rPr lang="en-US" sz="2400" b="0" i="1" smtClean="0">
                             <a:latin typeface="Cambria Math" panose="02040503050406030204" pitchFamily="18" charset="0"/>
                           </a:rPr>
                         </m:ctrlPr>
@@ -31123,7 +28147,7 @@
                     <m:sSub>
                       <m:sSubPr>
                         <m:ctrlPr>
-                          <a:rPr lang="en-US" sz="2400" i="1">
+                          <a:rPr lang="en-US" sz="2400" b="0" i="1" smtClean="0">
                             <a:latin typeface="Cambria Math" panose="02040503050406030204" pitchFamily="18" charset="0"/>
                           </a:rPr>
                         </m:ctrlPr>
@@ -31150,7 +28174,7 @@
                         <m:begChr m:val="["/>
                         <m:endChr m:val="]"/>
                         <m:ctrlPr>
-                          <a:rPr lang="en-US" sz="2400" i="1" smtClean="0">
+                          <a:rPr lang="en-US" sz="2400" i="1">
                             <a:latin typeface="Cambria Math" panose="02040503050406030204" pitchFamily="18" charset="0"/>
                           </a:rPr>
                         </m:ctrlPr>
@@ -31307,7 +28331,7 @@
                     <m:sSub>
                       <m:sSubPr>
                         <m:ctrlPr>
-                          <a:rPr lang="en-US" sz="2400" i="1" smtClean="0">
+                          <a:rPr lang="en-US" sz="2400" b="0" i="1" smtClean="0">
                             <a:latin typeface="Cambria Math" panose="02040503050406030204" pitchFamily="18" charset="0"/>
                           </a:rPr>
                         </m:ctrlPr>
@@ -31523,7 +28547,7 @@
                             <m:sSub>
                               <m:sSubPr>
                                 <m:ctrlPr>
-                                  <a:rPr lang="en-US" sz="2400" i="1">
+                                  <a:rPr lang="en-US" sz="2400" b="0" i="1" smtClean="0">
                                     <a:latin typeface="Cambria Math" panose="02040503050406030204" pitchFamily="18" charset="0"/>
                                   </a:rPr>
                                 </m:ctrlPr>
@@ -31548,7 +28572,7 @@
                             <m:d>
                               <m:dPr>
                                 <m:ctrlPr>
-                                  <a:rPr lang="en-US" sz="2400" i="1">
+                                  <a:rPr lang="en-US" sz="2400" b="0" i="1" smtClean="0">
                                     <a:latin typeface="Cambria Math" panose="02040503050406030204" pitchFamily="18" charset="0"/>
                                   </a:rPr>
                                 </m:ctrlPr>
@@ -31604,7 +28628,7 @@
                     <m:sSub>
                       <m:sSubPr>
                         <m:ctrlPr>
-                          <a:rPr lang="en-US" sz="2400" i="1" smtClean="0">
+                          <a:rPr lang="en-US" sz="2400" b="0" i="1" smtClean="0">
                             <a:latin typeface="Cambria Math" panose="02040503050406030204" pitchFamily="18" charset="0"/>
                           </a:rPr>
                         </m:ctrlPr>
@@ -31652,7 +28676,7 @@
             </p:txBody>
           </p:sp>
         </mc:Choice>
-        <mc:Fallback>
+        <mc:Fallback xmlns="">
           <p:sp>
             <p:nvSpPr>
               <p:cNvPr id="13" name="Content Placeholder 2">
@@ -31720,7 +28744,7 @@
           <a:p>
             <a:fld id="{B1460CD7-A518-0F47-80E4-3A75FDCFD285}" type="datetime1">
               <a:rPr lang="en-US" smtClean="0"/>
-              <a:t>4/13/25</a:t>
+              <a:t>8/13/26</a:t>
             </a:fld>
             <a:endParaRPr lang="en-US" dirty="0"/>
           </a:p>
@@ -31902,7 +28926,7 @@
           <a:p>
             <a:fld id="{603A5EF9-6B54-994E-B646-8D023EFB3865}" type="datetime1">
               <a:rPr lang="en-US" smtClean="0"/>
-              <a:t>4/13/25</a:t>
+              <a:t>8/13/26</a:t>
             </a:fld>
             <a:endParaRPr lang="en-US" dirty="0"/>
           </a:p>
@@ -32137,7 +29161,7 @@
           <a:p>
             <a:fld id="{09E142FD-7897-904A-9284-A06FAEF98398}" type="datetime1">
               <a:rPr lang="en-US" smtClean="0"/>
-              <a:t>4/13/25</a:t>
+              <a:t>8/13/26</a:t>
             </a:fld>
             <a:endParaRPr lang="en-US" dirty="0"/>
           </a:p>
@@ -32450,8 +29474,9 @@
                     <m:sSup>
                       <m:sSupPr>
                         <m:ctrlPr>
-                          <a:rPr lang="en-US" sz="2400" i="1" dirty="0">
-                            <a:latin typeface="Cambria Math" panose="02040503050406030204" pitchFamily="18" charset="0"/>
+                          <a:rPr lang="en-US" sz="2400" b="1" i="0" dirty="0">
+                            <a:latin typeface="Source Sans Pro" panose="020B0503030403020204" pitchFamily="34" charset="0"/>
+                            <a:ea typeface="Source Sans Pro" panose="020B0503030403020204" pitchFamily="34" charset="0"/>
                           </a:rPr>
                         </m:ctrlPr>
                       </m:sSupPr>
@@ -32460,7 +29485,7 @@
                           <m:rPr>
                             <m:nor/>
                           </m:rPr>
-                          <a:rPr lang="en-US" sz="2400" b="1" dirty="0">
+                          <a:rPr lang="en-US" sz="2400" b="1" i="0" dirty="0">
                             <a:latin typeface="Source Sans Pro" panose="020B0503030403020204" pitchFamily="34" charset="0"/>
                             <a:ea typeface="Source Sans Pro" panose="020B0503030403020204" pitchFamily="34" charset="0"/>
                           </a:rPr>
@@ -32496,7 +29521,7 @@
                       <m:accPr>
                         <m:chr m:val="̇"/>
                         <m:ctrlPr>
-                          <a:rPr lang="en-US" sz="2400" b="0" i="1" smtClean="0">
+                          <a:rPr lang="en-US" sz="2400" b="1" i="0" smtClean="0">
                             <a:latin typeface="Cambria Math" panose="02040503050406030204" pitchFamily="18" charset="0"/>
                           </a:rPr>
                         </m:ctrlPr>
@@ -32655,8 +29680,9 @@
                     <m:sSup>
                       <m:sSupPr>
                         <m:ctrlPr>
-                          <a:rPr lang="en-US" sz="2400" i="1" dirty="0">
-                            <a:latin typeface="Cambria Math" panose="02040503050406030204" pitchFamily="18" charset="0"/>
+                          <a:rPr lang="en-US" sz="2400" b="1" i="0" dirty="0">
+                            <a:latin typeface="Source Sans Pro" panose="020B0503030403020204" pitchFamily="34" charset="0"/>
+                            <a:ea typeface="Source Sans Pro" panose="020B0503030403020204" pitchFamily="34" charset="0"/>
                           </a:rPr>
                         </m:ctrlPr>
                       </m:sSupPr>
@@ -32665,7 +29691,7 @@
                           <m:rPr>
                             <m:nor/>
                           </m:rPr>
-                          <a:rPr lang="en-US" sz="2400" b="1" dirty="0">
+                          <a:rPr lang="en-US" sz="2400" b="1" i="0" dirty="0">
                             <a:latin typeface="Source Sans Pro" panose="020B0503030403020204" pitchFamily="34" charset="0"/>
                             <a:ea typeface="Source Sans Pro" panose="020B0503030403020204" pitchFamily="34" charset="0"/>
                           </a:rPr>
@@ -32713,7 +29739,7 @@
                     <m:d>
                       <m:dPr>
                         <m:ctrlPr>
-                          <a:rPr lang="en-US" sz="2400" b="0" i="1" smtClean="0">
+                          <a:rPr lang="en-US" sz="2400" b="1" i="0" smtClean="0">
                             <a:latin typeface="Cambria Math" panose="02040503050406030204" pitchFamily="18" charset="0"/>
                           </a:rPr>
                         </m:ctrlPr>
@@ -32737,12 +29763,12 @@
                       <a:rPr lang="en-US" sz="2400" b="0" i="1" smtClean="0">
                         <a:latin typeface="Cambria Math" panose="02040503050406030204" pitchFamily="18" charset="0"/>
                       </a:rPr>
-                      <m:t>h</m:t>
+                      <m:t>ℎ</m:t>
                     </m:r>
                     <m:d>
                       <m:dPr>
                         <m:ctrlPr>
-                          <a:rPr lang="en-US" sz="2400" b="0" i="1" smtClean="0">
+                          <a:rPr lang="en-US" sz="2400" b="1" i="0" smtClean="0">
                             <a:latin typeface="Cambria Math" panose="02040503050406030204" pitchFamily="18" charset="0"/>
                           </a:rPr>
                         </m:ctrlPr>
@@ -32909,7 +29935,7 @@
                     <m:d>
                       <m:dPr>
                         <m:ctrlPr>
-                          <a:rPr lang="en-US" sz="2400" b="1" i="1" dirty="0" smtClean="0">
+                          <a:rPr lang="en-US" sz="2400" b="1" dirty="0">
                             <a:latin typeface="Cambria Math" panose="02040503050406030204" pitchFamily="18" charset="0"/>
                           </a:rPr>
                         </m:ctrlPr>
@@ -33023,7 +30049,7 @@
                       <a:rPr lang="en-US" sz="2400" b="0" i="1" smtClean="0">
                         <a:latin typeface="Cambria Math" panose="02040503050406030204" pitchFamily="18" charset="0"/>
                       </a:rPr>
-                      <m:t>h</m:t>
+                      <m:t>ℎ</m:t>
                     </m:r>
                     <m:r>
                       <a:rPr lang="en-US" sz="2400" b="0" i="1" smtClean="0">
@@ -33215,7 +30241,7 @@
           <a:p>
             <a:fld id="{22EB992F-94CE-F04F-9EF1-7DA62C46CE87}" type="datetime1">
               <a:rPr lang="en-US" smtClean="0"/>
-              <a:t>4/13/25</a:t>
+              <a:t>8/13/26</a:t>
             </a:fld>
             <a:endParaRPr lang="en-US" dirty="0"/>
           </a:p>
@@ -33345,8 +30371,8 @@
           </a:p>
         </p:txBody>
       </p:sp>
-      <mc:AlternateContent xmlns:mc="http://schemas.openxmlformats.org/markup-compatibility/2006">
-        <mc:Choice xmlns:a14="http://schemas.microsoft.com/office/drawing/2010/main" Requires="a14">
+      <mc:AlternateContent xmlns:mc="http://schemas.openxmlformats.org/markup-compatibility/2006" xmlns:a14="http://schemas.microsoft.com/office/drawing/2010/main">
+        <mc:Choice Requires="a14">
           <p:sp>
             <p:nvSpPr>
               <p:cNvPr id="3" name="Content Placeholder 2">
@@ -33398,10 +30424,7 @@
                 </a:pPr>
                 <a14:m>
                   <m:oMathPara xmlns:m="http://schemas.openxmlformats.org/officeDocument/2006/math">
-                    <m:oMathParaPr>
-                      <m:jc m:val="centerGroup"/>
-                    </m:oMathParaPr>
-                    <m:oMath xmlns:m="http://schemas.openxmlformats.org/officeDocument/2006/math">
+                    <m:oMath>
                       <m:r>
                         <a:rPr lang="en-US" sz="2400" b="0" i="1" smtClean="0">
                           <a:latin typeface="Cambria Math" panose="02040503050406030204" pitchFamily="18" charset="0"/>
@@ -33411,7 +30434,7 @@
                       <m:d>
                         <m:dPr>
                           <m:ctrlPr>
-                            <a:rPr lang="en-US" sz="2400" i="1">
+                            <a:rPr lang="en-US" sz="2400" b="1">
                               <a:latin typeface="Cambria Math" panose="02040503050406030204" pitchFamily="18" charset="0"/>
                             </a:rPr>
                           </m:ctrlPr>
@@ -33527,7 +30550,7 @@
                       <m:d>
                         <m:dPr>
                           <m:ctrlPr>
-                            <a:rPr lang="en-US" sz="2400" i="1">
+                            <a:rPr lang="en-US" sz="2400" b="1">
                               <a:latin typeface="Cambria Math" panose="02040503050406030204" pitchFamily="18" charset="0"/>
                             </a:rPr>
                           </m:ctrlPr>
@@ -33749,7 +30772,7 @@
             </p:txBody>
           </p:sp>
         </mc:Choice>
-        <mc:Fallback>
+        <mc:Fallback xmlns="">
           <p:sp>
             <p:nvSpPr>
               <p:cNvPr id="3" name="Content Placeholder 2">
@@ -33838,7 +30861,7 @@
                           <m:accPr>
                             <m:chr m:val="̇"/>
                             <m:ctrlPr>
-                              <a:rPr lang="en-US" sz="2400" b="0" i="1" smtClean="0">
+                              <a:rPr lang="en-US" sz="2400" b="1" i="0" smtClean="0">
                                 <a:latin typeface="Cambria Math" panose="02040503050406030204" pitchFamily="18" charset="0"/>
                               </a:rPr>
                             </m:ctrlPr>
@@ -33933,7 +30956,7 @@
                     <m:d>
                       <m:dPr>
                         <m:ctrlPr>
-                          <a:rPr lang="en-US" sz="2400" i="1">
+                          <a:rPr lang="en-US" sz="2400" b="1" i="1" smtClean="0">
                             <a:latin typeface="Cambria Math" panose="02040503050406030204" pitchFamily="18" charset="0"/>
                           </a:rPr>
                         </m:ctrlPr>
@@ -33942,7 +30965,7 @@
                         <m:sSup>
                           <m:sSupPr>
                             <m:ctrlPr>
-                              <a:rPr lang="en-US" sz="2400" b="1" i="1" smtClean="0">
+                              <a:rPr lang="en-US" sz="2400" b="1">
                                 <a:latin typeface="Cambria Math" panose="02040503050406030204" pitchFamily="18" charset="0"/>
                               </a:rPr>
                             </m:ctrlPr>
@@ -33990,7 +31013,7 @@
                         <m:sSup>
                           <m:sSupPr>
                             <m:ctrlPr>
-                              <a:rPr lang="en-US" sz="2400" b="1" i="1" smtClean="0">
+                              <a:rPr lang="en-US" sz="2400" b="1">
                                 <a:latin typeface="Cambria Math" panose="02040503050406030204" pitchFamily="18" charset="0"/>
                               </a:rPr>
                             </m:ctrlPr>
@@ -34038,7 +31061,7 @@
                         <m:sSup>
                           <m:sSupPr>
                             <m:ctrlPr>
-                              <a:rPr lang="en-US" sz="2400" b="1" i="1" smtClean="0">
+                              <a:rPr lang="en-US" sz="2400" b="1">
                                 <a:latin typeface="Cambria Math" panose="02040503050406030204" pitchFamily="18" charset="0"/>
                               </a:rPr>
                             </m:ctrlPr>
@@ -34188,7 +31211,7 @@
                           <m:accPr>
                             <m:chr m:val="̇"/>
                             <m:ctrlPr>
-                              <a:rPr lang="en-US" sz="2400" b="0" i="1" smtClean="0">
+                              <a:rPr lang="en-US" sz="2400" b="1" i="0" smtClean="0">
                                 <a:latin typeface="Cambria Math" panose="02040503050406030204" pitchFamily="18" charset="0"/>
                               </a:rPr>
                             </m:ctrlPr>
@@ -34283,7 +31306,7 @@
                     <m:d>
                       <m:dPr>
                         <m:ctrlPr>
-                          <a:rPr lang="en-US" sz="2400" i="1">
+                          <a:rPr lang="en-US" sz="2400" b="1" i="1" smtClean="0">
                             <a:latin typeface="Cambria Math" panose="02040503050406030204" pitchFamily="18" charset="0"/>
                           </a:rPr>
                         </m:ctrlPr>
@@ -34292,7 +31315,7 @@
                         <m:sSup>
                           <m:sSupPr>
                             <m:ctrlPr>
-                              <a:rPr lang="en-US" sz="2400" b="1" i="1" smtClean="0">
+                              <a:rPr lang="en-US" sz="2400" b="1">
                                 <a:latin typeface="Cambria Math" panose="02040503050406030204" pitchFamily="18" charset="0"/>
                               </a:rPr>
                             </m:ctrlPr>
@@ -34340,7 +31363,7 @@
                         <m:sSup>
                           <m:sSupPr>
                             <m:ctrlPr>
-                              <a:rPr lang="en-US" sz="2400" b="1" i="1" smtClean="0">
+                              <a:rPr lang="en-US" sz="2400" b="1">
                                 <a:latin typeface="Cambria Math" panose="02040503050406030204" pitchFamily="18" charset="0"/>
                               </a:rPr>
                             </m:ctrlPr>
@@ -34388,7 +31411,7 @@
                         <m:sSup>
                           <m:sSupPr>
                             <m:ctrlPr>
-                              <a:rPr lang="en-US" sz="2400" b="1" i="1" smtClean="0">
+                              <a:rPr lang="en-US" sz="2400" b="1">
                                 <a:latin typeface="Cambria Math" panose="02040503050406030204" pitchFamily="18" charset="0"/>
                               </a:rPr>
                             </m:ctrlPr>
@@ -34585,7 +31608,7 @@
                     <m:d>
                       <m:dPr>
                         <m:ctrlPr>
-                          <a:rPr lang="en-US" sz="2400" i="1">
+                          <a:rPr lang="en-US" sz="2400" b="1" i="1" smtClean="0">
                             <a:latin typeface="Cambria Math" panose="02040503050406030204" pitchFamily="18" charset="0"/>
                           </a:rPr>
                         </m:ctrlPr>
@@ -34594,7 +31617,7 @@
                         <m:sSup>
                           <m:sSupPr>
                             <m:ctrlPr>
-                              <a:rPr lang="en-US" sz="2400" b="1" i="1" smtClean="0">
+                              <a:rPr lang="en-US" sz="2400" b="1">
                                 <a:latin typeface="Cambria Math" panose="02040503050406030204" pitchFamily="18" charset="0"/>
                               </a:rPr>
                             </m:ctrlPr>
@@ -34642,7 +31665,7 @@
                         <m:sSup>
                           <m:sSupPr>
                             <m:ctrlPr>
-                              <a:rPr lang="en-US" sz="2400" b="1" i="1" smtClean="0">
+                              <a:rPr lang="en-US" sz="2400" b="1">
                                 <a:latin typeface="Cambria Math" panose="02040503050406030204" pitchFamily="18" charset="0"/>
                               </a:rPr>
                             </m:ctrlPr>
@@ -34690,7 +31713,7 @@
                         <m:sSup>
                           <m:sSupPr>
                             <m:ctrlPr>
-                              <a:rPr lang="en-US" sz="2400" b="1" i="1" smtClean="0">
+                              <a:rPr lang="en-US" sz="2400" b="1">
                                 <a:latin typeface="Cambria Math" panose="02040503050406030204" pitchFamily="18" charset="0"/>
                               </a:rPr>
                             </m:ctrlPr>
@@ -35229,10 +32252,7 @@
                 </a:pPr>
                 <a14:m>
                   <m:oMathPara xmlns:m="http://schemas.openxmlformats.org/officeDocument/2006/math">
-                    <m:oMathParaPr>
-                      <m:jc m:val="centerGroup"/>
-                    </m:oMathParaPr>
-                    <m:oMath xmlns:m="http://schemas.openxmlformats.org/officeDocument/2006/math">
+                    <m:oMath>
                       <m:sSup>
                         <m:sSupPr>
                           <m:ctrlPr>
@@ -35247,7 +32267,7 @@
                               <m:begChr m:val="["/>
                               <m:endChr m:val="]"/>
                               <m:ctrlPr>
-                                <a:rPr lang="en-US" sz="2000" i="1" smtClean="0">
+                                <a:rPr lang="en-US" sz="2000" i="1">
                                   <a:latin typeface="Cambria Math" panose="02040503050406030204" pitchFamily="18" charset="0"/>
                                 </a:rPr>
                               </m:ctrlPr>
@@ -35272,7 +32292,7 @@
                                     <a:rPr lang="en-US" sz="2000" i="1">
                                       <a:latin typeface="Cambria Math" panose="02040503050406030204" pitchFamily="18" charset="0"/>
                                     </a:rPr>
-                                    <m:t>h</m:t>
+                                    <m:t>ℎ</m:t>
                                   </m:r>
                                 </m:num>
                                 <m:den>
@@ -35302,7 +32322,7 @@
                                   <m:sSup>
                                     <m:sSupPr>
                                       <m:ctrlPr>
-                                        <a:rPr lang="en-US" sz="2000" i="1">
+                                        <a:rPr lang="en-US" sz="2000" b="1">
                                           <a:latin typeface="Cambria Math" panose="02040503050406030204" pitchFamily="18" charset="0"/>
                                         </a:rPr>
                                       </m:ctrlPr>
@@ -35402,7 +32422,7 @@
                               <m:sSup>
                                 <m:sSupPr>
                                   <m:ctrlPr>
-                                    <a:rPr lang="en-US" sz="2000" i="1">
+                                    <a:rPr lang="en-US" sz="2000" b="1">
                                       <a:latin typeface="Cambria Math" panose="02040503050406030204" pitchFamily="18" charset="0"/>
                                     </a:rPr>
                                   </m:ctrlPr>
@@ -35481,7 +32501,7 @@
                       <m:sSub>
                         <m:sSubPr>
                           <m:ctrlPr>
-                            <a:rPr lang="en-US" sz="2000" i="1" smtClean="0">
+                            <a:rPr lang="en-US" sz="2000" b="1" smtClean="0">
                               <a:latin typeface="Cambria Math" panose="02040503050406030204" pitchFamily="18" charset="0"/>
                             </a:rPr>
                           </m:ctrlPr>
@@ -35529,7 +32549,7 @@
                           <m:d>
                             <m:dPr>
                               <m:ctrlPr>
-                                <a:rPr lang="en-US" sz="2000" i="1">
+                                <a:rPr lang="en-US" sz="2000" b="1" i="1">
                                   <a:latin typeface="Cambria Math" panose="02040503050406030204" pitchFamily="18" charset="0"/>
                                 </a:rPr>
                               </m:ctrlPr>
@@ -35538,7 +32558,7 @@
                               <m:sSup>
                                 <m:sSupPr>
                                   <m:ctrlPr>
-                                    <a:rPr lang="en-US" sz="2000" b="1" i="1">
+                                    <a:rPr lang="en-US" sz="2000" b="1">
                                       <a:latin typeface="Cambria Math" panose="02040503050406030204" pitchFamily="18" charset="0"/>
                                     </a:rPr>
                                   </m:ctrlPr>
@@ -35563,7 +32583,7 @@
                               <m:d>
                                 <m:dPr>
                                   <m:ctrlPr>
-                                    <a:rPr lang="en-US" sz="2000" i="1">
+                                    <a:rPr lang="en-US" sz="2000" i="1" smtClean="0">
                                       <a:latin typeface="Cambria Math" panose="02040503050406030204" pitchFamily="18" charset="0"/>
                                     </a:rPr>
                                   </m:ctrlPr>
@@ -35572,7 +32592,7 @@
                                   <m:sSub>
                                     <m:sSubPr>
                                       <m:ctrlPr>
-                                        <a:rPr lang="en-US" sz="2000" i="1" smtClean="0">
+                                        <a:rPr lang="en-US" sz="2000" i="1">
                                           <a:latin typeface="Cambria Math" panose="02040503050406030204" pitchFamily="18" charset="0"/>
                                         </a:rPr>
                                       </m:ctrlPr>
@@ -35605,7 +32625,7 @@
                               <m:sSup>
                                 <m:sSupPr>
                                   <m:ctrlPr>
-                                    <a:rPr lang="en-US" sz="2000" b="1" i="1">
+                                    <a:rPr lang="en-US" sz="2000" b="1">
                                       <a:latin typeface="Cambria Math" panose="02040503050406030204" pitchFamily="18" charset="0"/>
                                     </a:rPr>
                                   </m:ctrlPr>
@@ -35630,7 +32650,7 @@
                               <m:d>
                                 <m:dPr>
                                   <m:ctrlPr>
-                                    <a:rPr lang="en-US" sz="2000" i="1">
+                                    <a:rPr lang="en-US" sz="2000" i="1" smtClean="0">
                                       <a:latin typeface="Cambria Math" panose="02040503050406030204" pitchFamily="18" charset="0"/>
                                     </a:rPr>
                                   </m:ctrlPr>
@@ -35639,7 +32659,7 @@
                                   <m:sSub>
                                     <m:sSubPr>
                                       <m:ctrlPr>
-                                        <a:rPr lang="en-US" sz="2000" i="1" smtClean="0">
+                                        <a:rPr lang="en-US" sz="2000" i="1">
                                           <a:latin typeface="Cambria Math" panose="02040503050406030204" pitchFamily="18" charset="0"/>
                                         </a:rPr>
                                       </m:ctrlPr>
@@ -35672,7 +32692,7 @@
                               <m:sSup>
                                 <m:sSupPr>
                                   <m:ctrlPr>
-                                    <a:rPr lang="en-US" sz="2000" b="1" i="1">
+                                    <a:rPr lang="en-US" sz="2000" b="1">
                                       <a:latin typeface="Cambria Math" panose="02040503050406030204" pitchFamily="18" charset="0"/>
                                     </a:rPr>
                                   </m:ctrlPr>
@@ -35697,7 +32717,7 @@
                               <m:d>
                                 <m:dPr>
                                   <m:ctrlPr>
-                                    <a:rPr lang="en-US" sz="2000" i="1">
+                                    <a:rPr lang="en-US" sz="2000" i="1" smtClean="0">
                                       <a:latin typeface="Cambria Math" panose="02040503050406030204" pitchFamily="18" charset="0"/>
                                     </a:rPr>
                                   </m:ctrlPr>
@@ -35706,7 +32726,7 @@
                                   <m:sSub>
                                     <m:sSubPr>
                                       <m:ctrlPr>
-                                        <a:rPr lang="en-US" sz="2000" i="1" smtClean="0">
+                                        <a:rPr lang="en-US" sz="2000" i="1">
                                           <a:latin typeface="Cambria Math" panose="02040503050406030204" pitchFamily="18" charset="0"/>
                                         </a:rPr>
                                       </m:ctrlPr>
@@ -35739,7 +32759,7 @@
                               <m:sSub>
                                 <m:sSubPr>
                                   <m:ctrlPr>
-                                    <a:rPr lang="en-US" sz="2000" i="1" smtClean="0">
+                                    <a:rPr lang="en-US" sz="2000" i="1">
                                       <a:latin typeface="Cambria Math" panose="02040503050406030204" pitchFamily="18" charset="0"/>
                                     </a:rPr>
                                   </m:ctrlPr>
@@ -35788,7 +32808,7 @@
                                 <a:rPr lang="en-US" sz="2000" i="1">
                                   <a:latin typeface="Cambria Math" panose="02040503050406030204" pitchFamily="18" charset="0"/>
                                 </a:rPr>
-                                <m:t>h</m:t>
+                                <m:t>ℎ</m:t>
                               </m:r>
                             </m:num>
                             <m:den>
@@ -35818,7 +32838,7 @@
                               <m:sSup>
                                 <m:sSupPr>
                                   <m:ctrlPr>
-                                    <a:rPr lang="en-US" sz="2000" i="1">
+                                    <a:rPr lang="en-US" sz="2000" b="1">
                                       <a:latin typeface="Cambria Math" panose="02040503050406030204" pitchFamily="18" charset="0"/>
                                     </a:rPr>
                                   </m:ctrlPr>
@@ -36027,7 +33047,7 @@
           <a:p>
             <a:fld id="{8BD9367D-56EE-2342-AE05-F22AAE1A6306}" type="datetime1">
               <a:rPr lang="en-US" smtClean="0"/>
-              <a:t>4/13/25</a:t>
+              <a:t>8/13/26</a:t>
             </a:fld>
             <a:endParaRPr lang="en-US" dirty="0"/>
           </a:p>
@@ -36282,7 +33302,7 @@
           <a:p>
             <a:fld id="{93BAB8AA-F9A8-F844-8E69-789E749A587C}" type="datetime1">
               <a:rPr lang="en-US" smtClean="0"/>
-              <a:t>4/13/25</a:t>
+              <a:t>8/13/26</a:t>
             </a:fld>
             <a:endParaRPr lang="en-US" dirty="0"/>
           </a:p>
@@ -36454,7 +33474,7 @@
                     <m:sSup>
                       <m:sSupPr>
                         <m:ctrlPr>
-                          <a:rPr lang="en-US" sz="2400" b="1" i="1" smtClean="0">
+                          <a:rPr lang="en-US" sz="2400" b="1" i="0" smtClean="0">
                             <a:latin typeface="Cambria Math" panose="02040503050406030204" pitchFamily="18" charset="0"/>
                           </a:rPr>
                         </m:ctrlPr>
@@ -36532,7 +33552,7 @@
                     <m:d>
                       <m:dPr>
                         <m:ctrlPr>
-                          <a:rPr lang="en-US" sz="2400" b="0" i="1" smtClean="0">
+                          <a:rPr lang="en-US" sz="2400" b="1" i="0" smtClean="0">
                             <a:latin typeface="Cambria Math" panose="02040503050406030204" pitchFamily="18" charset="0"/>
                           </a:rPr>
                         </m:ctrlPr>
@@ -36570,7 +33590,7 @@
                         <m:sSup>
                           <m:sSupPr>
                             <m:ctrlPr>
-                              <a:rPr lang="en-US" sz="2400" b="0" i="1" smtClean="0">
+                              <a:rPr lang="en-US" sz="2400" b="1" i="0" smtClean="0">
                                 <a:latin typeface="Cambria Math" panose="02040503050406030204" pitchFamily="18" charset="0"/>
                               </a:rPr>
                             </m:ctrlPr>
@@ -36647,7 +33667,7 @@
                     <m:sSup>
                       <m:sSupPr>
                         <m:ctrlPr>
-                          <a:rPr lang="en-US" sz="2400" b="1" i="1">
+                          <a:rPr lang="en-US" sz="2400" b="1">
                             <a:latin typeface="Cambria Math" panose="02040503050406030204" pitchFamily="18" charset="0"/>
                           </a:rPr>
                         </m:ctrlPr>
@@ -36704,7 +33724,7 @@
                     <m:sSup>
                       <m:sSupPr>
                         <m:ctrlPr>
-                          <a:rPr lang="en-US" sz="2400" b="0" i="1" smtClean="0">
+                          <a:rPr lang="en-US" sz="2400" b="1" i="0" smtClean="0">
                             <a:latin typeface="Cambria Math" panose="02040503050406030204" pitchFamily="18" charset="0"/>
                           </a:rPr>
                         </m:ctrlPr>
@@ -36804,7 +33824,7 @@
                         <m:sSup>
                           <m:sSupPr>
                             <m:ctrlPr>
-                              <a:rPr lang="en-US" sz="2400" b="0" i="1" smtClean="0">
+                              <a:rPr lang="en-US" sz="2400" b="1" i="0" smtClean="0">
                                 <a:latin typeface="Cambria Math" panose="02040503050406030204" pitchFamily="18" charset="0"/>
                               </a:rPr>
                             </m:ctrlPr>
@@ -36876,7 +33896,7 @@
                         <m:sSup>
                           <m:sSupPr>
                             <m:ctrlPr>
-                              <a:rPr lang="en-US" sz="2400" b="0" i="1" smtClean="0">
+                              <a:rPr lang="en-US" sz="2400" b="1" i="0" smtClean="0">
                                 <a:latin typeface="Cambria Math" panose="02040503050406030204" pitchFamily="18" charset="0"/>
                               </a:rPr>
                             </m:ctrlPr>
@@ -37223,7 +34243,7 @@
           <a:p>
             <a:fld id="{1E1EDB5D-6C17-DF48-B2EC-2EE6623C292F}" type="datetime1">
               <a:rPr lang="en-US" smtClean="0"/>
-              <a:t>4/13/25</a:t>
+              <a:t>8/13/26</a:t>
             </a:fld>
             <a:endParaRPr lang="en-US" dirty="0"/>
           </a:p>
@@ -37447,7 +34467,7 @@
                     <m:sSup>
                       <m:sSupPr>
                         <m:ctrlPr>
-                          <a:rPr lang="en-US" sz="2400" b="1" i="1">
+                          <a:rPr lang="en-US" sz="2400" b="1">
                             <a:latin typeface="Cambria Math" panose="02040503050406030204" pitchFamily="18" charset="0"/>
                           </a:rPr>
                         </m:ctrlPr>
@@ -37516,10 +34536,7 @@
                 </a:pPr>
                 <a14:m>
                   <m:oMathPara xmlns:m="http://schemas.openxmlformats.org/officeDocument/2006/math">
-                    <m:oMathParaPr>
-                      <m:jc m:val="centerGroup"/>
-                    </m:oMathParaPr>
-                    <m:oMath xmlns:m="http://schemas.openxmlformats.org/officeDocument/2006/math">
+                    <m:oMath>
                       <m:r>
                         <a:rPr lang="en-US" sz="2400" i="1">
                           <a:latin typeface="Cambria Math" panose="02040503050406030204" pitchFamily="18" charset="0"/>
@@ -37544,7 +34561,7 @@
                           <m:sSup>
                             <m:sSupPr>
                               <m:ctrlPr>
-                                <a:rPr lang="en-US" sz="2400" i="1">
+                                <a:rPr lang="en-US" sz="2400" b="1">
                                   <a:latin typeface="Cambria Math" panose="02040503050406030204" pitchFamily="18" charset="0"/>
                                 </a:rPr>
                               </m:ctrlPr>
@@ -37627,7 +34644,7 @@
                         <m:begChr m:val="‖"/>
                         <m:endChr m:val="‖"/>
                         <m:ctrlPr>
-                          <a:rPr lang="en-US" sz="2400" i="1" smtClean="0">
+                          <a:rPr lang="en-US" sz="2400" i="1">
                             <a:latin typeface="Cambria Math" panose="02040503050406030204" pitchFamily="18" charset="0"/>
                           </a:rPr>
                         </m:ctrlPr>
@@ -37770,7 +34787,7 @@
           <a:p>
             <a:fld id="{E3C6B1E4-C377-0841-99AB-7C8ED0840116}" type="datetime1">
               <a:rPr lang="en-US" smtClean="0"/>
-              <a:t>4/13/25</a:t>
+              <a:t>8/13/26</a:t>
             </a:fld>
             <a:endParaRPr lang="en-US" dirty="0"/>
           </a:p>
@@ -38036,10 +35053,7 @@
                 </a:pPr>
                 <a14:m>
                   <m:oMathPara xmlns:m="http://schemas.openxmlformats.org/officeDocument/2006/math">
-                    <m:oMathParaPr>
-                      <m:jc m:val="centerGroup"/>
-                    </m:oMathParaPr>
-                    <m:oMath xmlns:m="http://schemas.openxmlformats.org/officeDocument/2006/math">
+                    <m:oMath>
                       <m:sSup>
                         <m:sSupPr>
                           <m:ctrlPr>
@@ -38079,7 +35093,7 @@
                                     <a:rPr lang="en-US" sz="1800" i="1">
                                       <a:latin typeface="Cambria Math" panose="02040503050406030204" pitchFamily="18" charset="0"/>
                                     </a:rPr>
-                                    <m:t>h</m:t>
+                                    <m:t>ℎ</m:t>
                                   </m:r>
                                 </m:num>
                                 <m:den>
@@ -38109,7 +35123,7 @@
                                   <m:sSup>
                                     <m:sSupPr>
                                       <m:ctrlPr>
-                                        <a:rPr lang="en-US" sz="1800" i="1">
+                                        <a:rPr lang="en-US" sz="1800" b="1">
                                           <a:latin typeface="Cambria Math" panose="02040503050406030204" pitchFamily="18" charset="0"/>
                                         </a:rPr>
                                       </m:ctrlPr>
@@ -38209,7 +35223,7 @@
                               <m:sSup>
                                 <m:sSupPr>
                                   <m:ctrlPr>
-                                    <a:rPr lang="en-US" sz="1800" i="1">
+                                    <a:rPr lang="en-US" sz="1800" b="1">
                                       <a:latin typeface="Cambria Math" panose="02040503050406030204" pitchFamily="18" charset="0"/>
                                     </a:rPr>
                                   </m:ctrlPr>
@@ -38288,7 +35302,7 @@
                       <m:sSub>
                         <m:sSubPr>
                           <m:ctrlPr>
-                            <a:rPr lang="en-US" sz="1800" i="1">
+                            <a:rPr lang="en-US" sz="1800" b="1">
                               <a:latin typeface="Cambria Math" panose="02040503050406030204" pitchFamily="18" charset="0"/>
                             </a:rPr>
                           </m:ctrlPr>
@@ -38336,7 +35350,7 @@
                           <m:d>
                             <m:dPr>
                               <m:ctrlPr>
-                                <a:rPr lang="en-US" sz="1800" i="1">
+                                <a:rPr lang="en-US" sz="1800" b="1" i="1">
                                   <a:latin typeface="Cambria Math" panose="02040503050406030204" pitchFamily="18" charset="0"/>
                                 </a:rPr>
                               </m:ctrlPr>
@@ -38345,7 +35359,7 @@
                               <m:sSup>
                                 <m:sSupPr>
                                   <m:ctrlPr>
-                                    <a:rPr lang="en-US" sz="1800" b="1" i="1">
+                                    <a:rPr lang="en-US" sz="1800" b="1">
                                       <a:latin typeface="Cambria Math" panose="02040503050406030204" pitchFamily="18" charset="0"/>
                                     </a:rPr>
                                   </m:ctrlPr>
@@ -38412,7 +35426,7 @@
                               <m:sSup>
                                 <m:sSupPr>
                                   <m:ctrlPr>
-                                    <a:rPr lang="en-US" sz="1800" b="1" i="1">
+                                    <a:rPr lang="en-US" sz="1800" b="1">
                                       <a:latin typeface="Cambria Math" panose="02040503050406030204" pitchFamily="18" charset="0"/>
                                     </a:rPr>
                                   </m:ctrlPr>
@@ -38479,7 +35493,7 @@
                               <m:sSup>
                                 <m:sSupPr>
                                   <m:ctrlPr>
-                                    <a:rPr lang="en-US" sz="1800" b="1" i="1">
+                                    <a:rPr lang="en-US" sz="1800" b="1">
                                       <a:latin typeface="Cambria Math" panose="02040503050406030204" pitchFamily="18" charset="0"/>
                                     </a:rPr>
                                   </m:ctrlPr>
@@ -38595,7 +35609,7 @@
                                 <a:rPr lang="en-US" sz="1800" i="1">
                                   <a:latin typeface="Cambria Math" panose="02040503050406030204" pitchFamily="18" charset="0"/>
                                 </a:rPr>
-                                <m:t>h</m:t>
+                                <m:t>ℎ</m:t>
                               </m:r>
                             </m:num>
                             <m:den>
@@ -38625,7 +35639,7 @@
                               <m:sSup>
                                 <m:sSupPr>
                                   <m:ctrlPr>
-                                    <a:rPr lang="en-US" sz="1800" i="1">
+                                    <a:rPr lang="en-US" sz="1800" b="1">
                                       <a:latin typeface="Cambria Math" panose="02040503050406030204" pitchFamily="18" charset="0"/>
                                     </a:rPr>
                                   </m:ctrlPr>
@@ -38861,7 +35875,7 @@
                           <m:accPr>
                             <m:chr m:val="̇"/>
                             <m:ctrlPr>
-                              <a:rPr lang="en-US" sz="2000" b="0" i="1" smtClean="0">
+                              <a:rPr lang="en-US" sz="2000" b="1" i="0" smtClean="0">
                                 <a:latin typeface="Cambria Math" panose="02040503050406030204" pitchFamily="18" charset="0"/>
                               </a:rPr>
                             </m:ctrlPr>
@@ -38956,7 +35970,7 @@
                     <m:d>
                       <m:dPr>
                         <m:ctrlPr>
-                          <a:rPr lang="en-US" sz="2000" i="1">
+                          <a:rPr lang="en-US" sz="2000" b="1" i="1" smtClean="0">
                             <a:latin typeface="Cambria Math" panose="02040503050406030204" pitchFamily="18" charset="0"/>
                           </a:rPr>
                         </m:ctrlPr>
@@ -38965,7 +35979,7 @@
                         <m:sSup>
                           <m:sSupPr>
                             <m:ctrlPr>
-                              <a:rPr lang="en-US" sz="2000" b="1" i="1" smtClean="0">
+                              <a:rPr lang="en-US" sz="2000" b="1">
                                 <a:latin typeface="Cambria Math" panose="02040503050406030204" pitchFamily="18" charset="0"/>
                               </a:rPr>
                             </m:ctrlPr>
@@ -39013,7 +36027,7 @@
                         <m:sSup>
                           <m:sSupPr>
                             <m:ctrlPr>
-                              <a:rPr lang="en-US" sz="2000" b="1" i="1" smtClean="0">
+                              <a:rPr lang="en-US" sz="2000" b="1">
                                 <a:latin typeface="Cambria Math" panose="02040503050406030204" pitchFamily="18" charset="0"/>
                               </a:rPr>
                             </m:ctrlPr>
@@ -39061,7 +36075,7 @@
                         <m:sSup>
                           <m:sSupPr>
                             <m:ctrlPr>
-                              <a:rPr lang="en-US" sz="2000" b="1" i="1" smtClean="0">
+                              <a:rPr lang="en-US" sz="2000" b="1">
                                 <a:latin typeface="Cambria Math" panose="02040503050406030204" pitchFamily="18" charset="0"/>
                               </a:rPr>
                             </m:ctrlPr>
@@ -39211,7 +36225,7 @@
                           <m:accPr>
                             <m:chr m:val="̇"/>
                             <m:ctrlPr>
-                              <a:rPr lang="en-US" sz="2000" b="0" i="1" smtClean="0">
+                              <a:rPr lang="en-US" sz="2000" b="1" i="0" smtClean="0">
                                 <a:latin typeface="Cambria Math" panose="02040503050406030204" pitchFamily="18" charset="0"/>
                               </a:rPr>
                             </m:ctrlPr>
@@ -39306,7 +36320,7 @@
                     <m:d>
                       <m:dPr>
                         <m:ctrlPr>
-                          <a:rPr lang="en-US" sz="2000" i="1">
+                          <a:rPr lang="en-US" sz="2000" b="1" i="1" smtClean="0">
                             <a:latin typeface="Cambria Math" panose="02040503050406030204" pitchFamily="18" charset="0"/>
                           </a:rPr>
                         </m:ctrlPr>
@@ -39315,7 +36329,7 @@
                         <m:sSup>
                           <m:sSupPr>
                             <m:ctrlPr>
-                              <a:rPr lang="en-US" sz="2000" b="1" i="1" smtClean="0">
+                              <a:rPr lang="en-US" sz="2000" b="1">
                                 <a:latin typeface="Cambria Math" panose="02040503050406030204" pitchFamily="18" charset="0"/>
                               </a:rPr>
                             </m:ctrlPr>
@@ -39363,7 +36377,7 @@
                         <m:sSup>
                           <m:sSupPr>
                             <m:ctrlPr>
-                              <a:rPr lang="en-US" sz="2000" b="1" i="1" smtClean="0">
+                              <a:rPr lang="en-US" sz="2000" b="1">
                                 <a:latin typeface="Cambria Math" panose="02040503050406030204" pitchFamily="18" charset="0"/>
                               </a:rPr>
                             </m:ctrlPr>
@@ -39411,7 +36425,7 @@
                         <m:sSup>
                           <m:sSupPr>
                             <m:ctrlPr>
-                              <a:rPr lang="en-US" sz="2000" b="1" i="1" smtClean="0">
+                              <a:rPr lang="en-US" sz="2000" b="1">
                                 <a:latin typeface="Cambria Math" panose="02040503050406030204" pitchFamily="18" charset="0"/>
                               </a:rPr>
                             </m:ctrlPr>
@@ -39560,7 +36574,7 @@
                     <m:d>
                       <m:dPr>
                         <m:ctrlPr>
-                          <a:rPr lang="en-US" sz="2000" i="1">
+                          <a:rPr lang="en-US" sz="2000" b="1" i="1">
                             <a:solidFill>
                               <a:srgbClr val="C00000"/>
                             </a:solidFill>
@@ -39572,7 +36586,7 @@
                         <m:sSup>
                           <m:sSupPr>
                             <m:ctrlPr>
-                              <a:rPr lang="en-US" sz="2000" b="1" i="1">
+                              <a:rPr lang="en-US" sz="2000" b="1">
                                 <a:solidFill>
                                   <a:srgbClr val="C00000"/>
                                 </a:solidFill>
@@ -39638,7 +36652,7 @@
                         <m:sSup>
                           <m:sSupPr>
                             <m:ctrlPr>
-                              <a:rPr lang="en-US" sz="2000" b="1" i="1">
+                              <a:rPr lang="en-US" sz="2000" b="1">
                                 <a:solidFill>
                                   <a:srgbClr val="C00000"/>
                                 </a:solidFill>
@@ -39704,7 +36718,7 @@
                         <m:sSup>
                           <m:sSupPr>
                             <m:ctrlPr>
-                              <a:rPr lang="en-US" sz="2000" b="1" i="1">
+                              <a:rPr lang="en-US" sz="2000" b="1">
                                 <a:solidFill>
                                   <a:srgbClr val="C00000"/>
                                 </a:solidFill>
@@ -39799,7 +36813,7 @@
                     <m:d>
                       <m:dPr>
                         <m:ctrlPr>
-                          <a:rPr lang="en-US" sz="2000" i="1">
+                          <a:rPr lang="en-US" sz="2000" b="1" i="1">
                             <a:solidFill>
                               <a:srgbClr val="C00000"/>
                             </a:solidFill>
@@ -39811,7 +36825,7 @@
                         <m:sSup>
                           <m:sSupPr>
                             <m:ctrlPr>
-                              <a:rPr lang="en-US" sz="2000" b="1" i="1">
+                              <a:rPr lang="en-US" sz="2000" b="1">
                                 <a:solidFill>
                                   <a:srgbClr val="C00000"/>
                                 </a:solidFill>
@@ -39918,7 +36932,7 @@
                         <m:sSup>
                           <m:sSupPr>
                             <m:ctrlPr>
-                              <a:rPr lang="en-US" sz="2000" b="1" i="1">
+                              <a:rPr lang="en-US" sz="2000" b="1">
                                 <a:solidFill>
                                   <a:srgbClr val="C00000"/>
                                 </a:solidFill>
@@ -40360,7 +37374,7 @@
           <a:p>
             <a:fld id="{429308F6-8677-D24E-B049-A2BC184CC3F9}" type="datetime1">
               <a:rPr lang="en-US" smtClean="0"/>
-              <a:t>4/13/25</a:t>
+              <a:t>8/13/26</a:t>
             </a:fld>
             <a:endParaRPr lang="en-US" dirty="0"/>
           </a:p>
@@ -40960,18 +37974,18 @@
 </file>
 
 <file path=customXml/item1.xml><?xml version="1.0" encoding="utf-8"?>
-<p:properties xmlns:p="http://schemas.microsoft.com/office/2006/metadata/properties" xmlns:xsi="http://www.w3.org/2001/XMLSchema-instance" xmlns:pc="http://schemas.microsoft.com/office/infopath/2007/PartnerControls">
-  <documentManagement/>
-</p:properties>
-</file>
-
-<file path=customXml/item2.xml><?xml version="1.0" encoding="utf-8"?>
 <?mso-contentType ?>
 <FormTemplates xmlns="http://schemas.microsoft.com/sharepoint/v3/contenttype/forms">
   <Display>DocumentLibraryForm</Display>
   <Edit>DocumentLibraryForm</Edit>
   <New>DocumentLibraryForm</New>
 </FormTemplates>
+</file>
+
+<file path=customXml/item2.xml><?xml version="1.0" encoding="utf-8"?>
+<p:properties xmlns:p="http://schemas.microsoft.com/office/2006/metadata/properties" xmlns:xsi="http://www.w3.org/2001/XMLSchema-instance" xmlns:pc="http://schemas.microsoft.com/office/infopath/2007/PartnerControls">
+  <documentManagement/>
+</p:properties>
 </file>
 
 <file path=customXml/item3.xml><?xml version="1.0" encoding="utf-8"?>
@@ -41146,26 +38160,26 @@
 </file>
 
 <file path=customXml/itemProps1.xml><?xml version="1.0" encoding="utf-8"?>
-<ds:datastoreItem xmlns:ds="http://schemas.openxmlformats.org/officeDocument/2006/customXml" ds:itemID="{B5D81437-55E6-4592-8BFD-6FB16EBAE376}">
+<ds:datastoreItem xmlns:ds="http://schemas.openxmlformats.org/officeDocument/2006/customXml" ds:itemID="{0B769155-3519-4645-94BB-865620599529}">
   <ds:schemaRefs>
-    <ds:schemaRef ds:uri="http://purl.org/dc/elements/1.1/"/>
-    <ds:schemaRef ds:uri="d1af692f-475c-46b5-a87d-a47813ac8995"/>
-    <ds:schemaRef ds:uri="http://schemas.microsoft.com/office/2006/documentManagement/types"/>
-    <ds:schemaRef ds:uri="http://schemas.microsoft.com/office/infopath/2007/PartnerControls"/>
-    <ds:schemaRef ds:uri="http://www.w3.org/XML/1998/namespace"/>
-    <ds:schemaRef ds:uri="http://purl.org/dc/terms/"/>
-    <ds:schemaRef ds:uri="http://schemas.microsoft.com/office/2006/metadata/properties"/>
-    <ds:schemaRef ds:uri="http://schemas.openxmlformats.org/package/2006/metadata/core-properties"/>
-    <ds:schemaRef ds:uri="ec38afac-11fd-4f05-b2a5-9d8ac7fc116b"/>
-    <ds:schemaRef ds:uri="http://purl.org/dc/dcmitype/"/>
+    <ds:schemaRef ds:uri="http://schemas.microsoft.com/sharepoint/v3/contenttype/forms"/>
   </ds:schemaRefs>
 </ds:datastoreItem>
 </file>
 
 <file path=customXml/itemProps2.xml><?xml version="1.0" encoding="utf-8"?>
-<ds:datastoreItem xmlns:ds="http://schemas.openxmlformats.org/officeDocument/2006/customXml" ds:itemID="{0B769155-3519-4645-94BB-865620599529}">
+<ds:datastoreItem xmlns:ds="http://schemas.openxmlformats.org/officeDocument/2006/customXml" ds:itemID="{B5D81437-55E6-4592-8BFD-6FB16EBAE376}">
   <ds:schemaRefs>
-    <ds:schemaRef ds:uri="http://schemas.microsoft.com/sharepoint/v3/contenttype/forms"/>
+    <ds:schemaRef ds:uri="http://purl.org/dc/elements/1.1/"/>
+    <ds:schemaRef ds:uri="d1af692f-475c-46b5-a87d-a47813ac8995"/>
+    <ds:schemaRef ds:uri="http://schemas.microsoft.com/office/2006/metadata/properties"/>
+    <ds:schemaRef ds:uri="http://schemas.microsoft.com/office/2006/documentManagement/types"/>
+    <ds:schemaRef ds:uri="http://www.w3.org/XML/1998/namespace"/>
+    <ds:schemaRef ds:uri="ec38afac-11fd-4f05-b2a5-9d8ac7fc116b"/>
+    <ds:schemaRef ds:uri="http://purl.org/dc/terms/"/>
+    <ds:schemaRef ds:uri="http://purl.org/dc/dcmitype/"/>
+    <ds:schemaRef ds:uri="http://schemas.microsoft.com/office/infopath/2007/PartnerControls"/>
+    <ds:schemaRef ds:uri="http://schemas.openxmlformats.org/package/2006/metadata/core-properties"/>
   </ds:schemaRefs>
 </ds:datastoreItem>
 </file>
